--- a/PPT-Animation-Samples (Part 1).pptx
+++ b/PPT-Animation-Samples (Part 1).pptx
@@ -14,6 +14,13 @@
     <p:sldId id="264" r:id="rId8"/>
     <p:sldId id="265" r:id="rId9"/>
     <p:sldId id="266" r:id="rId10"/>
+    <p:sldId id="267" r:id="rId11"/>
+    <p:sldId id="268" r:id="rId12"/>
+    <p:sldId id="271" r:id="rId13"/>
+    <p:sldId id="269" r:id="rId14"/>
+    <p:sldId id="270" r:id="rId15"/>
+    <p:sldId id="273" r:id="rId16"/>
+    <p:sldId id="272" r:id="rId17"/>
   </p:sldIdLst>
   <p:sldSz cx="12192000" cy="6858000"/>
   <p:notesSz cx="6858000" cy="9144000"/>
@@ -3440,6 +3447,3127 @@
 </p:sld>
 </file>
 
+<file path=ppt/slides/slide10.xml><?xml version="1.0" encoding="utf-8"?>
+<p:sld xmlns:a="http://schemas.openxmlformats.org/drawingml/2006/main" xmlns:r="http://schemas.openxmlformats.org/officeDocument/2006/relationships" xmlns:p="http://schemas.openxmlformats.org/presentationml/2006/main">
+  <p:cSld>
+    <p:spTree>
+      <p:nvGrpSpPr>
+        <p:cNvPr id="1" name=""/>
+        <p:cNvGrpSpPr/>
+        <p:nvPr/>
+      </p:nvGrpSpPr>
+      <p:grpSpPr>
+        <a:xfrm>
+          <a:off x="0" y="0"/>
+          <a:ext cx="0" cy="0"/>
+          <a:chOff x="0" y="0"/>
+          <a:chExt cx="0" cy="0"/>
+        </a:xfrm>
+      </p:grpSpPr>
+      <p:sp>
+        <p:nvSpPr>
+          <p:cNvPr id="10" name="标题 1">
+            <a:extLst>
+              <a:ext uri="{FF2B5EF4-FFF2-40B4-BE49-F238E27FC236}">
+                <a16:creationId xmlns:a16="http://schemas.microsoft.com/office/drawing/2014/main" id="{26E2AC48-A593-46C6-AF61-8997E0FA8C47}"/>
+              </a:ext>
+            </a:extLst>
+          </p:cNvPr>
+          <p:cNvSpPr>
+            <a:spLocks noGrp="1"/>
+          </p:cNvSpPr>
+          <p:nvPr>
+            <p:ph type="title"/>
+          </p:nvPr>
+        </p:nvSpPr>
+        <p:spPr>
+          <a:xfrm>
+            <a:off x="838200" y="365125"/>
+            <a:ext cx="10515600" cy="6091093"/>
+          </a:xfrm>
+        </p:spPr>
+        <p:txBody>
+          <a:bodyPr>
+            <a:normAutofit/>
+          </a:bodyPr>
+          <a:lstStyle/>
+          <a:p>
+            <a:r>
+              <a:rPr lang="en-US" altLang="zh-CN" sz="2200" b="1" u="sng" dirty="0"/>
+              <a:t>Sample 4  (Cont’d)</a:t>
+            </a:r>
+            <a:r>
+              <a:rPr lang="en-US" altLang="zh-CN" sz="2200" b="1" dirty="0"/>
+              <a:t>: </a:t>
+            </a:r>
+            <a:br>
+              <a:rPr lang="en-US" altLang="zh-CN" sz="2200" dirty="0"/>
+            </a:br>
+            <a:br>
+              <a:rPr lang="en-US" altLang="zh-CN" sz="2200" dirty="0"/>
+            </a:br>
+            <a:r>
+              <a:rPr lang="en-US" altLang="zh-CN" sz="2200" dirty="0"/>
+              <a:t>1. </a:t>
+            </a:r>
+            <a:r>
+              <a:rPr lang="zh-CN" altLang="en-US" sz="2200" b="1" dirty="0"/>
+              <a:t>目标：</a:t>
+            </a:r>
+            <a:r>
+              <a:rPr lang="zh-CN" altLang="en-US" sz="2200" dirty="0"/>
+              <a:t>选中所有星星，选择翻转式由远及近进入</a:t>
+            </a:r>
+            <a:br>
+              <a:rPr lang="en-US" altLang="zh-CN" sz="2200" dirty="0"/>
+            </a:br>
+            <a:r>
+              <a:rPr lang="en-US" altLang="zh-CN" sz="2200" dirty="0"/>
+              <a:t>2. </a:t>
+            </a:r>
+            <a:r>
+              <a:rPr lang="zh-CN" altLang="en-US" sz="2200" dirty="0"/>
+              <a:t>所有星星只闪烁一次存在问题，</a:t>
+            </a:r>
+            <a:r>
+              <a:rPr lang="zh-CN" altLang="en-US" sz="2200" b="1" dirty="0"/>
+              <a:t>解决方案：</a:t>
+            </a:r>
+            <a:r>
+              <a:rPr lang="zh-CN" altLang="en-US" sz="2200" dirty="0"/>
+              <a:t>点击动画窗格选择所有星星，右键点击计时选择重复直到幻灯片末尾，如下：</a:t>
+            </a:r>
+            <a:br>
+              <a:rPr lang="en-US" altLang="zh-CN" sz="2200" dirty="0"/>
+            </a:br>
+            <a:endParaRPr lang="zh-CN" altLang="en-US" sz="2200" dirty="0"/>
+          </a:p>
+        </p:txBody>
+      </p:sp>
+    </p:spTree>
+    <p:extLst>
+      <p:ext uri="{BB962C8B-B14F-4D97-AF65-F5344CB8AC3E}">
+        <p14:creationId xmlns:p14="http://schemas.microsoft.com/office/powerpoint/2010/main" val="3898945110"/>
+      </p:ext>
+    </p:extLst>
+  </p:cSld>
+  <p:clrMapOvr>
+    <a:masterClrMapping/>
+  </p:clrMapOvr>
+</p:sld>
+</file>
+
+<file path=ppt/slides/slide11.xml><?xml version="1.0" encoding="utf-8"?>
+<p:sld xmlns:a="http://schemas.openxmlformats.org/drawingml/2006/main" xmlns:r="http://schemas.openxmlformats.org/officeDocument/2006/relationships" xmlns:p="http://schemas.openxmlformats.org/presentationml/2006/main">
+  <p:cSld>
+    <p:spTree>
+      <p:nvGrpSpPr>
+        <p:cNvPr id="1" name=""/>
+        <p:cNvGrpSpPr/>
+        <p:nvPr/>
+      </p:nvGrpSpPr>
+      <p:grpSpPr>
+        <a:xfrm>
+          <a:off x="0" y="0"/>
+          <a:ext cx="0" cy="0"/>
+          <a:chOff x="0" y="0"/>
+          <a:chExt cx="0" cy="0"/>
+        </a:xfrm>
+      </p:grpSpPr>
+      <p:sp>
+        <p:nvSpPr>
+          <p:cNvPr id="2" name="标题 1">
+            <a:extLst>
+              <a:ext uri="{FF2B5EF4-FFF2-40B4-BE49-F238E27FC236}">
+                <a16:creationId xmlns:a16="http://schemas.microsoft.com/office/drawing/2014/main" id="{80FCD86E-C818-4A0A-AFFC-712C60E4E340}"/>
+              </a:ext>
+            </a:extLst>
+          </p:cNvPr>
+          <p:cNvSpPr>
+            <a:spLocks noGrp="1"/>
+          </p:cNvSpPr>
+          <p:nvPr>
+            <p:ph type="title"/>
+          </p:nvPr>
+        </p:nvSpPr>
+        <p:spPr/>
+        <p:txBody>
+          <a:bodyPr/>
+          <a:lstStyle/>
+          <a:p>
+            <a:endParaRPr lang="zh-CN" altLang="en-US"/>
+          </a:p>
+        </p:txBody>
+      </p:sp>
+      <p:pic>
+        <p:nvPicPr>
+          <p:cNvPr id="4" name="内容占位符 3">
+            <a:extLst>
+              <a:ext uri="{FF2B5EF4-FFF2-40B4-BE49-F238E27FC236}">
+                <a16:creationId xmlns:a16="http://schemas.microsoft.com/office/drawing/2014/main" id="{59D6641A-E17F-400D-8B5E-63014B7A6F5C}"/>
+              </a:ext>
+            </a:extLst>
+          </p:cNvPr>
+          <p:cNvPicPr>
+            <a:picLocks noGrp="1" noChangeAspect="1"/>
+          </p:cNvPicPr>
+          <p:nvPr>
+            <p:ph idx="1"/>
+          </p:nvPr>
+        </p:nvPicPr>
+        <p:blipFill>
+          <a:blip r:embed="rId2">
+            <a:extLst>
+              <a:ext uri="{28A0092B-C50C-407E-A947-70E740481C1C}">
+                <a14:useLocalDpi xmlns:a14="http://schemas.microsoft.com/office/drawing/2010/main" val="0"/>
+              </a:ext>
+              <a:ext uri="{96DAC541-7B7A-43D3-8B79-37D633B846F1}">
+                <asvg:svgBlip xmlns:asvg="http://schemas.microsoft.com/office/drawing/2016/SVG/main" r:embed="rId3"/>
+              </a:ext>
+            </a:extLst>
+          </a:blip>
+          <a:stretch>
+            <a:fillRect/>
+          </a:stretch>
+        </p:blipFill>
+        <p:spPr>
+          <a:xfrm>
+            <a:off x="0" y="0"/>
+            <a:ext cx="12191999" cy="6857999"/>
+          </a:xfrm>
+          <a:prstGeom prst="rect">
+            <a:avLst/>
+          </a:prstGeom>
+        </p:spPr>
+      </p:pic>
+      <p:pic>
+        <p:nvPicPr>
+          <p:cNvPr id="5" name="内容占位符 4">
+            <a:extLst>
+              <a:ext uri="{FF2B5EF4-FFF2-40B4-BE49-F238E27FC236}">
+                <a16:creationId xmlns:a16="http://schemas.microsoft.com/office/drawing/2014/main" id="{3A03731E-CCD3-44F7-9CBF-5075E2F68C83}"/>
+              </a:ext>
+            </a:extLst>
+          </p:cNvPr>
+          <p:cNvPicPr>
+            <a:picLocks noChangeAspect="1"/>
+          </p:cNvPicPr>
+          <p:nvPr/>
+        </p:nvPicPr>
+        <p:blipFill>
+          <a:blip r:embed="rId4">
+            <a:extLst>
+              <a:ext uri="{28A0092B-C50C-407E-A947-70E740481C1C}">
+                <a14:useLocalDpi xmlns:a14="http://schemas.microsoft.com/office/drawing/2010/main" val="0"/>
+              </a:ext>
+              <a:ext uri="{96DAC541-7B7A-43D3-8B79-37D633B846F1}">
+                <asvg:svgBlip xmlns:asvg="http://schemas.microsoft.com/office/drawing/2016/SVG/main" r:embed="rId5"/>
+              </a:ext>
+            </a:extLst>
+          </a:blip>
+          <a:stretch>
+            <a:fillRect/>
+          </a:stretch>
+        </p:blipFill>
+        <p:spPr>
+          <a:xfrm>
+            <a:off x="3883314" y="2830371"/>
+            <a:ext cx="4152323" cy="4152323"/>
+          </a:xfrm>
+          <a:prstGeom prst="rect">
+            <a:avLst/>
+          </a:prstGeom>
+        </p:spPr>
+      </p:pic>
+      <p:pic>
+        <p:nvPicPr>
+          <p:cNvPr id="6" name="图形 5">
+            <a:extLst>
+              <a:ext uri="{FF2B5EF4-FFF2-40B4-BE49-F238E27FC236}">
+                <a16:creationId xmlns:a16="http://schemas.microsoft.com/office/drawing/2014/main" id="{7F77AC19-EBE4-470C-B077-62804275F8E8}"/>
+              </a:ext>
+            </a:extLst>
+          </p:cNvPr>
+          <p:cNvPicPr>
+            <a:picLocks noChangeAspect="1"/>
+          </p:cNvPicPr>
+          <p:nvPr/>
+        </p:nvPicPr>
+        <p:blipFill>
+          <a:blip r:embed="rId6">
+            <a:extLst>
+              <a:ext uri="{28A0092B-C50C-407E-A947-70E740481C1C}">
+                <a14:useLocalDpi xmlns:a14="http://schemas.microsoft.com/office/drawing/2010/main" val="0"/>
+              </a:ext>
+              <a:ext uri="{96DAC541-7B7A-43D3-8B79-37D633B846F1}">
+                <asvg:svgBlip xmlns:asvg="http://schemas.microsoft.com/office/drawing/2016/SVG/main" r:embed="rId7"/>
+              </a:ext>
+            </a:extLst>
+          </a:blip>
+          <a:stretch>
+            <a:fillRect/>
+          </a:stretch>
+        </p:blipFill>
+        <p:spPr>
+          <a:xfrm>
+            <a:off x="0" y="1911927"/>
+            <a:ext cx="1015422" cy="1015422"/>
+          </a:xfrm>
+          <a:prstGeom prst="rect">
+            <a:avLst/>
+          </a:prstGeom>
+        </p:spPr>
+      </p:pic>
+      <p:pic>
+        <p:nvPicPr>
+          <p:cNvPr id="7" name="图形 6">
+            <a:extLst>
+              <a:ext uri="{FF2B5EF4-FFF2-40B4-BE49-F238E27FC236}">
+                <a16:creationId xmlns:a16="http://schemas.microsoft.com/office/drawing/2014/main" id="{9647A57A-4209-49C2-BCE4-9BA26C70115A}"/>
+              </a:ext>
+            </a:extLst>
+          </p:cNvPr>
+          <p:cNvPicPr>
+            <a:picLocks noChangeAspect="1"/>
+          </p:cNvPicPr>
+          <p:nvPr/>
+        </p:nvPicPr>
+        <p:blipFill>
+          <a:blip r:embed="rId8">
+            <a:extLst>
+              <a:ext uri="{28A0092B-C50C-407E-A947-70E740481C1C}">
+                <a14:useLocalDpi xmlns:a14="http://schemas.microsoft.com/office/drawing/2010/main" val="0"/>
+              </a:ext>
+              <a:ext uri="{96DAC541-7B7A-43D3-8B79-37D633B846F1}">
+                <asvg:svgBlip xmlns:asvg="http://schemas.microsoft.com/office/drawing/2016/SVG/main" r:embed="rId9"/>
+              </a:ext>
+            </a:extLst>
+          </a:blip>
+          <a:stretch>
+            <a:fillRect/>
+          </a:stretch>
+        </p:blipFill>
+        <p:spPr>
+          <a:xfrm>
+            <a:off x="117765" y="3291034"/>
+            <a:ext cx="639618" cy="639618"/>
+          </a:xfrm>
+          <a:prstGeom prst="rect">
+            <a:avLst/>
+          </a:prstGeom>
+        </p:spPr>
+      </p:pic>
+      <p:pic>
+        <p:nvPicPr>
+          <p:cNvPr id="8" name="图形 7">
+            <a:extLst>
+              <a:ext uri="{FF2B5EF4-FFF2-40B4-BE49-F238E27FC236}">
+                <a16:creationId xmlns:a16="http://schemas.microsoft.com/office/drawing/2014/main" id="{5BC81229-2A3F-48AA-940A-604C12427E42}"/>
+              </a:ext>
+            </a:extLst>
+          </p:cNvPr>
+          <p:cNvPicPr>
+            <a:picLocks noChangeAspect="1"/>
+          </p:cNvPicPr>
+          <p:nvPr/>
+        </p:nvPicPr>
+        <p:blipFill>
+          <a:blip r:embed="rId8">
+            <a:extLst>
+              <a:ext uri="{28A0092B-C50C-407E-A947-70E740481C1C}">
+                <a14:useLocalDpi xmlns:a14="http://schemas.microsoft.com/office/drawing/2010/main" val="0"/>
+              </a:ext>
+              <a:ext uri="{96DAC541-7B7A-43D3-8B79-37D633B846F1}">
+                <asvg:svgBlip xmlns:asvg="http://schemas.microsoft.com/office/drawing/2016/SVG/main" r:embed="rId9"/>
+              </a:ext>
+            </a:extLst>
+          </a:blip>
+          <a:stretch>
+            <a:fillRect/>
+          </a:stretch>
+        </p:blipFill>
+        <p:spPr>
+          <a:xfrm>
+            <a:off x="1609438" y="2510562"/>
+            <a:ext cx="639618" cy="639618"/>
+          </a:xfrm>
+          <a:prstGeom prst="rect">
+            <a:avLst/>
+          </a:prstGeom>
+        </p:spPr>
+      </p:pic>
+      <p:pic>
+        <p:nvPicPr>
+          <p:cNvPr id="9" name="图形 8">
+            <a:extLst>
+              <a:ext uri="{FF2B5EF4-FFF2-40B4-BE49-F238E27FC236}">
+                <a16:creationId xmlns:a16="http://schemas.microsoft.com/office/drawing/2014/main" id="{37B32407-6102-4601-BFC2-2607B690038A}"/>
+              </a:ext>
+            </a:extLst>
+          </p:cNvPr>
+          <p:cNvPicPr>
+            <a:picLocks noChangeAspect="1"/>
+          </p:cNvPicPr>
+          <p:nvPr/>
+        </p:nvPicPr>
+        <p:blipFill>
+          <a:blip r:embed="rId8">
+            <a:extLst>
+              <a:ext uri="{28A0092B-C50C-407E-A947-70E740481C1C}">
+                <a14:useLocalDpi xmlns:a14="http://schemas.microsoft.com/office/drawing/2010/main" val="0"/>
+              </a:ext>
+              <a:ext uri="{96DAC541-7B7A-43D3-8B79-37D633B846F1}">
+                <asvg:svgBlip xmlns:asvg="http://schemas.microsoft.com/office/drawing/2016/SVG/main" r:embed="rId9"/>
+              </a:ext>
+            </a:extLst>
+          </a:blip>
+          <a:stretch>
+            <a:fillRect/>
+          </a:stretch>
+        </p:blipFill>
+        <p:spPr>
+          <a:xfrm>
+            <a:off x="11552382" y="2927349"/>
+            <a:ext cx="639618" cy="639618"/>
+          </a:xfrm>
+          <a:prstGeom prst="rect">
+            <a:avLst/>
+          </a:prstGeom>
+        </p:spPr>
+      </p:pic>
+      <p:pic>
+        <p:nvPicPr>
+          <p:cNvPr id="10" name="图形 9">
+            <a:extLst>
+              <a:ext uri="{FF2B5EF4-FFF2-40B4-BE49-F238E27FC236}">
+                <a16:creationId xmlns:a16="http://schemas.microsoft.com/office/drawing/2014/main" id="{FCD06D6F-45CC-4BB4-B6F6-8375499D551B}"/>
+              </a:ext>
+            </a:extLst>
+          </p:cNvPr>
+          <p:cNvPicPr>
+            <a:picLocks noChangeAspect="1"/>
+          </p:cNvPicPr>
+          <p:nvPr/>
+        </p:nvPicPr>
+        <p:blipFill>
+          <a:blip r:embed="rId10">
+            <a:extLst>
+              <a:ext uri="{28A0092B-C50C-407E-A947-70E740481C1C}">
+                <a14:useLocalDpi xmlns:a14="http://schemas.microsoft.com/office/drawing/2010/main" val="0"/>
+              </a:ext>
+              <a:ext uri="{96DAC541-7B7A-43D3-8B79-37D633B846F1}">
+                <asvg:svgBlip xmlns:asvg="http://schemas.microsoft.com/office/drawing/2016/SVG/main" r:embed="rId11"/>
+              </a:ext>
+            </a:extLst>
+          </a:blip>
+          <a:stretch>
+            <a:fillRect/>
+          </a:stretch>
+        </p:blipFill>
+        <p:spPr>
+          <a:xfrm>
+            <a:off x="3093028" y="2065411"/>
+            <a:ext cx="195118" cy="195118"/>
+          </a:xfrm>
+          <a:prstGeom prst="rect">
+            <a:avLst/>
+          </a:prstGeom>
+        </p:spPr>
+      </p:pic>
+      <p:pic>
+        <p:nvPicPr>
+          <p:cNvPr id="11" name="图形 10">
+            <a:extLst>
+              <a:ext uri="{FF2B5EF4-FFF2-40B4-BE49-F238E27FC236}">
+                <a16:creationId xmlns:a16="http://schemas.microsoft.com/office/drawing/2014/main" id="{D1EA145A-6A91-4942-97EF-2E33D02454EC}"/>
+              </a:ext>
+            </a:extLst>
+          </p:cNvPr>
+          <p:cNvPicPr>
+            <a:picLocks noChangeAspect="1"/>
+          </p:cNvPicPr>
+          <p:nvPr/>
+        </p:nvPicPr>
+        <p:blipFill>
+          <a:blip r:embed="rId10">
+            <a:extLst>
+              <a:ext uri="{28A0092B-C50C-407E-A947-70E740481C1C}">
+                <a14:useLocalDpi xmlns:a14="http://schemas.microsoft.com/office/drawing/2010/main" val="0"/>
+              </a:ext>
+              <a:ext uri="{96DAC541-7B7A-43D3-8B79-37D633B846F1}">
+                <asvg:svgBlip xmlns:asvg="http://schemas.microsoft.com/office/drawing/2016/SVG/main" r:embed="rId11"/>
+              </a:ext>
+            </a:extLst>
+          </a:blip>
+          <a:stretch>
+            <a:fillRect/>
+          </a:stretch>
+        </p:blipFill>
+        <p:spPr>
+          <a:xfrm>
+            <a:off x="7512628" y="2162970"/>
+            <a:ext cx="195118" cy="195118"/>
+          </a:xfrm>
+          <a:prstGeom prst="rect">
+            <a:avLst/>
+          </a:prstGeom>
+        </p:spPr>
+      </p:pic>
+      <p:pic>
+        <p:nvPicPr>
+          <p:cNvPr id="12" name="图形 11">
+            <a:extLst>
+              <a:ext uri="{FF2B5EF4-FFF2-40B4-BE49-F238E27FC236}">
+                <a16:creationId xmlns:a16="http://schemas.microsoft.com/office/drawing/2014/main" id="{1114A46C-3004-4909-8D0F-75CFF61CCA23}"/>
+              </a:ext>
+            </a:extLst>
+          </p:cNvPr>
+          <p:cNvPicPr>
+            <a:picLocks noChangeAspect="1"/>
+          </p:cNvPicPr>
+          <p:nvPr/>
+        </p:nvPicPr>
+        <p:blipFill>
+          <a:blip r:embed="rId10">
+            <a:extLst>
+              <a:ext uri="{28A0092B-C50C-407E-A947-70E740481C1C}">
+                <a14:useLocalDpi xmlns:a14="http://schemas.microsoft.com/office/drawing/2010/main" val="0"/>
+              </a:ext>
+              <a:ext uri="{96DAC541-7B7A-43D3-8B79-37D633B846F1}">
+                <asvg:svgBlip xmlns:asvg="http://schemas.microsoft.com/office/drawing/2016/SVG/main" r:embed="rId11"/>
+              </a:ext>
+            </a:extLst>
+          </a:blip>
+          <a:stretch>
+            <a:fillRect/>
+          </a:stretch>
+        </p:blipFill>
+        <p:spPr>
+          <a:xfrm>
+            <a:off x="4337049" y="2927349"/>
+            <a:ext cx="195118" cy="195118"/>
+          </a:xfrm>
+          <a:prstGeom prst="rect">
+            <a:avLst/>
+          </a:prstGeom>
+        </p:spPr>
+      </p:pic>
+      <p:pic>
+        <p:nvPicPr>
+          <p:cNvPr id="13" name="图形 12">
+            <a:extLst>
+              <a:ext uri="{FF2B5EF4-FFF2-40B4-BE49-F238E27FC236}">
+                <a16:creationId xmlns:a16="http://schemas.microsoft.com/office/drawing/2014/main" id="{7AEE3D8D-5771-4333-9CFE-194A381A7D89}"/>
+              </a:ext>
+            </a:extLst>
+          </p:cNvPr>
+          <p:cNvPicPr>
+            <a:picLocks noChangeAspect="1"/>
+          </p:cNvPicPr>
+          <p:nvPr/>
+        </p:nvPicPr>
+        <p:blipFill>
+          <a:blip r:embed="rId10">
+            <a:extLst>
+              <a:ext uri="{28A0092B-C50C-407E-A947-70E740481C1C}">
+                <a14:useLocalDpi xmlns:a14="http://schemas.microsoft.com/office/drawing/2010/main" val="0"/>
+              </a:ext>
+              <a:ext uri="{96DAC541-7B7A-43D3-8B79-37D633B846F1}">
+                <asvg:svgBlip xmlns:asvg="http://schemas.microsoft.com/office/drawing/2016/SVG/main" r:embed="rId11"/>
+              </a:ext>
+            </a:extLst>
+          </a:blip>
+          <a:stretch>
+            <a:fillRect/>
+          </a:stretch>
+        </p:blipFill>
+        <p:spPr>
+          <a:xfrm>
+            <a:off x="9355283" y="2954769"/>
+            <a:ext cx="195118" cy="195118"/>
+          </a:xfrm>
+          <a:prstGeom prst="rect">
+            <a:avLst/>
+          </a:prstGeom>
+        </p:spPr>
+      </p:pic>
+      <p:pic>
+        <p:nvPicPr>
+          <p:cNvPr id="14" name="图形 13">
+            <a:extLst>
+              <a:ext uri="{FF2B5EF4-FFF2-40B4-BE49-F238E27FC236}">
+                <a16:creationId xmlns:a16="http://schemas.microsoft.com/office/drawing/2014/main" id="{3F9F8CFD-1AFE-4DBD-8D71-36C777780F18}"/>
+              </a:ext>
+            </a:extLst>
+          </p:cNvPr>
+          <p:cNvPicPr>
+            <a:picLocks noChangeAspect="1"/>
+          </p:cNvPicPr>
+          <p:nvPr/>
+        </p:nvPicPr>
+        <p:blipFill>
+          <a:blip r:embed="rId10">
+            <a:extLst>
+              <a:ext uri="{28A0092B-C50C-407E-A947-70E740481C1C}">
+                <a14:useLocalDpi xmlns:a14="http://schemas.microsoft.com/office/drawing/2010/main" val="0"/>
+              </a:ext>
+              <a:ext uri="{96DAC541-7B7A-43D3-8B79-37D633B846F1}">
+                <asvg:svgBlip xmlns:asvg="http://schemas.microsoft.com/office/drawing/2016/SVG/main" r:embed="rId11"/>
+              </a:ext>
+            </a:extLst>
+          </a:blip>
+          <a:stretch>
+            <a:fillRect/>
+          </a:stretch>
+        </p:blipFill>
+        <p:spPr>
+          <a:xfrm>
+            <a:off x="10749973" y="1920874"/>
+            <a:ext cx="195118" cy="195118"/>
+          </a:xfrm>
+          <a:prstGeom prst="rect">
+            <a:avLst/>
+          </a:prstGeom>
+        </p:spPr>
+      </p:pic>
+    </p:spTree>
+    <p:extLst>
+      <p:ext uri="{BB962C8B-B14F-4D97-AF65-F5344CB8AC3E}">
+        <p14:creationId xmlns:p14="http://schemas.microsoft.com/office/powerpoint/2010/main" val="284484692"/>
+      </p:ext>
+    </p:extLst>
+  </p:cSld>
+  <p:clrMapOvr>
+    <a:masterClrMapping/>
+  </p:clrMapOvr>
+  <p:timing>
+    <p:tnLst>
+      <p:par>
+        <p:cTn id="1" dur="indefinite" restart="never" nodeType="tmRoot">
+          <p:childTnLst>
+            <p:seq concurrent="1" nextAc="seek">
+              <p:cTn id="2" dur="indefinite" nodeType="mainSeq">
+                <p:childTnLst>
+                  <p:par>
+                    <p:cTn id="3" fill="hold">
+                      <p:stCondLst>
+                        <p:cond delay="indefinite"/>
+                      </p:stCondLst>
+                      <p:childTnLst>
+                        <p:par>
+                          <p:cTn id="4" fill="hold">
+                            <p:stCondLst>
+                              <p:cond delay="0"/>
+                            </p:stCondLst>
+                            <p:childTnLst>
+                              <p:par>
+                                <p:cTn id="5" presetID="31" presetClass="entr" presetSubtype="0" repeatCount="indefinite" fill="hold" nodeType="clickEffect">
+                                  <p:stCondLst>
+                                    <p:cond delay="6400"/>
+                                  </p:stCondLst>
+                                  <p:childTnLst>
+                                    <p:set>
+                                      <p:cBhvr>
+                                        <p:cTn id="6" dur="1" fill="hold">
+                                          <p:stCondLst>
+                                            <p:cond delay="0"/>
+                                          </p:stCondLst>
+                                        </p:cTn>
+                                        <p:tgtEl>
+                                          <p:spTgt spid="10"/>
+                                        </p:tgtEl>
+                                        <p:attrNameLst>
+                                          <p:attrName>style.visibility</p:attrName>
+                                        </p:attrNameLst>
+                                      </p:cBhvr>
+                                      <p:to>
+                                        <p:strVal val="visible"/>
+                                      </p:to>
+                                    </p:set>
+                                    <p:anim calcmode="lin" valueType="num">
+                                      <p:cBhvr>
+                                        <p:cTn id="7" dur="1000" fill="hold"/>
+                                        <p:tgtEl>
+                                          <p:spTgt spid="10"/>
+                                        </p:tgtEl>
+                                        <p:attrNameLst>
+                                          <p:attrName>ppt_w</p:attrName>
+                                        </p:attrNameLst>
+                                      </p:cBhvr>
+                                      <p:tavLst>
+                                        <p:tav tm="0">
+                                          <p:val>
+                                            <p:fltVal val="0"/>
+                                          </p:val>
+                                        </p:tav>
+                                        <p:tav tm="100000">
+                                          <p:val>
+                                            <p:strVal val="#ppt_w"/>
+                                          </p:val>
+                                        </p:tav>
+                                      </p:tavLst>
+                                    </p:anim>
+                                    <p:anim calcmode="lin" valueType="num">
+                                      <p:cBhvr>
+                                        <p:cTn id="8" dur="1000" fill="hold"/>
+                                        <p:tgtEl>
+                                          <p:spTgt spid="10"/>
+                                        </p:tgtEl>
+                                        <p:attrNameLst>
+                                          <p:attrName>ppt_h</p:attrName>
+                                        </p:attrNameLst>
+                                      </p:cBhvr>
+                                      <p:tavLst>
+                                        <p:tav tm="0">
+                                          <p:val>
+                                            <p:fltVal val="0"/>
+                                          </p:val>
+                                        </p:tav>
+                                        <p:tav tm="100000">
+                                          <p:val>
+                                            <p:strVal val="#ppt_h"/>
+                                          </p:val>
+                                        </p:tav>
+                                      </p:tavLst>
+                                    </p:anim>
+                                    <p:anim calcmode="lin" valueType="num">
+                                      <p:cBhvr>
+                                        <p:cTn id="9" dur="1000" fill="hold"/>
+                                        <p:tgtEl>
+                                          <p:spTgt spid="10"/>
+                                        </p:tgtEl>
+                                        <p:attrNameLst>
+                                          <p:attrName>style.rotation</p:attrName>
+                                        </p:attrNameLst>
+                                      </p:cBhvr>
+                                      <p:tavLst>
+                                        <p:tav tm="0">
+                                          <p:val>
+                                            <p:fltVal val="90"/>
+                                          </p:val>
+                                        </p:tav>
+                                        <p:tav tm="100000">
+                                          <p:val>
+                                            <p:fltVal val="0"/>
+                                          </p:val>
+                                        </p:tav>
+                                      </p:tavLst>
+                                    </p:anim>
+                                    <p:animEffect transition="in" filter="fade">
+                                      <p:cBhvr>
+                                        <p:cTn id="10" dur="1000"/>
+                                        <p:tgtEl>
+                                          <p:spTgt spid="10"/>
+                                        </p:tgtEl>
+                                      </p:cBhvr>
+                                    </p:animEffect>
+                                  </p:childTnLst>
+                                </p:cTn>
+                              </p:par>
+                              <p:par>
+                                <p:cTn id="11" presetID="31" presetClass="entr" presetSubtype="0" repeatCount="indefinite" fill="hold" nodeType="withEffect">
+                                  <p:stCondLst>
+                                    <p:cond delay="0"/>
+                                  </p:stCondLst>
+                                  <p:childTnLst>
+                                    <p:set>
+                                      <p:cBhvr>
+                                        <p:cTn id="12" dur="1" fill="hold">
+                                          <p:stCondLst>
+                                            <p:cond delay="0"/>
+                                          </p:stCondLst>
+                                        </p:cTn>
+                                        <p:tgtEl>
+                                          <p:spTgt spid="12"/>
+                                        </p:tgtEl>
+                                        <p:attrNameLst>
+                                          <p:attrName>style.visibility</p:attrName>
+                                        </p:attrNameLst>
+                                      </p:cBhvr>
+                                      <p:to>
+                                        <p:strVal val="visible"/>
+                                      </p:to>
+                                    </p:set>
+                                    <p:anim calcmode="lin" valueType="num">
+                                      <p:cBhvr>
+                                        <p:cTn id="13" dur="1000" fill="hold"/>
+                                        <p:tgtEl>
+                                          <p:spTgt spid="12"/>
+                                        </p:tgtEl>
+                                        <p:attrNameLst>
+                                          <p:attrName>ppt_w</p:attrName>
+                                        </p:attrNameLst>
+                                      </p:cBhvr>
+                                      <p:tavLst>
+                                        <p:tav tm="0">
+                                          <p:val>
+                                            <p:fltVal val="0"/>
+                                          </p:val>
+                                        </p:tav>
+                                        <p:tav tm="100000">
+                                          <p:val>
+                                            <p:strVal val="#ppt_w"/>
+                                          </p:val>
+                                        </p:tav>
+                                      </p:tavLst>
+                                    </p:anim>
+                                    <p:anim calcmode="lin" valueType="num">
+                                      <p:cBhvr>
+                                        <p:cTn id="14" dur="1000" fill="hold"/>
+                                        <p:tgtEl>
+                                          <p:spTgt spid="12"/>
+                                        </p:tgtEl>
+                                        <p:attrNameLst>
+                                          <p:attrName>ppt_h</p:attrName>
+                                        </p:attrNameLst>
+                                      </p:cBhvr>
+                                      <p:tavLst>
+                                        <p:tav tm="0">
+                                          <p:val>
+                                            <p:fltVal val="0"/>
+                                          </p:val>
+                                        </p:tav>
+                                        <p:tav tm="100000">
+                                          <p:val>
+                                            <p:strVal val="#ppt_h"/>
+                                          </p:val>
+                                        </p:tav>
+                                      </p:tavLst>
+                                    </p:anim>
+                                    <p:anim calcmode="lin" valueType="num">
+                                      <p:cBhvr>
+                                        <p:cTn id="15" dur="1000" fill="hold"/>
+                                        <p:tgtEl>
+                                          <p:spTgt spid="12"/>
+                                        </p:tgtEl>
+                                        <p:attrNameLst>
+                                          <p:attrName>style.rotation</p:attrName>
+                                        </p:attrNameLst>
+                                      </p:cBhvr>
+                                      <p:tavLst>
+                                        <p:tav tm="0">
+                                          <p:val>
+                                            <p:fltVal val="90"/>
+                                          </p:val>
+                                        </p:tav>
+                                        <p:tav tm="100000">
+                                          <p:val>
+                                            <p:fltVal val="0"/>
+                                          </p:val>
+                                        </p:tav>
+                                      </p:tavLst>
+                                    </p:anim>
+                                    <p:animEffect transition="in" filter="fade">
+                                      <p:cBhvr>
+                                        <p:cTn id="16" dur="1000"/>
+                                        <p:tgtEl>
+                                          <p:spTgt spid="12"/>
+                                        </p:tgtEl>
+                                      </p:cBhvr>
+                                    </p:animEffect>
+                                  </p:childTnLst>
+                                </p:cTn>
+                              </p:par>
+                              <p:par>
+                                <p:cTn id="17" presetID="31" presetClass="entr" presetSubtype="0" repeatCount="indefinite" fill="hold" nodeType="withEffect">
+                                  <p:stCondLst>
+                                    <p:cond delay="2100"/>
+                                  </p:stCondLst>
+                                  <p:childTnLst>
+                                    <p:set>
+                                      <p:cBhvr>
+                                        <p:cTn id="18" dur="1" fill="hold">
+                                          <p:stCondLst>
+                                            <p:cond delay="0"/>
+                                          </p:stCondLst>
+                                        </p:cTn>
+                                        <p:tgtEl>
+                                          <p:spTgt spid="11"/>
+                                        </p:tgtEl>
+                                        <p:attrNameLst>
+                                          <p:attrName>style.visibility</p:attrName>
+                                        </p:attrNameLst>
+                                      </p:cBhvr>
+                                      <p:to>
+                                        <p:strVal val="visible"/>
+                                      </p:to>
+                                    </p:set>
+                                    <p:anim calcmode="lin" valueType="num">
+                                      <p:cBhvr>
+                                        <p:cTn id="19" dur="1000" fill="hold"/>
+                                        <p:tgtEl>
+                                          <p:spTgt spid="11"/>
+                                        </p:tgtEl>
+                                        <p:attrNameLst>
+                                          <p:attrName>ppt_w</p:attrName>
+                                        </p:attrNameLst>
+                                      </p:cBhvr>
+                                      <p:tavLst>
+                                        <p:tav tm="0">
+                                          <p:val>
+                                            <p:fltVal val="0"/>
+                                          </p:val>
+                                        </p:tav>
+                                        <p:tav tm="100000">
+                                          <p:val>
+                                            <p:strVal val="#ppt_w"/>
+                                          </p:val>
+                                        </p:tav>
+                                      </p:tavLst>
+                                    </p:anim>
+                                    <p:anim calcmode="lin" valueType="num">
+                                      <p:cBhvr>
+                                        <p:cTn id="20" dur="1000" fill="hold"/>
+                                        <p:tgtEl>
+                                          <p:spTgt spid="11"/>
+                                        </p:tgtEl>
+                                        <p:attrNameLst>
+                                          <p:attrName>ppt_h</p:attrName>
+                                        </p:attrNameLst>
+                                      </p:cBhvr>
+                                      <p:tavLst>
+                                        <p:tav tm="0">
+                                          <p:val>
+                                            <p:fltVal val="0"/>
+                                          </p:val>
+                                        </p:tav>
+                                        <p:tav tm="100000">
+                                          <p:val>
+                                            <p:strVal val="#ppt_h"/>
+                                          </p:val>
+                                        </p:tav>
+                                      </p:tavLst>
+                                    </p:anim>
+                                    <p:anim calcmode="lin" valueType="num">
+                                      <p:cBhvr>
+                                        <p:cTn id="21" dur="1000" fill="hold"/>
+                                        <p:tgtEl>
+                                          <p:spTgt spid="11"/>
+                                        </p:tgtEl>
+                                        <p:attrNameLst>
+                                          <p:attrName>style.rotation</p:attrName>
+                                        </p:attrNameLst>
+                                      </p:cBhvr>
+                                      <p:tavLst>
+                                        <p:tav tm="0">
+                                          <p:val>
+                                            <p:fltVal val="90"/>
+                                          </p:val>
+                                        </p:tav>
+                                        <p:tav tm="100000">
+                                          <p:val>
+                                            <p:fltVal val="0"/>
+                                          </p:val>
+                                        </p:tav>
+                                      </p:tavLst>
+                                    </p:anim>
+                                    <p:animEffect transition="in" filter="fade">
+                                      <p:cBhvr>
+                                        <p:cTn id="22" dur="1000"/>
+                                        <p:tgtEl>
+                                          <p:spTgt spid="11"/>
+                                        </p:tgtEl>
+                                      </p:cBhvr>
+                                    </p:animEffect>
+                                  </p:childTnLst>
+                                </p:cTn>
+                              </p:par>
+                              <p:par>
+                                <p:cTn id="23" presetID="31" presetClass="entr" presetSubtype="0" repeatCount="indefinite" fill="hold" nodeType="withEffect">
+                                  <p:stCondLst>
+                                    <p:cond delay="3200"/>
+                                  </p:stCondLst>
+                                  <p:childTnLst>
+                                    <p:set>
+                                      <p:cBhvr>
+                                        <p:cTn id="24" dur="1" fill="hold">
+                                          <p:stCondLst>
+                                            <p:cond delay="0"/>
+                                          </p:stCondLst>
+                                        </p:cTn>
+                                        <p:tgtEl>
+                                          <p:spTgt spid="13"/>
+                                        </p:tgtEl>
+                                        <p:attrNameLst>
+                                          <p:attrName>style.visibility</p:attrName>
+                                        </p:attrNameLst>
+                                      </p:cBhvr>
+                                      <p:to>
+                                        <p:strVal val="visible"/>
+                                      </p:to>
+                                    </p:set>
+                                    <p:anim calcmode="lin" valueType="num">
+                                      <p:cBhvr>
+                                        <p:cTn id="25" dur="1000" fill="hold"/>
+                                        <p:tgtEl>
+                                          <p:spTgt spid="13"/>
+                                        </p:tgtEl>
+                                        <p:attrNameLst>
+                                          <p:attrName>ppt_w</p:attrName>
+                                        </p:attrNameLst>
+                                      </p:cBhvr>
+                                      <p:tavLst>
+                                        <p:tav tm="0">
+                                          <p:val>
+                                            <p:fltVal val="0"/>
+                                          </p:val>
+                                        </p:tav>
+                                        <p:tav tm="100000">
+                                          <p:val>
+                                            <p:strVal val="#ppt_w"/>
+                                          </p:val>
+                                        </p:tav>
+                                      </p:tavLst>
+                                    </p:anim>
+                                    <p:anim calcmode="lin" valueType="num">
+                                      <p:cBhvr>
+                                        <p:cTn id="26" dur="1000" fill="hold"/>
+                                        <p:tgtEl>
+                                          <p:spTgt spid="13"/>
+                                        </p:tgtEl>
+                                        <p:attrNameLst>
+                                          <p:attrName>ppt_h</p:attrName>
+                                        </p:attrNameLst>
+                                      </p:cBhvr>
+                                      <p:tavLst>
+                                        <p:tav tm="0">
+                                          <p:val>
+                                            <p:fltVal val="0"/>
+                                          </p:val>
+                                        </p:tav>
+                                        <p:tav tm="100000">
+                                          <p:val>
+                                            <p:strVal val="#ppt_h"/>
+                                          </p:val>
+                                        </p:tav>
+                                      </p:tavLst>
+                                    </p:anim>
+                                    <p:anim calcmode="lin" valueType="num">
+                                      <p:cBhvr>
+                                        <p:cTn id="27" dur="1000" fill="hold"/>
+                                        <p:tgtEl>
+                                          <p:spTgt spid="13"/>
+                                        </p:tgtEl>
+                                        <p:attrNameLst>
+                                          <p:attrName>style.rotation</p:attrName>
+                                        </p:attrNameLst>
+                                      </p:cBhvr>
+                                      <p:tavLst>
+                                        <p:tav tm="0">
+                                          <p:val>
+                                            <p:fltVal val="90"/>
+                                          </p:val>
+                                        </p:tav>
+                                        <p:tav tm="100000">
+                                          <p:val>
+                                            <p:fltVal val="0"/>
+                                          </p:val>
+                                        </p:tav>
+                                      </p:tavLst>
+                                    </p:anim>
+                                    <p:animEffect transition="in" filter="fade">
+                                      <p:cBhvr>
+                                        <p:cTn id="28" dur="1000"/>
+                                        <p:tgtEl>
+                                          <p:spTgt spid="13"/>
+                                        </p:tgtEl>
+                                      </p:cBhvr>
+                                    </p:animEffect>
+                                  </p:childTnLst>
+                                </p:cTn>
+                              </p:par>
+                              <p:par>
+                                <p:cTn id="29" presetID="31" presetClass="entr" presetSubtype="0" repeatCount="indefinite" fill="hold" nodeType="withEffect">
+                                  <p:stCondLst>
+                                    <p:cond delay="5000"/>
+                                  </p:stCondLst>
+                                  <p:childTnLst>
+                                    <p:set>
+                                      <p:cBhvr>
+                                        <p:cTn id="30" dur="1" fill="hold">
+                                          <p:stCondLst>
+                                            <p:cond delay="0"/>
+                                          </p:stCondLst>
+                                        </p:cTn>
+                                        <p:tgtEl>
+                                          <p:spTgt spid="14"/>
+                                        </p:tgtEl>
+                                        <p:attrNameLst>
+                                          <p:attrName>style.visibility</p:attrName>
+                                        </p:attrNameLst>
+                                      </p:cBhvr>
+                                      <p:to>
+                                        <p:strVal val="visible"/>
+                                      </p:to>
+                                    </p:set>
+                                    <p:anim calcmode="lin" valueType="num">
+                                      <p:cBhvr>
+                                        <p:cTn id="31" dur="1000" fill="hold"/>
+                                        <p:tgtEl>
+                                          <p:spTgt spid="14"/>
+                                        </p:tgtEl>
+                                        <p:attrNameLst>
+                                          <p:attrName>ppt_w</p:attrName>
+                                        </p:attrNameLst>
+                                      </p:cBhvr>
+                                      <p:tavLst>
+                                        <p:tav tm="0">
+                                          <p:val>
+                                            <p:fltVal val="0"/>
+                                          </p:val>
+                                        </p:tav>
+                                        <p:tav tm="100000">
+                                          <p:val>
+                                            <p:strVal val="#ppt_w"/>
+                                          </p:val>
+                                        </p:tav>
+                                      </p:tavLst>
+                                    </p:anim>
+                                    <p:anim calcmode="lin" valueType="num">
+                                      <p:cBhvr>
+                                        <p:cTn id="32" dur="1000" fill="hold"/>
+                                        <p:tgtEl>
+                                          <p:spTgt spid="14"/>
+                                        </p:tgtEl>
+                                        <p:attrNameLst>
+                                          <p:attrName>ppt_h</p:attrName>
+                                        </p:attrNameLst>
+                                      </p:cBhvr>
+                                      <p:tavLst>
+                                        <p:tav tm="0">
+                                          <p:val>
+                                            <p:fltVal val="0"/>
+                                          </p:val>
+                                        </p:tav>
+                                        <p:tav tm="100000">
+                                          <p:val>
+                                            <p:strVal val="#ppt_h"/>
+                                          </p:val>
+                                        </p:tav>
+                                      </p:tavLst>
+                                    </p:anim>
+                                    <p:anim calcmode="lin" valueType="num">
+                                      <p:cBhvr>
+                                        <p:cTn id="33" dur="1000" fill="hold"/>
+                                        <p:tgtEl>
+                                          <p:spTgt spid="14"/>
+                                        </p:tgtEl>
+                                        <p:attrNameLst>
+                                          <p:attrName>style.rotation</p:attrName>
+                                        </p:attrNameLst>
+                                      </p:cBhvr>
+                                      <p:tavLst>
+                                        <p:tav tm="0">
+                                          <p:val>
+                                            <p:fltVal val="90"/>
+                                          </p:val>
+                                        </p:tav>
+                                        <p:tav tm="100000">
+                                          <p:val>
+                                            <p:fltVal val="0"/>
+                                          </p:val>
+                                        </p:tav>
+                                      </p:tavLst>
+                                    </p:anim>
+                                    <p:animEffect transition="in" filter="fade">
+                                      <p:cBhvr>
+                                        <p:cTn id="34" dur="1000"/>
+                                        <p:tgtEl>
+                                          <p:spTgt spid="14"/>
+                                        </p:tgtEl>
+                                      </p:cBhvr>
+                                    </p:animEffect>
+                                  </p:childTnLst>
+                                </p:cTn>
+                              </p:par>
+                            </p:childTnLst>
+                          </p:cTn>
+                        </p:par>
+                      </p:childTnLst>
+                    </p:cTn>
+                  </p:par>
+                </p:childTnLst>
+              </p:cTn>
+              <p:prevCondLst>
+                <p:cond evt="onPrev" delay="0">
+                  <p:tgtEl>
+                    <p:sldTgt/>
+                  </p:tgtEl>
+                </p:cond>
+              </p:prevCondLst>
+              <p:nextCondLst>
+                <p:cond evt="onNext" delay="0">
+                  <p:tgtEl>
+                    <p:sldTgt/>
+                  </p:tgtEl>
+                </p:cond>
+              </p:nextCondLst>
+            </p:seq>
+          </p:childTnLst>
+        </p:cTn>
+      </p:par>
+    </p:tnLst>
+  </p:timing>
+</p:sld>
+</file>
+
+<file path=ppt/slides/slide12.xml><?xml version="1.0" encoding="utf-8"?>
+<p:sld xmlns:a="http://schemas.openxmlformats.org/drawingml/2006/main" xmlns:r="http://schemas.openxmlformats.org/officeDocument/2006/relationships" xmlns:p="http://schemas.openxmlformats.org/presentationml/2006/main">
+  <p:cSld>
+    <p:spTree>
+      <p:nvGrpSpPr>
+        <p:cNvPr id="1" name=""/>
+        <p:cNvGrpSpPr/>
+        <p:nvPr/>
+      </p:nvGrpSpPr>
+      <p:grpSpPr>
+        <a:xfrm>
+          <a:off x="0" y="0"/>
+          <a:ext cx="0" cy="0"/>
+          <a:chOff x="0" y="0"/>
+          <a:chExt cx="0" cy="0"/>
+        </a:xfrm>
+      </p:grpSpPr>
+      <p:sp>
+        <p:nvSpPr>
+          <p:cNvPr id="2" name="标题 1">
+            <a:extLst>
+              <a:ext uri="{FF2B5EF4-FFF2-40B4-BE49-F238E27FC236}">
+                <a16:creationId xmlns:a16="http://schemas.microsoft.com/office/drawing/2014/main" id="{80FCD86E-C818-4A0A-AFFC-712C60E4E340}"/>
+              </a:ext>
+            </a:extLst>
+          </p:cNvPr>
+          <p:cNvSpPr>
+            <a:spLocks noGrp="1"/>
+          </p:cNvSpPr>
+          <p:nvPr>
+            <p:ph type="title"/>
+          </p:nvPr>
+        </p:nvSpPr>
+        <p:spPr/>
+        <p:txBody>
+          <a:bodyPr/>
+          <a:lstStyle/>
+          <a:p>
+            <a:endParaRPr lang="zh-CN" altLang="en-US"/>
+          </a:p>
+        </p:txBody>
+      </p:sp>
+      <p:pic>
+        <p:nvPicPr>
+          <p:cNvPr id="4" name="内容占位符 3">
+            <a:extLst>
+              <a:ext uri="{FF2B5EF4-FFF2-40B4-BE49-F238E27FC236}">
+                <a16:creationId xmlns:a16="http://schemas.microsoft.com/office/drawing/2014/main" id="{59D6641A-E17F-400D-8B5E-63014B7A6F5C}"/>
+              </a:ext>
+            </a:extLst>
+          </p:cNvPr>
+          <p:cNvPicPr>
+            <a:picLocks noGrp="1" noChangeAspect="1"/>
+          </p:cNvPicPr>
+          <p:nvPr>
+            <p:ph idx="1"/>
+          </p:nvPr>
+        </p:nvPicPr>
+        <p:blipFill>
+          <a:blip r:embed="rId2">
+            <a:extLst>
+              <a:ext uri="{28A0092B-C50C-407E-A947-70E740481C1C}">
+                <a14:useLocalDpi xmlns:a14="http://schemas.microsoft.com/office/drawing/2010/main" val="0"/>
+              </a:ext>
+              <a:ext uri="{96DAC541-7B7A-43D3-8B79-37D633B846F1}">
+                <asvg:svgBlip xmlns:asvg="http://schemas.microsoft.com/office/drawing/2016/SVG/main" r:embed="rId3"/>
+              </a:ext>
+            </a:extLst>
+          </a:blip>
+          <a:stretch>
+            <a:fillRect/>
+          </a:stretch>
+        </p:blipFill>
+        <p:spPr>
+          <a:xfrm>
+            <a:off x="0" y="0"/>
+            <a:ext cx="12191999" cy="6857999"/>
+          </a:xfrm>
+          <a:prstGeom prst="rect">
+            <a:avLst/>
+          </a:prstGeom>
+        </p:spPr>
+      </p:pic>
+      <p:pic>
+        <p:nvPicPr>
+          <p:cNvPr id="5" name="内容占位符 4">
+            <a:extLst>
+              <a:ext uri="{FF2B5EF4-FFF2-40B4-BE49-F238E27FC236}">
+                <a16:creationId xmlns:a16="http://schemas.microsoft.com/office/drawing/2014/main" id="{3A03731E-CCD3-44F7-9CBF-5075E2F68C83}"/>
+              </a:ext>
+            </a:extLst>
+          </p:cNvPr>
+          <p:cNvPicPr>
+            <a:picLocks noChangeAspect="1"/>
+          </p:cNvPicPr>
+          <p:nvPr/>
+        </p:nvPicPr>
+        <p:blipFill>
+          <a:blip r:embed="rId4">
+            <a:extLst>
+              <a:ext uri="{28A0092B-C50C-407E-A947-70E740481C1C}">
+                <a14:useLocalDpi xmlns:a14="http://schemas.microsoft.com/office/drawing/2010/main" val="0"/>
+              </a:ext>
+              <a:ext uri="{96DAC541-7B7A-43D3-8B79-37D633B846F1}">
+                <asvg:svgBlip xmlns:asvg="http://schemas.microsoft.com/office/drawing/2016/SVG/main" r:embed="rId5"/>
+              </a:ext>
+            </a:extLst>
+          </a:blip>
+          <a:stretch>
+            <a:fillRect/>
+          </a:stretch>
+        </p:blipFill>
+        <p:spPr>
+          <a:xfrm>
+            <a:off x="3883314" y="2830371"/>
+            <a:ext cx="4152323" cy="4152323"/>
+          </a:xfrm>
+          <a:prstGeom prst="rect">
+            <a:avLst/>
+          </a:prstGeom>
+        </p:spPr>
+      </p:pic>
+      <p:pic>
+        <p:nvPicPr>
+          <p:cNvPr id="10" name="图形 9">
+            <a:extLst>
+              <a:ext uri="{FF2B5EF4-FFF2-40B4-BE49-F238E27FC236}">
+                <a16:creationId xmlns:a16="http://schemas.microsoft.com/office/drawing/2014/main" id="{FCD06D6F-45CC-4BB4-B6F6-8375499D551B}"/>
+              </a:ext>
+            </a:extLst>
+          </p:cNvPr>
+          <p:cNvPicPr>
+            <a:picLocks noChangeAspect="1"/>
+          </p:cNvPicPr>
+          <p:nvPr/>
+        </p:nvPicPr>
+        <p:blipFill>
+          <a:blip r:embed="rId6">
+            <a:extLst>
+              <a:ext uri="{28A0092B-C50C-407E-A947-70E740481C1C}">
+                <a14:useLocalDpi xmlns:a14="http://schemas.microsoft.com/office/drawing/2010/main" val="0"/>
+              </a:ext>
+              <a:ext uri="{96DAC541-7B7A-43D3-8B79-37D633B846F1}">
+                <asvg:svgBlip xmlns:asvg="http://schemas.microsoft.com/office/drawing/2016/SVG/main" r:embed="rId7"/>
+              </a:ext>
+            </a:extLst>
+          </a:blip>
+          <a:stretch>
+            <a:fillRect/>
+          </a:stretch>
+        </p:blipFill>
+        <p:spPr>
+          <a:xfrm>
+            <a:off x="3093028" y="2065411"/>
+            <a:ext cx="195118" cy="195118"/>
+          </a:xfrm>
+          <a:prstGeom prst="rect">
+            <a:avLst/>
+          </a:prstGeom>
+        </p:spPr>
+      </p:pic>
+      <p:pic>
+        <p:nvPicPr>
+          <p:cNvPr id="11" name="图形 10">
+            <a:extLst>
+              <a:ext uri="{FF2B5EF4-FFF2-40B4-BE49-F238E27FC236}">
+                <a16:creationId xmlns:a16="http://schemas.microsoft.com/office/drawing/2014/main" id="{D1EA145A-6A91-4942-97EF-2E33D02454EC}"/>
+              </a:ext>
+            </a:extLst>
+          </p:cNvPr>
+          <p:cNvPicPr>
+            <a:picLocks noChangeAspect="1"/>
+          </p:cNvPicPr>
+          <p:nvPr/>
+        </p:nvPicPr>
+        <p:blipFill>
+          <a:blip r:embed="rId6">
+            <a:extLst>
+              <a:ext uri="{28A0092B-C50C-407E-A947-70E740481C1C}">
+                <a14:useLocalDpi xmlns:a14="http://schemas.microsoft.com/office/drawing/2010/main" val="0"/>
+              </a:ext>
+              <a:ext uri="{96DAC541-7B7A-43D3-8B79-37D633B846F1}">
+                <asvg:svgBlip xmlns:asvg="http://schemas.microsoft.com/office/drawing/2016/SVG/main" r:embed="rId7"/>
+              </a:ext>
+            </a:extLst>
+          </a:blip>
+          <a:stretch>
+            <a:fillRect/>
+          </a:stretch>
+        </p:blipFill>
+        <p:spPr>
+          <a:xfrm>
+            <a:off x="7512628" y="2162970"/>
+            <a:ext cx="195118" cy="195118"/>
+          </a:xfrm>
+          <a:prstGeom prst="rect">
+            <a:avLst/>
+          </a:prstGeom>
+        </p:spPr>
+      </p:pic>
+      <p:pic>
+        <p:nvPicPr>
+          <p:cNvPr id="12" name="图形 11">
+            <a:extLst>
+              <a:ext uri="{FF2B5EF4-FFF2-40B4-BE49-F238E27FC236}">
+                <a16:creationId xmlns:a16="http://schemas.microsoft.com/office/drawing/2014/main" id="{1114A46C-3004-4909-8D0F-75CFF61CCA23}"/>
+              </a:ext>
+            </a:extLst>
+          </p:cNvPr>
+          <p:cNvPicPr>
+            <a:picLocks noChangeAspect="1"/>
+          </p:cNvPicPr>
+          <p:nvPr/>
+        </p:nvPicPr>
+        <p:blipFill>
+          <a:blip r:embed="rId6">
+            <a:extLst>
+              <a:ext uri="{28A0092B-C50C-407E-A947-70E740481C1C}">
+                <a14:useLocalDpi xmlns:a14="http://schemas.microsoft.com/office/drawing/2010/main" val="0"/>
+              </a:ext>
+              <a:ext uri="{96DAC541-7B7A-43D3-8B79-37D633B846F1}">
+                <asvg:svgBlip xmlns:asvg="http://schemas.microsoft.com/office/drawing/2016/SVG/main" r:embed="rId7"/>
+              </a:ext>
+            </a:extLst>
+          </a:blip>
+          <a:stretch>
+            <a:fillRect/>
+          </a:stretch>
+        </p:blipFill>
+        <p:spPr>
+          <a:xfrm>
+            <a:off x="4337049" y="2927349"/>
+            <a:ext cx="195118" cy="195118"/>
+          </a:xfrm>
+          <a:prstGeom prst="rect">
+            <a:avLst/>
+          </a:prstGeom>
+        </p:spPr>
+      </p:pic>
+      <p:pic>
+        <p:nvPicPr>
+          <p:cNvPr id="13" name="图形 12">
+            <a:extLst>
+              <a:ext uri="{FF2B5EF4-FFF2-40B4-BE49-F238E27FC236}">
+                <a16:creationId xmlns:a16="http://schemas.microsoft.com/office/drawing/2014/main" id="{7AEE3D8D-5771-4333-9CFE-194A381A7D89}"/>
+              </a:ext>
+            </a:extLst>
+          </p:cNvPr>
+          <p:cNvPicPr>
+            <a:picLocks noChangeAspect="1"/>
+          </p:cNvPicPr>
+          <p:nvPr/>
+        </p:nvPicPr>
+        <p:blipFill>
+          <a:blip r:embed="rId6">
+            <a:extLst>
+              <a:ext uri="{28A0092B-C50C-407E-A947-70E740481C1C}">
+                <a14:useLocalDpi xmlns:a14="http://schemas.microsoft.com/office/drawing/2010/main" val="0"/>
+              </a:ext>
+              <a:ext uri="{96DAC541-7B7A-43D3-8B79-37D633B846F1}">
+                <asvg:svgBlip xmlns:asvg="http://schemas.microsoft.com/office/drawing/2016/SVG/main" r:embed="rId7"/>
+              </a:ext>
+            </a:extLst>
+          </a:blip>
+          <a:stretch>
+            <a:fillRect/>
+          </a:stretch>
+        </p:blipFill>
+        <p:spPr>
+          <a:xfrm>
+            <a:off x="9355283" y="2954769"/>
+            <a:ext cx="195118" cy="195118"/>
+          </a:xfrm>
+          <a:prstGeom prst="rect">
+            <a:avLst/>
+          </a:prstGeom>
+        </p:spPr>
+      </p:pic>
+      <p:pic>
+        <p:nvPicPr>
+          <p:cNvPr id="14" name="图形 13">
+            <a:extLst>
+              <a:ext uri="{FF2B5EF4-FFF2-40B4-BE49-F238E27FC236}">
+                <a16:creationId xmlns:a16="http://schemas.microsoft.com/office/drawing/2014/main" id="{3F9F8CFD-1AFE-4DBD-8D71-36C777780F18}"/>
+              </a:ext>
+            </a:extLst>
+          </p:cNvPr>
+          <p:cNvPicPr>
+            <a:picLocks noChangeAspect="1"/>
+          </p:cNvPicPr>
+          <p:nvPr/>
+        </p:nvPicPr>
+        <p:blipFill>
+          <a:blip r:embed="rId6">
+            <a:extLst>
+              <a:ext uri="{28A0092B-C50C-407E-A947-70E740481C1C}">
+                <a14:useLocalDpi xmlns:a14="http://schemas.microsoft.com/office/drawing/2010/main" val="0"/>
+              </a:ext>
+              <a:ext uri="{96DAC541-7B7A-43D3-8B79-37D633B846F1}">
+                <asvg:svgBlip xmlns:asvg="http://schemas.microsoft.com/office/drawing/2016/SVG/main" r:embed="rId7"/>
+              </a:ext>
+            </a:extLst>
+          </a:blip>
+          <a:stretch>
+            <a:fillRect/>
+          </a:stretch>
+        </p:blipFill>
+        <p:spPr>
+          <a:xfrm>
+            <a:off x="10749973" y="1920874"/>
+            <a:ext cx="195118" cy="195118"/>
+          </a:xfrm>
+          <a:prstGeom prst="rect">
+            <a:avLst/>
+          </a:prstGeom>
+        </p:spPr>
+      </p:pic>
+    </p:spTree>
+    <p:extLst>
+      <p:ext uri="{BB962C8B-B14F-4D97-AF65-F5344CB8AC3E}">
+        <p14:creationId xmlns:p14="http://schemas.microsoft.com/office/powerpoint/2010/main" val="911316507"/>
+      </p:ext>
+    </p:extLst>
+  </p:cSld>
+  <p:clrMapOvr>
+    <a:masterClrMapping/>
+  </p:clrMapOvr>
+  <p:timing>
+    <p:tnLst>
+      <p:par>
+        <p:cTn id="1" dur="indefinite" restart="never" nodeType="tmRoot">
+          <p:childTnLst>
+            <p:seq concurrent="1" nextAc="seek">
+              <p:cTn id="2" dur="indefinite" nodeType="mainSeq">
+                <p:childTnLst>
+                  <p:par>
+                    <p:cTn id="3" fill="hold">
+                      <p:stCondLst>
+                        <p:cond delay="indefinite"/>
+                      </p:stCondLst>
+                      <p:childTnLst>
+                        <p:par>
+                          <p:cTn id="4" fill="hold">
+                            <p:stCondLst>
+                              <p:cond delay="0"/>
+                            </p:stCondLst>
+                            <p:childTnLst>
+                              <p:par>
+                                <p:cTn id="5" presetID="31" presetClass="entr" presetSubtype="0" repeatCount="indefinite" fill="hold" nodeType="clickEffect">
+                                  <p:stCondLst>
+                                    <p:cond delay="6400"/>
+                                  </p:stCondLst>
+                                  <p:childTnLst>
+                                    <p:set>
+                                      <p:cBhvr>
+                                        <p:cTn id="6" dur="1" fill="hold">
+                                          <p:stCondLst>
+                                            <p:cond delay="0"/>
+                                          </p:stCondLst>
+                                        </p:cTn>
+                                        <p:tgtEl>
+                                          <p:spTgt spid="10"/>
+                                        </p:tgtEl>
+                                        <p:attrNameLst>
+                                          <p:attrName>style.visibility</p:attrName>
+                                        </p:attrNameLst>
+                                      </p:cBhvr>
+                                      <p:to>
+                                        <p:strVal val="visible"/>
+                                      </p:to>
+                                    </p:set>
+                                    <p:anim calcmode="lin" valueType="num">
+                                      <p:cBhvr>
+                                        <p:cTn id="7" dur="1000" fill="hold"/>
+                                        <p:tgtEl>
+                                          <p:spTgt spid="10"/>
+                                        </p:tgtEl>
+                                        <p:attrNameLst>
+                                          <p:attrName>ppt_w</p:attrName>
+                                        </p:attrNameLst>
+                                      </p:cBhvr>
+                                      <p:tavLst>
+                                        <p:tav tm="0">
+                                          <p:val>
+                                            <p:fltVal val="0"/>
+                                          </p:val>
+                                        </p:tav>
+                                        <p:tav tm="100000">
+                                          <p:val>
+                                            <p:strVal val="#ppt_w"/>
+                                          </p:val>
+                                        </p:tav>
+                                      </p:tavLst>
+                                    </p:anim>
+                                    <p:anim calcmode="lin" valueType="num">
+                                      <p:cBhvr>
+                                        <p:cTn id="8" dur="1000" fill="hold"/>
+                                        <p:tgtEl>
+                                          <p:spTgt spid="10"/>
+                                        </p:tgtEl>
+                                        <p:attrNameLst>
+                                          <p:attrName>ppt_h</p:attrName>
+                                        </p:attrNameLst>
+                                      </p:cBhvr>
+                                      <p:tavLst>
+                                        <p:tav tm="0">
+                                          <p:val>
+                                            <p:fltVal val="0"/>
+                                          </p:val>
+                                        </p:tav>
+                                        <p:tav tm="100000">
+                                          <p:val>
+                                            <p:strVal val="#ppt_h"/>
+                                          </p:val>
+                                        </p:tav>
+                                      </p:tavLst>
+                                    </p:anim>
+                                    <p:anim calcmode="lin" valueType="num">
+                                      <p:cBhvr>
+                                        <p:cTn id="9" dur="1000" fill="hold"/>
+                                        <p:tgtEl>
+                                          <p:spTgt spid="10"/>
+                                        </p:tgtEl>
+                                        <p:attrNameLst>
+                                          <p:attrName>style.rotation</p:attrName>
+                                        </p:attrNameLst>
+                                      </p:cBhvr>
+                                      <p:tavLst>
+                                        <p:tav tm="0">
+                                          <p:val>
+                                            <p:fltVal val="90"/>
+                                          </p:val>
+                                        </p:tav>
+                                        <p:tav tm="100000">
+                                          <p:val>
+                                            <p:fltVal val="0"/>
+                                          </p:val>
+                                        </p:tav>
+                                      </p:tavLst>
+                                    </p:anim>
+                                    <p:animEffect transition="in" filter="fade">
+                                      <p:cBhvr>
+                                        <p:cTn id="10" dur="1000"/>
+                                        <p:tgtEl>
+                                          <p:spTgt spid="10"/>
+                                        </p:tgtEl>
+                                      </p:cBhvr>
+                                    </p:animEffect>
+                                  </p:childTnLst>
+                                </p:cTn>
+                              </p:par>
+                              <p:par>
+                                <p:cTn id="11" presetID="31" presetClass="entr" presetSubtype="0" repeatCount="indefinite" fill="hold" nodeType="withEffect">
+                                  <p:stCondLst>
+                                    <p:cond delay="0"/>
+                                  </p:stCondLst>
+                                  <p:childTnLst>
+                                    <p:set>
+                                      <p:cBhvr>
+                                        <p:cTn id="12" dur="1" fill="hold">
+                                          <p:stCondLst>
+                                            <p:cond delay="0"/>
+                                          </p:stCondLst>
+                                        </p:cTn>
+                                        <p:tgtEl>
+                                          <p:spTgt spid="12"/>
+                                        </p:tgtEl>
+                                        <p:attrNameLst>
+                                          <p:attrName>style.visibility</p:attrName>
+                                        </p:attrNameLst>
+                                      </p:cBhvr>
+                                      <p:to>
+                                        <p:strVal val="visible"/>
+                                      </p:to>
+                                    </p:set>
+                                    <p:anim calcmode="lin" valueType="num">
+                                      <p:cBhvr>
+                                        <p:cTn id="13" dur="1000" fill="hold"/>
+                                        <p:tgtEl>
+                                          <p:spTgt spid="12"/>
+                                        </p:tgtEl>
+                                        <p:attrNameLst>
+                                          <p:attrName>ppt_w</p:attrName>
+                                        </p:attrNameLst>
+                                      </p:cBhvr>
+                                      <p:tavLst>
+                                        <p:tav tm="0">
+                                          <p:val>
+                                            <p:fltVal val="0"/>
+                                          </p:val>
+                                        </p:tav>
+                                        <p:tav tm="100000">
+                                          <p:val>
+                                            <p:strVal val="#ppt_w"/>
+                                          </p:val>
+                                        </p:tav>
+                                      </p:tavLst>
+                                    </p:anim>
+                                    <p:anim calcmode="lin" valueType="num">
+                                      <p:cBhvr>
+                                        <p:cTn id="14" dur="1000" fill="hold"/>
+                                        <p:tgtEl>
+                                          <p:spTgt spid="12"/>
+                                        </p:tgtEl>
+                                        <p:attrNameLst>
+                                          <p:attrName>ppt_h</p:attrName>
+                                        </p:attrNameLst>
+                                      </p:cBhvr>
+                                      <p:tavLst>
+                                        <p:tav tm="0">
+                                          <p:val>
+                                            <p:fltVal val="0"/>
+                                          </p:val>
+                                        </p:tav>
+                                        <p:tav tm="100000">
+                                          <p:val>
+                                            <p:strVal val="#ppt_h"/>
+                                          </p:val>
+                                        </p:tav>
+                                      </p:tavLst>
+                                    </p:anim>
+                                    <p:anim calcmode="lin" valueType="num">
+                                      <p:cBhvr>
+                                        <p:cTn id="15" dur="1000" fill="hold"/>
+                                        <p:tgtEl>
+                                          <p:spTgt spid="12"/>
+                                        </p:tgtEl>
+                                        <p:attrNameLst>
+                                          <p:attrName>style.rotation</p:attrName>
+                                        </p:attrNameLst>
+                                      </p:cBhvr>
+                                      <p:tavLst>
+                                        <p:tav tm="0">
+                                          <p:val>
+                                            <p:fltVal val="90"/>
+                                          </p:val>
+                                        </p:tav>
+                                        <p:tav tm="100000">
+                                          <p:val>
+                                            <p:fltVal val="0"/>
+                                          </p:val>
+                                        </p:tav>
+                                      </p:tavLst>
+                                    </p:anim>
+                                    <p:animEffect transition="in" filter="fade">
+                                      <p:cBhvr>
+                                        <p:cTn id="16" dur="1000"/>
+                                        <p:tgtEl>
+                                          <p:spTgt spid="12"/>
+                                        </p:tgtEl>
+                                      </p:cBhvr>
+                                    </p:animEffect>
+                                  </p:childTnLst>
+                                </p:cTn>
+                              </p:par>
+                              <p:par>
+                                <p:cTn id="17" presetID="31" presetClass="entr" presetSubtype="0" repeatCount="indefinite" fill="hold" nodeType="withEffect">
+                                  <p:stCondLst>
+                                    <p:cond delay="2100"/>
+                                  </p:stCondLst>
+                                  <p:childTnLst>
+                                    <p:set>
+                                      <p:cBhvr>
+                                        <p:cTn id="18" dur="1" fill="hold">
+                                          <p:stCondLst>
+                                            <p:cond delay="0"/>
+                                          </p:stCondLst>
+                                        </p:cTn>
+                                        <p:tgtEl>
+                                          <p:spTgt spid="11"/>
+                                        </p:tgtEl>
+                                        <p:attrNameLst>
+                                          <p:attrName>style.visibility</p:attrName>
+                                        </p:attrNameLst>
+                                      </p:cBhvr>
+                                      <p:to>
+                                        <p:strVal val="visible"/>
+                                      </p:to>
+                                    </p:set>
+                                    <p:anim calcmode="lin" valueType="num">
+                                      <p:cBhvr>
+                                        <p:cTn id="19" dur="1000" fill="hold"/>
+                                        <p:tgtEl>
+                                          <p:spTgt spid="11"/>
+                                        </p:tgtEl>
+                                        <p:attrNameLst>
+                                          <p:attrName>ppt_w</p:attrName>
+                                        </p:attrNameLst>
+                                      </p:cBhvr>
+                                      <p:tavLst>
+                                        <p:tav tm="0">
+                                          <p:val>
+                                            <p:fltVal val="0"/>
+                                          </p:val>
+                                        </p:tav>
+                                        <p:tav tm="100000">
+                                          <p:val>
+                                            <p:strVal val="#ppt_w"/>
+                                          </p:val>
+                                        </p:tav>
+                                      </p:tavLst>
+                                    </p:anim>
+                                    <p:anim calcmode="lin" valueType="num">
+                                      <p:cBhvr>
+                                        <p:cTn id="20" dur="1000" fill="hold"/>
+                                        <p:tgtEl>
+                                          <p:spTgt spid="11"/>
+                                        </p:tgtEl>
+                                        <p:attrNameLst>
+                                          <p:attrName>ppt_h</p:attrName>
+                                        </p:attrNameLst>
+                                      </p:cBhvr>
+                                      <p:tavLst>
+                                        <p:tav tm="0">
+                                          <p:val>
+                                            <p:fltVal val="0"/>
+                                          </p:val>
+                                        </p:tav>
+                                        <p:tav tm="100000">
+                                          <p:val>
+                                            <p:strVal val="#ppt_h"/>
+                                          </p:val>
+                                        </p:tav>
+                                      </p:tavLst>
+                                    </p:anim>
+                                    <p:anim calcmode="lin" valueType="num">
+                                      <p:cBhvr>
+                                        <p:cTn id="21" dur="1000" fill="hold"/>
+                                        <p:tgtEl>
+                                          <p:spTgt spid="11"/>
+                                        </p:tgtEl>
+                                        <p:attrNameLst>
+                                          <p:attrName>style.rotation</p:attrName>
+                                        </p:attrNameLst>
+                                      </p:cBhvr>
+                                      <p:tavLst>
+                                        <p:tav tm="0">
+                                          <p:val>
+                                            <p:fltVal val="90"/>
+                                          </p:val>
+                                        </p:tav>
+                                        <p:tav tm="100000">
+                                          <p:val>
+                                            <p:fltVal val="0"/>
+                                          </p:val>
+                                        </p:tav>
+                                      </p:tavLst>
+                                    </p:anim>
+                                    <p:animEffect transition="in" filter="fade">
+                                      <p:cBhvr>
+                                        <p:cTn id="22" dur="1000"/>
+                                        <p:tgtEl>
+                                          <p:spTgt spid="11"/>
+                                        </p:tgtEl>
+                                      </p:cBhvr>
+                                    </p:animEffect>
+                                  </p:childTnLst>
+                                </p:cTn>
+                              </p:par>
+                              <p:par>
+                                <p:cTn id="23" presetID="31" presetClass="entr" presetSubtype="0" repeatCount="indefinite" fill="hold" nodeType="withEffect">
+                                  <p:stCondLst>
+                                    <p:cond delay="3200"/>
+                                  </p:stCondLst>
+                                  <p:childTnLst>
+                                    <p:set>
+                                      <p:cBhvr>
+                                        <p:cTn id="24" dur="1" fill="hold">
+                                          <p:stCondLst>
+                                            <p:cond delay="0"/>
+                                          </p:stCondLst>
+                                        </p:cTn>
+                                        <p:tgtEl>
+                                          <p:spTgt spid="13"/>
+                                        </p:tgtEl>
+                                        <p:attrNameLst>
+                                          <p:attrName>style.visibility</p:attrName>
+                                        </p:attrNameLst>
+                                      </p:cBhvr>
+                                      <p:to>
+                                        <p:strVal val="visible"/>
+                                      </p:to>
+                                    </p:set>
+                                    <p:anim calcmode="lin" valueType="num">
+                                      <p:cBhvr>
+                                        <p:cTn id="25" dur="1000" fill="hold"/>
+                                        <p:tgtEl>
+                                          <p:spTgt spid="13"/>
+                                        </p:tgtEl>
+                                        <p:attrNameLst>
+                                          <p:attrName>ppt_w</p:attrName>
+                                        </p:attrNameLst>
+                                      </p:cBhvr>
+                                      <p:tavLst>
+                                        <p:tav tm="0">
+                                          <p:val>
+                                            <p:fltVal val="0"/>
+                                          </p:val>
+                                        </p:tav>
+                                        <p:tav tm="100000">
+                                          <p:val>
+                                            <p:strVal val="#ppt_w"/>
+                                          </p:val>
+                                        </p:tav>
+                                      </p:tavLst>
+                                    </p:anim>
+                                    <p:anim calcmode="lin" valueType="num">
+                                      <p:cBhvr>
+                                        <p:cTn id="26" dur="1000" fill="hold"/>
+                                        <p:tgtEl>
+                                          <p:spTgt spid="13"/>
+                                        </p:tgtEl>
+                                        <p:attrNameLst>
+                                          <p:attrName>ppt_h</p:attrName>
+                                        </p:attrNameLst>
+                                      </p:cBhvr>
+                                      <p:tavLst>
+                                        <p:tav tm="0">
+                                          <p:val>
+                                            <p:fltVal val="0"/>
+                                          </p:val>
+                                        </p:tav>
+                                        <p:tav tm="100000">
+                                          <p:val>
+                                            <p:strVal val="#ppt_h"/>
+                                          </p:val>
+                                        </p:tav>
+                                      </p:tavLst>
+                                    </p:anim>
+                                    <p:anim calcmode="lin" valueType="num">
+                                      <p:cBhvr>
+                                        <p:cTn id="27" dur="1000" fill="hold"/>
+                                        <p:tgtEl>
+                                          <p:spTgt spid="13"/>
+                                        </p:tgtEl>
+                                        <p:attrNameLst>
+                                          <p:attrName>style.rotation</p:attrName>
+                                        </p:attrNameLst>
+                                      </p:cBhvr>
+                                      <p:tavLst>
+                                        <p:tav tm="0">
+                                          <p:val>
+                                            <p:fltVal val="90"/>
+                                          </p:val>
+                                        </p:tav>
+                                        <p:tav tm="100000">
+                                          <p:val>
+                                            <p:fltVal val="0"/>
+                                          </p:val>
+                                        </p:tav>
+                                      </p:tavLst>
+                                    </p:anim>
+                                    <p:animEffect transition="in" filter="fade">
+                                      <p:cBhvr>
+                                        <p:cTn id="28" dur="1000"/>
+                                        <p:tgtEl>
+                                          <p:spTgt spid="13"/>
+                                        </p:tgtEl>
+                                      </p:cBhvr>
+                                    </p:animEffect>
+                                  </p:childTnLst>
+                                </p:cTn>
+                              </p:par>
+                              <p:par>
+                                <p:cTn id="29" presetID="31" presetClass="entr" presetSubtype="0" repeatCount="indefinite" fill="hold" nodeType="withEffect">
+                                  <p:stCondLst>
+                                    <p:cond delay="5000"/>
+                                  </p:stCondLst>
+                                  <p:childTnLst>
+                                    <p:set>
+                                      <p:cBhvr>
+                                        <p:cTn id="30" dur="1" fill="hold">
+                                          <p:stCondLst>
+                                            <p:cond delay="0"/>
+                                          </p:stCondLst>
+                                        </p:cTn>
+                                        <p:tgtEl>
+                                          <p:spTgt spid="14"/>
+                                        </p:tgtEl>
+                                        <p:attrNameLst>
+                                          <p:attrName>style.visibility</p:attrName>
+                                        </p:attrNameLst>
+                                      </p:cBhvr>
+                                      <p:to>
+                                        <p:strVal val="visible"/>
+                                      </p:to>
+                                    </p:set>
+                                    <p:anim calcmode="lin" valueType="num">
+                                      <p:cBhvr>
+                                        <p:cTn id="31" dur="1000" fill="hold"/>
+                                        <p:tgtEl>
+                                          <p:spTgt spid="14"/>
+                                        </p:tgtEl>
+                                        <p:attrNameLst>
+                                          <p:attrName>ppt_w</p:attrName>
+                                        </p:attrNameLst>
+                                      </p:cBhvr>
+                                      <p:tavLst>
+                                        <p:tav tm="0">
+                                          <p:val>
+                                            <p:fltVal val="0"/>
+                                          </p:val>
+                                        </p:tav>
+                                        <p:tav tm="100000">
+                                          <p:val>
+                                            <p:strVal val="#ppt_w"/>
+                                          </p:val>
+                                        </p:tav>
+                                      </p:tavLst>
+                                    </p:anim>
+                                    <p:anim calcmode="lin" valueType="num">
+                                      <p:cBhvr>
+                                        <p:cTn id="32" dur="1000" fill="hold"/>
+                                        <p:tgtEl>
+                                          <p:spTgt spid="14"/>
+                                        </p:tgtEl>
+                                        <p:attrNameLst>
+                                          <p:attrName>ppt_h</p:attrName>
+                                        </p:attrNameLst>
+                                      </p:cBhvr>
+                                      <p:tavLst>
+                                        <p:tav tm="0">
+                                          <p:val>
+                                            <p:fltVal val="0"/>
+                                          </p:val>
+                                        </p:tav>
+                                        <p:tav tm="100000">
+                                          <p:val>
+                                            <p:strVal val="#ppt_h"/>
+                                          </p:val>
+                                        </p:tav>
+                                      </p:tavLst>
+                                    </p:anim>
+                                    <p:anim calcmode="lin" valueType="num">
+                                      <p:cBhvr>
+                                        <p:cTn id="33" dur="1000" fill="hold"/>
+                                        <p:tgtEl>
+                                          <p:spTgt spid="14"/>
+                                        </p:tgtEl>
+                                        <p:attrNameLst>
+                                          <p:attrName>style.rotation</p:attrName>
+                                        </p:attrNameLst>
+                                      </p:cBhvr>
+                                      <p:tavLst>
+                                        <p:tav tm="0">
+                                          <p:val>
+                                            <p:fltVal val="90"/>
+                                          </p:val>
+                                        </p:tav>
+                                        <p:tav tm="100000">
+                                          <p:val>
+                                            <p:fltVal val="0"/>
+                                          </p:val>
+                                        </p:tav>
+                                      </p:tavLst>
+                                    </p:anim>
+                                    <p:animEffect transition="in" filter="fade">
+                                      <p:cBhvr>
+                                        <p:cTn id="34" dur="1000"/>
+                                        <p:tgtEl>
+                                          <p:spTgt spid="14"/>
+                                        </p:tgtEl>
+                                      </p:cBhvr>
+                                    </p:animEffect>
+                                  </p:childTnLst>
+                                </p:cTn>
+                              </p:par>
+                            </p:childTnLst>
+                          </p:cTn>
+                        </p:par>
+                      </p:childTnLst>
+                    </p:cTn>
+                  </p:par>
+                </p:childTnLst>
+              </p:cTn>
+              <p:prevCondLst>
+                <p:cond evt="onPrev" delay="0">
+                  <p:tgtEl>
+                    <p:sldTgt/>
+                  </p:tgtEl>
+                </p:cond>
+              </p:prevCondLst>
+              <p:nextCondLst>
+                <p:cond evt="onNext" delay="0">
+                  <p:tgtEl>
+                    <p:sldTgt/>
+                  </p:tgtEl>
+                </p:cond>
+              </p:nextCondLst>
+            </p:seq>
+          </p:childTnLst>
+        </p:cTn>
+      </p:par>
+    </p:tnLst>
+  </p:timing>
+</p:sld>
+</file>
+
+<file path=ppt/slides/slide13.xml><?xml version="1.0" encoding="utf-8"?>
+<p:sld xmlns:a="http://schemas.openxmlformats.org/drawingml/2006/main" xmlns:r="http://schemas.openxmlformats.org/officeDocument/2006/relationships" xmlns:p="http://schemas.openxmlformats.org/presentationml/2006/main">
+  <p:cSld>
+    <p:spTree>
+      <p:nvGrpSpPr>
+        <p:cNvPr id="1" name=""/>
+        <p:cNvGrpSpPr/>
+        <p:nvPr/>
+      </p:nvGrpSpPr>
+      <p:grpSpPr>
+        <a:xfrm>
+          <a:off x="0" y="0"/>
+          <a:ext cx="0" cy="0"/>
+          <a:chOff x="0" y="0"/>
+          <a:chExt cx="0" cy="0"/>
+        </a:xfrm>
+      </p:grpSpPr>
+      <p:sp>
+        <p:nvSpPr>
+          <p:cNvPr id="10" name="标题 1">
+            <a:extLst>
+              <a:ext uri="{FF2B5EF4-FFF2-40B4-BE49-F238E27FC236}">
+                <a16:creationId xmlns:a16="http://schemas.microsoft.com/office/drawing/2014/main" id="{26E2AC48-A593-46C6-AF61-8997E0FA8C47}"/>
+              </a:ext>
+            </a:extLst>
+          </p:cNvPr>
+          <p:cNvSpPr>
+            <a:spLocks noGrp="1"/>
+          </p:cNvSpPr>
+          <p:nvPr>
+            <p:ph type="title"/>
+          </p:nvPr>
+        </p:nvSpPr>
+        <p:spPr>
+          <a:xfrm>
+            <a:off x="838200" y="365125"/>
+            <a:ext cx="10515600" cy="6091093"/>
+          </a:xfrm>
+        </p:spPr>
+        <p:txBody>
+          <a:bodyPr>
+            <a:normAutofit/>
+          </a:bodyPr>
+          <a:lstStyle/>
+          <a:p>
+            <a:r>
+              <a:rPr lang="en-US" altLang="zh-CN" sz="2200" b="1" u="sng" dirty="0"/>
+              <a:t>Sample 4  (Cont’d)</a:t>
+            </a:r>
+            <a:r>
+              <a:rPr lang="en-US" altLang="zh-CN" sz="2200" b="1" dirty="0"/>
+              <a:t>: </a:t>
+            </a:r>
+            <a:br>
+              <a:rPr lang="en-US" altLang="zh-CN" sz="2200" dirty="0"/>
+            </a:br>
+            <a:br>
+              <a:rPr lang="en-US" altLang="zh-CN" sz="2200" dirty="0"/>
+            </a:br>
+            <a:r>
+              <a:rPr lang="en-US" altLang="zh-CN" sz="2200" b="1" dirty="0"/>
+              <a:t>1. </a:t>
+            </a:r>
+            <a:r>
+              <a:rPr lang="zh-CN" altLang="en-US" sz="2200" b="1" dirty="0"/>
+              <a:t>目标：</a:t>
+            </a:r>
+            <a:r>
+              <a:rPr lang="zh-CN" altLang="en-US" sz="2200" dirty="0"/>
+              <a:t>月亮升起再降落</a:t>
+            </a:r>
+            <a:br>
+              <a:rPr lang="en-US" altLang="zh-CN" sz="2200" dirty="0"/>
+            </a:br>
+            <a:r>
+              <a:rPr lang="en-US" altLang="zh-CN" sz="2200" dirty="0"/>
+              <a:t>2. </a:t>
+            </a:r>
+            <a:r>
+              <a:rPr lang="zh-CN" altLang="en-US" sz="2200" dirty="0"/>
+              <a:t>月亮不动存在问题，</a:t>
+            </a:r>
+            <a:r>
+              <a:rPr lang="zh-CN" altLang="en-US" sz="2200" b="1" dirty="0"/>
+              <a:t>解决方案：</a:t>
+            </a:r>
+            <a:r>
+              <a:rPr lang="zh-CN" altLang="en-US" sz="2200" dirty="0"/>
+              <a:t>月亮一直在画面中，只是路径需要移动而已，所以选择动作路径。</a:t>
+            </a:r>
+            <a:r>
+              <a:rPr lang="en-US" altLang="zh-CN" sz="2200" dirty="0"/>
+              <a:t>A) </a:t>
+            </a:r>
+            <a:r>
+              <a:rPr lang="zh-CN" altLang="en-US" sz="2200" dirty="0"/>
+              <a:t>选择月亮，点击动画，给月亮一个弧形的动作路径，并</a:t>
+            </a:r>
+            <a:r>
+              <a:rPr lang="en-US" altLang="zh-CN" sz="2200" dirty="0"/>
+              <a:t>B) </a:t>
+            </a:r>
+            <a:r>
+              <a:rPr lang="zh-CN" altLang="en-US" sz="2200" dirty="0"/>
+              <a:t>在效果选项中给动作路径设置成向上，</a:t>
+            </a:r>
+            <a:r>
+              <a:rPr lang="en-US" altLang="zh-CN" sz="2200" dirty="0"/>
+              <a:t>C) </a:t>
+            </a:r>
+            <a:r>
+              <a:rPr lang="zh-CN" altLang="en-US" sz="2200" dirty="0"/>
+              <a:t>点开效果选项右下角箭头，将平滑开始和平滑结束时间设置为</a:t>
+            </a:r>
+            <a:r>
+              <a:rPr lang="en-US" altLang="zh-CN" sz="2200" dirty="0"/>
+              <a:t>0</a:t>
+            </a:r>
+            <a:r>
+              <a:rPr lang="zh-CN" altLang="en-US" sz="2200" dirty="0"/>
+              <a:t>，</a:t>
+            </a:r>
+            <a:r>
+              <a:rPr lang="en-US" altLang="zh-CN" sz="2200" dirty="0"/>
+              <a:t>D)</a:t>
+            </a:r>
+            <a:r>
+              <a:rPr lang="zh-CN" altLang="en-US" sz="2200" dirty="0"/>
+              <a:t> 持续时间设置成</a:t>
+            </a:r>
+            <a:r>
+              <a:rPr lang="en-US" altLang="zh-CN" sz="2200" dirty="0"/>
+              <a:t>10</a:t>
+            </a:r>
+            <a:r>
+              <a:rPr lang="zh-CN" altLang="en-US" sz="2200" dirty="0"/>
+              <a:t>秒，</a:t>
+            </a:r>
+            <a:r>
+              <a:rPr lang="en-US" altLang="zh-CN" sz="2200" dirty="0"/>
+              <a:t>E) </a:t>
+            </a:r>
+            <a:r>
+              <a:rPr lang="zh-CN" altLang="en-US" sz="2200" dirty="0"/>
+              <a:t>与上一个动画同时，如下：</a:t>
+            </a:r>
+            <a:br>
+              <a:rPr lang="en-US" altLang="zh-CN" sz="2200" dirty="0"/>
+            </a:br>
+            <a:endParaRPr lang="zh-CN" altLang="en-US" sz="2200" dirty="0"/>
+          </a:p>
+        </p:txBody>
+      </p:sp>
+    </p:spTree>
+    <p:extLst>
+      <p:ext uri="{BB962C8B-B14F-4D97-AF65-F5344CB8AC3E}">
+        <p14:creationId xmlns:p14="http://schemas.microsoft.com/office/powerpoint/2010/main" val="2414446693"/>
+      </p:ext>
+    </p:extLst>
+  </p:cSld>
+  <p:clrMapOvr>
+    <a:masterClrMapping/>
+  </p:clrMapOvr>
+</p:sld>
+</file>
+
+<file path=ppt/slides/slide14.xml><?xml version="1.0" encoding="utf-8"?>
+<p:sld xmlns:a="http://schemas.openxmlformats.org/drawingml/2006/main" xmlns:r="http://schemas.openxmlformats.org/officeDocument/2006/relationships" xmlns:p="http://schemas.openxmlformats.org/presentationml/2006/main">
+  <p:cSld>
+    <p:spTree>
+      <p:nvGrpSpPr>
+        <p:cNvPr id="1" name=""/>
+        <p:cNvGrpSpPr/>
+        <p:nvPr/>
+      </p:nvGrpSpPr>
+      <p:grpSpPr>
+        <a:xfrm>
+          <a:off x="0" y="0"/>
+          <a:ext cx="0" cy="0"/>
+          <a:chOff x="0" y="0"/>
+          <a:chExt cx="0" cy="0"/>
+        </a:xfrm>
+      </p:grpSpPr>
+      <p:sp>
+        <p:nvSpPr>
+          <p:cNvPr id="2" name="标题 1">
+            <a:extLst>
+              <a:ext uri="{FF2B5EF4-FFF2-40B4-BE49-F238E27FC236}">
+                <a16:creationId xmlns:a16="http://schemas.microsoft.com/office/drawing/2014/main" id="{80FCD86E-C818-4A0A-AFFC-712C60E4E340}"/>
+              </a:ext>
+            </a:extLst>
+          </p:cNvPr>
+          <p:cNvSpPr>
+            <a:spLocks noGrp="1"/>
+          </p:cNvSpPr>
+          <p:nvPr>
+            <p:ph type="title"/>
+          </p:nvPr>
+        </p:nvSpPr>
+        <p:spPr/>
+        <p:txBody>
+          <a:bodyPr/>
+          <a:lstStyle/>
+          <a:p>
+            <a:endParaRPr lang="zh-CN" altLang="en-US"/>
+          </a:p>
+        </p:txBody>
+      </p:sp>
+      <p:pic>
+        <p:nvPicPr>
+          <p:cNvPr id="4" name="内容占位符 3">
+            <a:extLst>
+              <a:ext uri="{FF2B5EF4-FFF2-40B4-BE49-F238E27FC236}">
+                <a16:creationId xmlns:a16="http://schemas.microsoft.com/office/drawing/2014/main" id="{59D6641A-E17F-400D-8B5E-63014B7A6F5C}"/>
+              </a:ext>
+            </a:extLst>
+          </p:cNvPr>
+          <p:cNvPicPr>
+            <a:picLocks noGrp="1" noChangeAspect="1"/>
+          </p:cNvPicPr>
+          <p:nvPr>
+            <p:ph idx="1"/>
+          </p:nvPr>
+        </p:nvPicPr>
+        <p:blipFill>
+          <a:blip r:embed="rId2">
+            <a:extLst>
+              <a:ext uri="{28A0092B-C50C-407E-A947-70E740481C1C}">
+                <a14:useLocalDpi xmlns:a14="http://schemas.microsoft.com/office/drawing/2010/main" val="0"/>
+              </a:ext>
+              <a:ext uri="{96DAC541-7B7A-43D3-8B79-37D633B846F1}">
+                <asvg:svgBlip xmlns:asvg="http://schemas.microsoft.com/office/drawing/2016/SVG/main" r:embed="rId3"/>
+              </a:ext>
+            </a:extLst>
+          </a:blip>
+          <a:stretch>
+            <a:fillRect/>
+          </a:stretch>
+        </p:blipFill>
+        <p:spPr>
+          <a:xfrm>
+            <a:off x="0" y="0"/>
+            <a:ext cx="12191999" cy="6857999"/>
+          </a:xfrm>
+          <a:prstGeom prst="rect">
+            <a:avLst/>
+          </a:prstGeom>
+        </p:spPr>
+      </p:pic>
+      <p:pic>
+        <p:nvPicPr>
+          <p:cNvPr id="5" name="内容占位符 4">
+            <a:extLst>
+              <a:ext uri="{FF2B5EF4-FFF2-40B4-BE49-F238E27FC236}">
+                <a16:creationId xmlns:a16="http://schemas.microsoft.com/office/drawing/2014/main" id="{3A03731E-CCD3-44F7-9CBF-5075E2F68C83}"/>
+              </a:ext>
+            </a:extLst>
+          </p:cNvPr>
+          <p:cNvPicPr>
+            <a:picLocks noChangeAspect="1"/>
+          </p:cNvPicPr>
+          <p:nvPr/>
+        </p:nvPicPr>
+        <p:blipFill>
+          <a:blip r:embed="rId4">
+            <a:extLst>
+              <a:ext uri="{28A0092B-C50C-407E-A947-70E740481C1C}">
+                <a14:useLocalDpi xmlns:a14="http://schemas.microsoft.com/office/drawing/2010/main" val="0"/>
+              </a:ext>
+              <a:ext uri="{96DAC541-7B7A-43D3-8B79-37D633B846F1}">
+                <asvg:svgBlip xmlns:asvg="http://schemas.microsoft.com/office/drawing/2016/SVG/main" r:embed="rId5"/>
+              </a:ext>
+            </a:extLst>
+          </a:blip>
+          <a:stretch>
+            <a:fillRect/>
+          </a:stretch>
+        </p:blipFill>
+        <p:spPr>
+          <a:xfrm>
+            <a:off x="3883314" y="2830371"/>
+            <a:ext cx="4152323" cy="4152323"/>
+          </a:xfrm>
+          <a:prstGeom prst="rect">
+            <a:avLst/>
+          </a:prstGeom>
+        </p:spPr>
+      </p:pic>
+      <p:pic>
+        <p:nvPicPr>
+          <p:cNvPr id="6" name="图形 5">
+            <a:extLst>
+              <a:ext uri="{FF2B5EF4-FFF2-40B4-BE49-F238E27FC236}">
+                <a16:creationId xmlns:a16="http://schemas.microsoft.com/office/drawing/2014/main" id="{7F77AC19-EBE4-470C-B077-62804275F8E8}"/>
+              </a:ext>
+            </a:extLst>
+          </p:cNvPr>
+          <p:cNvPicPr>
+            <a:picLocks noChangeAspect="1"/>
+          </p:cNvPicPr>
+          <p:nvPr/>
+        </p:nvPicPr>
+        <p:blipFill>
+          <a:blip r:embed="rId6">
+            <a:extLst>
+              <a:ext uri="{28A0092B-C50C-407E-A947-70E740481C1C}">
+                <a14:useLocalDpi xmlns:a14="http://schemas.microsoft.com/office/drawing/2010/main" val="0"/>
+              </a:ext>
+              <a:ext uri="{96DAC541-7B7A-43D3-8B79-37D633B846F1}">
+                <asvg:svgBlip xmlns:asvg="http://schemas.microsoft.com/office/drawing/2016/SVG/main" r:embed="rId7"/>
+              </a:ext>
+            </a:extLst>
+          </a:blip>
+          <a:stretch>
+            <a:fillRect/>
+          </a:stretch>
+        </p:blipFill>
+        <p:spPr>
+          <a:xfrm>
+            <a:off x="-941820" y="2413577"/>
+            <a:ext cx="1015422" cy="1015422"/>
+          </a:xfrm>
+          <a:prstGeom prst="rect">
+            <a:avLst/>
+          </a:prstGeom>
+        </p:spPr>
+      </p:pic>
+    </p:spTree>
+    <p:extLst>
+      <p:ext uri="{BB962C8B-B14F-4D97-AF65-F5344CB8AC3E}">
+        <p14:creationId xmlns:p14="http://schemas.microsoft.com/office/powerpoint/2010/main" val="692827406"/>
+      </p:ext>
+    </p:extLst>
+  </p:cSld>
+  <p:clrMapOvr>
+    <a:masterClrMapping/>
+  </p:clrMapOvr>
+  <p:timing>
+    <p:tnLst>
+      <p:par>
+        <p:cTn id="1" dur="indefinite" restart="never" nodeType="tmRoot">
+          <p:childTnLst>
+            <p:seq concurrent="1" nextAc="seek">
+              <p:cTn id="2" dur="indefinite" nodeType="mainSeq">
+                <p:childTnLst>
+                  <p:par>
+                    <p:cTn id="3" fill="hold">
+                      <p:stCondLst>
+                        <p:cond delay="indefinite"/>
+                        <p:cond evt="onBegin" delay="0">
+                          <p:tn val="2"/>
+                        </p:cond>
+                      </p:stCondLst>
+                      <p:childTnLst>
+                        <p:par>
+                          <p:cTn id="4" fill="hold">
+                            <p:stCondLst>
+                              <p:cond delay="0"/>
+                            </p:stCondLst>
+                            <p:childTnLst>
+                              <p:par>
+                                <p:cTn id="5" presetID="44" presetClass="path" presetSubtype="0" fill="hold" nodeType="withEffect">
+                                  <p:stCondLst>
+                                    <p:cond delay="0"/>
+                                  </p:stCondLst>
+                                  <p:childTnLst>
+                                    <p:animMotion origin="layout" path="M -3.125E-6 -4.81481E-6 C 0.09818 -0.02175 0.19219 -0.08217 0.29024 -0.10439 C 0.35157 -0.11921 0.46368 -0.15578 0.54948 -0.14953 C 0.63516 -0.14305 0.74362 -0.08125 0.80495 -0.06643 C 0.90339 -0.04444 0.98008 0.02038 1.07878 0.04306 " pathEditMode="relative" rAng="0" ptsTypes="AAAAA">
+                                      <p:cBhvr>
+                                        <p:cTn id="6" dur="2000" fill="hold"/>
+                                        <p:tgtEl>
+                                          <p:spTgt spid="6"/>
+                                        </p:tgtEl>
+                                        <p:attrNameLst>
+                                          <p:attrName>ppt_x</p:attrName>
+                                          <p:attrName>ppt_y</p:attrName>
+                                        </p:attrNameLst>
+                                      </p:cBhvr>
+                                      <p:rCtr x="53932" y="-5370"/>
+                                    </p:animMotion>
+                                  </p:childTnLst>
+                                </p:cTn>
+                              </p:par>
+                            </p:childTnLst>
+                          </p:cTn>
+                        </p:par>
+                      </p:childTnLst>
+                    </p:cTn>
+                  </p:par>
+                </p:childTnLst>
+              </p:cTn>
+              <p:prevCondLst>
+                <p:cond evt="onPrev" delay="0">
+                  <p:tgtEl>
+                    <p:sldTgt/>
+                  </p:tgtEl>
+                </p:cond>
+              </p:prevCondLst>
+              <p:nextCondLst>
+                <p:cond evt="onNext" delay="0">
+                  <p:tgtEl>
+                    <p:sldTgt/>
+                  </p:tgtEl>
+                </p:cond>
+              </p:nextCondLst>
+            </p:seq>
+          </p:childTnLst>
+        </p:cTn>
+      </p:par>
+    </p:tnLst>
+  </p:timing>
+</p:sld>
+</file>
+
+<file path=ppt/slides/slide15.xml><?xml version="1.0" encoding="utf-8"?>
+<p:sld xmlns:a="http://schemas.openxmlformats.org/drawingml/2006/main" xmlns:r="http://schemas.openxmlformats.org/officeDocument/2006/relationships" xmlns:p="http://schemas.openxmlformats.org/presentationml/2006/main">
+  <p:cSld>
+    <p:spTree>
+      <p:nvGrpSpPr>
+        <p:cNvPr id="1" name=""/>
+        <p:cNvGrpSpPr/>
+        <p:nvPr/>
+      </p:nvGrpSpPr>
+      <p:grpSpPr>
+        <a:xfrm>
+          <a:off x="0" y="0"/>
+          <a:ext cx="0" cy="0"/>
+          <a:chOff x="0" y="0"/>
+          <a:chExt cx="0" cy="0"/>
+        </a:xfrm>
+      </p:grpSpPr>
+      <p:sp>
+        <p:nvSpPr>
+          <p:cNvPr id="10" name="标题 1">
+            <a:extLst>
+              <a:ext uri="{FF2B5EF4-FFF2-40B4-BE49-F238E27FC236}">
+                <a16:creationId xmlns:a16="http://schemas.microsoft.com/office/drawing/2014/main" id="{26E2AC48-A593-46C6-AF61-8997E0FA8C47}"/>
+              </a:ext>
+            </a:extLst>
+          </p:cNvPr>
+          <p:cNvSpPr>
+            <a:spLocks noGrp="1"/>
+          </p:cNvSpPr>
+          <p:nvPr>
+            <p:ph type="title"/>
+          </p:nvPr>
+        </p:nvSpPr>
+        <p:spPr>
+          <a:xfrm>
+            <a:off x="838200" y="365125"/>
+            <a:ext cx="10515600" cy="6091093"/>
+          </a:xfrm>
+        </p:spPr>
+        <p:txBody>
+          <a:bodyPr>
+            <a:normAutofit/>
+          </a:bodyPr>
+          <a:lstStyle/>
+          <a:p>
+            <a:r>
+              <a:rPr lang="en-US" altLang="zh-CN" sz="2200" b="1" u="sng" dirty="0"/>
+              <a:t>Sample 4  (Cont’d)</a:t>
+            </a:r>
+            <a:r>
+              <a:rPr lang="en-US" altLang="zh-CN" sz="2200" b="1" dirty="0"/>
+              <a:t>: </a:t>
+            </a:r>
+            <a:br>
+              <a:rPr lang="en-US" altLang="zh-CN" sz="2200" dirty="0"/>
+            </a:br>
+            <a:br>
+              <a:rPr lang="en-US" altLang="zh-CN" sz="2200" dirty="0"/>
+            </a:br>
+            <a:r>
+              <a:rPr lang="en-US" altLang="zh-CN" sz="2200" b="1" dirty="0"/>
+              <a:t>1. </a:t>
+            </a:r>
+            <a:r>
+              <a:rPr lang="zh-CN" altLang="en-US" sz="2200" b="1" dirty="0"/>
+              <a:t>目标：</a:t>
+            </a:r>
+            <a:r>
+              <a:rPr lang="zh-CN" altLang="en-US" sz="2200" dirty="0"/>
+              <a:t>云朵不动</a:t>
+            </a:r>
+            <a:br>
+              <a:rPr lang="en-US" altLang="zh-CN" sz="2200" dirty="0"/>
+            </a:br>
+            <a:r>
+              <a:rPr lang="en-US" altLang="zh-CN" sz="2200" dirty="0"/>
+              <a:t>2. </a:t>
+            </a:r>
+            <a:r>
+              <a:rPr lang="zh-CN" altLang="en-US" sz="2200" dirty="0"/>
+              <a:t>云朵不动存在问题，</a:t>
+            </a:r>
+            <a:r>
+              <a:rPr lang="zh-CN" altLang="en-US" sz="2200" b="1" dirty="0"/>
+              <a:t>解决方案：</a:t>
+            </a:r>
+            <a:r>
+              <a:rPr lang="zh-CN" altLang="en-US" sz="2200" dirty="0"/>
+              <a:t>云朵一直在画面中，只是路径需要移动而已，所以选择动作路径。</a:t>
+            </a:r>
+            <a:r>
+              <a:rPr lang="en-US" altLang="zh-CN" sz="2200" dirty="0"/>
+              <a:t>A) </a:t>
+            </a:r>
+            <a:r>
+              <a:rPr lang="zh-CN" altLang="en-US" sz="2200" dirty="0"/>
+              <a:t>选择云朵，点击动画，给月亮一个直线的动作路径，</a:t>
+            </a:r>
+            <a:r>
+              <a:rPr lang="en-US" altLang="zh-CN" sz="2200" dirty="0"/>
+              <a:t>B)</a:t>
+            </a:r>
+            <a:r>
+              <a:rPr lang="zh-CN" altLang="en-US" sz="2200" dirty="0"/>
+              <a:t> 取消平滑开始和平滑结束，</a:t>
+            </a:r>
+            <a:r>
+              <a:rPr lang="en-US" altLang="zh-CN" sz="2200" dirty="0"/>
+              <a:t>C) </a:t>
+            </a:r>
+            <a:r>
+              <a:rPr lang="zh-CN" altLang="en-US" sz="2200" dirty="0"/>
+              <a:t>持续时间设置成</a:t>
+            </a:r>
+            <a:r>
+              <a:rPr lang="en-US" altLang="zh-CN" sz="2200" dirty="0"/>
+              <a:t>5</a:t>
+            </a:r>
+            <a:r>
+              <a:rPr lang="zh-CN" altLang="en-US" sz="2200" dirty="0"/>
+              <a:t>秒，</a:t>
+            </a:r>
+            <a:r>
+              <a:rPr lang="en-US" altLang="zh-CN" sz="2200" dirty="0"/>
+              <a:t>D) </a:t>
+            </a:r>
+            <a:r>
+              <a:rPr lang="zh-CN" altLang="en-US" sz="2200" dirty="0"/>
+              <a:t>与上一个动画同时，</a:t>
+            </a:r>
+            <a:r>
+              <a:rPr lang="en-US" altLang="zh-CN" sz="2200" dirty="0"/>
+              <a:t>E)</a:t>
+            </a:r>
+            <a:r>
+              <a:rPr lang="zh-CN" altLang="en-US" sz="2200" dirty="0"/>
+              <a:t> 多复制几多云，如下：</a:t>
+            </a:r>
+            <a:br>
+              <a:rPr lang="en-US" altLang="zh-CN" sz="2200" dirty="0"/>
+            </a:br>
+            <a:br>
+              <a:rPr lang="en-US" altLang="zh-CN" sz="2200" dirty="0"/>
+            </a:br>
+            <a:r>
+              <a:rPr lang="zh-CN" altLang="en-US" sz="2200" dirty="0"/>
+              <a:t>并</a:t>
+            </a:r>
+            <a:r>
+              <a:rPr lang="en-US" altLang="zh-CN" sz="2200" dirty="0"/>
+              <a:t>B) </a:t>
+            </a:r>
+            <a:r>
+              <a:rPr lang="zh-CN" altLang="en-US" sz="2200" dirty="0"/>
+              <a:t>在效果选项中给动作路径设置成向上，</a:t>
+            </a:r>
+            <a:r>
+              <a:rPr lang="en-US" altLang="zh-CN" sz="2200" dirty="0"/>
+              <a:t>C) </a:t>
+            </a:r>
+            <a:r>
+              <a:rPr lang="zh-CN" altLang="en-US" sz="2200" dirty="0"/>
+              <a:t>点开效果选项右下角箭头，将平滑开始和平滑结束时间设置为</a:t>
+            </a:r>
+            <a:r>
+              <a:rPr lang="en-US" altLang="zh-CN" sz="2200" dirty="0"/>
+              <a:t>0</a:t>
+            </a:r>
+            <a:r>
+              <a:rPr lang="zh-CN" altLang="en-US" sz="2200" dirty="0"/>
+              <a:t>，</a:t>
+            </a:r>
+            <a:r>
+              <a:rPr lang="en-US" altLang="zh-CN" sz="2200" dirty="0"/>
+              <a:t>D)</a:t>
+            </a:r>
+            <a:r>
+              <a:rPr lang="zh-CN" altLang="en-US" sz="2200" dirty="0"/>
+              <a:t> 持续时间设置成</a:t>
+            </a:r>
+            <a:r>
+              <a:rPr lang="en-US" altLang="zh-CN" sz="2200" dirty="0"/>
+              <a:t>10</a:t>
+            </a:r>
+            <a:r>
+              <a:rPr lang="zh-CN" altLang="en-US" sz="2200" dirty="0"/>
+              <a:t>秒，</a:t>
+            </a:r>
+            <a:r>
+              <a:rPr lang="en-US" altLang="zh-CN" sz="2200" dirty="0"/>
+              <a:t>E) </a:t>
+            </a:r>
+            <a:r>
+              <a:rPr lang="zh-CN" altLang="en-US" sz="2200" dirty="0"/>
+              <a:t>与上一个动画同时，如下：</a:t>
+            </a:r>
+            <a:br>
+              <a:rPr lang="en-US" altLang="zh-CN" sz="2200" dirty="0"/>
+            </a:br>
+            <a:endParaRPr lang="zh-CN" altLang="en-US" sz="2200" dirty="0"/>
+          </a:p>
+        </p:txBody>
+      </p:sp>
+    </p:spTree>
+    <p:extLst>
+      <p:ext uri="{BB962C8B-B14F-4D97-AF65-F5344CB8AC3E}">
+        <p14:creationId xmlns:p14="http://schemas.microsoft.com/office/powerpoint/2010/main" val="2431222651"/>
+      </p:ext>
+    </p:extLst>
+  </p:cSld>
+  <p:clrMapOvr>
+    <a:masterClrMapping/>
+  </p:clrMapOvr>
+</p:sld>
+</file>
+
+<file path=ppt/slides/slide16.xml><?xml version="1.0" encoding="utf-8"?>
+<p:sld xmlns:a="http://schemas.openxmlformats.org/drawingml/2006/main" xmlns:r="http://schemas.openxmlformats.org/officeDocument/2006/relationships" xmlns:p="http://schemas.openxmlformats.org/presentationml/2006/main">
+  <p:cSld>
+    <p:spTree>
+      <p:nvGrpSpPr>
+        <p:cNvPr id="1" name=""/>
+        <p:cNvGrpSpPr/>
+        <p:nvPr/>
+      </p:nvGrpSpPr>
+      <p:grpSpPr>
+        <a:xfrm>
+          <a:off x="0" y="0"/>
+          <a:ext cx="0" cy="0"/>
+          <a:chOff x="0" y="0"/>
+          <a:chExt cx="0" cy="0"/>
+        </a:xfrm>
+      </p:grpSpPr>
+      <p:sp>
+        <p:nvSpPr>
+          <p:cNvPr id="2" name="标题 1">
+            <a:extLst>
+              <a:ext uri="{FF2B5EF4-FFF2-40B4-BE49-F238E27FC236}">
+                <a16:creationId xmlns:a16="http://schemas.microsoft.com/office/drawing/2014/main" id="{80FCD86E-C818-4A0A-AFFC-712C60E4E340}"/>
+              </a:ext>
+            </a:extLst>
+          </p:cNvPr>
+          <p:cNvSpPr>
+            <a:spLocks noGrp="1"/>
+          </p:cNvSpPr>
+          <p:nvPr>
+            <p:ph type="title"/>
+          </p:nvPr>
+        </p:nvSpPr>
+        <p:spPr/>
+        <p:txBody>
+          <a:bodyPr/>
+          <a:lstStyle/>
+          <a:p>
+            <a:endParaRPr lang="zh-CN" altLang="en-US"/>
+          </a:p>
+        </p:txBody>
+      </p:sp>
+      <p:pic>
+        <p:nvPicPr>
+          <p:cNvPr id="4" name="内容占位符 3">
+            <a:extLst>
+              <a:ext uri="{FF2B5EF4-FFF2-40B4-BE49-F238E27FC236}">
+                <a16:creationId xmlns:a16="http://schemas.microsoft.com/office/drawing/2014/main" id="{59D6641A-E17F-400D-8B5E-63014B7A6F5C}"/>
+              </a:ext>
+            </a:extLst>
+          </p:cNvPr>
+          <p:cNvPicPr>
+            <a:picLocks noGrp="1" noChangeAspect="1"/>
+          </p:cNvPicPr>
+          <p:nvPr>
+            <p:ph idx="1"/>
+          </p:nvPr>
+        </p:nvPicPr>
+        <p:blipFill>
+          <a:blip r:embed="rId2">
+            <a:extLst>
+              <a:ext uri="{28A0092B-C50C-407E-A947-70E740481C1C}">
+                <a14:useLocalDpi xmlns:a14="http://schemas.microsoft.com/office/drawing/2010/main" val="0"/>
+              </a:ext>
+              <a:ext uri="{96DAC541-7B7A-43D3-8B79-37D633B846F1}">
+                <asvg:svgBlip xmlns:asvg="http://schemas.microsoft.com/office/drawing/2016/SVG/main" r:embed="rId3"/>
+              </a:ext>
+            </a:extLst>
+          </a:blip>
+          <a:stretch>
+            <a:fillRect/>
+          </a:stretch>
+        </p:blipFill>
+        <p:spPr>
+          <a:xfrm>
+            <a:off x="0" y="0"/>
+            <a:ext cx="12191999" cy="6857999"/>
+          </a:xfrm>
+          <a:prstGeom prst="rect">
+            <a:avLst/>
+          </a:prstGeom>
+        </p:spPr>
+      </p:pic>
+      <p:pic>
+        <p:nvPicPr>
+          <p:cNvPr id="5" name="内容占位符 4">
+            <a:extLst>
+              <a:ext uri="{FF2B5EF4-FFF2-40B4-BE49-F238E27FC236}">
+                <a16:creationId xmlns:a16="http://schemas.microsoft.com/office/drawing/2014/main" id="{3A03731E-CCD3-44F7-9CBF-5075E2F68C83}"/>
+              </a:ext>
+            </a:extLst>
+          </p:cNvPr>
+          <p:cNvPicPr>
+            <a:picLocks noChangeAspect="1"/>
+          </p:cNvPicPr>
+          <p:nvPr/>
+        </p:nvPicPr>
+        <p:blipFill>
+          <a:blip r:embed="rId4">
+            <a:extLst>
+              <a:ext uri="{28A0092B-C50C-407E-A947-70E740481C1C}">
+                <a14:useLocalDpi xmlns:a14="http://schemas.microsoft.com/office/drawing/2010/main" val="0"/>
+              </a:ext>
+              <a:ext uri="{96DAC541-7B7A-43D3-8B79-37D633B846F1}">
+                <asvg:svgBlip xmlns:asvg="http://schemas.microsoft.com/office/drawing/2016/SVG/main" r:embed="rId5"/>
+              </a:ext>
+            </a:extLst>
+          </a:blip>
+          <a:stretch>
+            <a:fillRect/>
+          </a:stretch>
+        </p:blipFill>
+        <p:spPr>
+          <a:xfrm>
+            <a:off x="3883314" y="2830371"/>
+            <a:ext cx="4152323" cy="4152323"/>
+          </a:xfrm>
+          <a:prstGeom prst="rect">
+            <a:avLst/>
+          </a:prstGeom>
+        </p:spPr>
+      </p:pic>
+      <p:pic>
+        <p:nvPicPr>
+          <p:cNvPr id="7" name="图形 6">
+            <a:extLst>
+              <a:ext uri="{FF2B5EF4-FFF2-40B4-BE49-F238E27FC236}">
+                <a16:creationId xmlns:a16="http://schemas.microsoft.com/office/drawing/2014/main" id="{9647A57A-4209-49C2-BCE4-9BA26C70115A}"/>
+              </a:ext>
+            </a:extLst>
+          </p:cNvPr>
+          <p:cNvPicPr>
+            <a:picLocks noChangeAspect="1"/>
+          </p:cNvPicPr>
+          <p:nvPr/>
+        </p:nvPicPr>
+        <p:blipFill>
+          <a:blip r:embed="rId6">
+            <a:extLst>
+              <a:ext uri="{28A0092B-C50C-407E-A947-70E740481C1C}">
+                <a14:useLocalDpi xmlns:a14="http://schemas.microsoft.com/office/drawing/2010/main" val="0"/>
+              </a:ext>
+              <a:ext uri="{96DAC541-7B7A-43D3-8B79-37D633B846F1}">
+                <asvg:svgBlip xmlns:asvg="http://schemas.microsoft.com/office/drawing/2016/SVG/main" r:embed="rId7"/>
+              </a:ext>
+            </a:extLst>
+          </a:blip>
+          <a:stretch>
+            <a:fillRect/>
+          </a:stretch>
+        </p:blipFill>
+        <p:spPr>
+          <a:xfrm>
+            <a:off x="-759690" y="3247158"/>
+            <a:ext cx="639618" cy="639618"/>
+          </a:xfrm>
+          <a:prstGeom prst="rect">
+            <a:avLst/>
+          </a:prstGeom>
+        </p:spPr>
+      </p:pic>
+      <p:pic>
+        <p:nvPicPr>
+          <p:cNvPr id="15" name="图形 14">
+            <a:extLst>
+              <a:ext uri="{FF2B5EF4-FFF2-40B4-BE49-F238E27FC236}">
+                <a16:creationId xmlns:a16="http://schemas.microsoft.com/office/drawing/2014/main" id="{8E59B163-734B-410A-9FDE-8D4D3681A31C}"/>
+              </a:ext>
+            </a:extLst>
+          </p:cNvPr>
+          <p:cNvPicPr>
+            <a:picLocks noChangeAspect="1"/>
+          </p:cNvPicPr>
+          <p:nvPr/>
+        </p:nvPicPr>
+        <p:blipFill>
+          <a:blip r:embed="rId6">
+            <a:extLst>
+              <a:ext uri="{28A0092B-C50C-407E-A947-70E740481C1C}">
+                <a14:useLocalDpi xmlns:a14="http://schemas.microsoft.com/office/drawing/2010/main" val="0"/>
+              </a:ext>
+              <a:ext uri="{96DAC541-7B7A-43D3-8B79-37D633B846F1}">
+                <asvg:svgBlip xmlns:asvg="http://schemas.microsoft.com/office/drawing/2016/SVG/main" r:embed="rId7"/>
+              </a:ext>
+            </a:extLst>
+          </a:blip>
+          <a:stretch>
+            <a:fillRect/>
+          </a:stretch>
+        </p:blipFill>
+        <p:spPr>
+          <a:xfrm>
+            <a:off x="960584" y="4586723"/>
+            <a:ext cx="639618" cy="639618"/>
+          </a:xfrm>
+          <a:prstGeom prst="rect">
+            <a:avLst/>
+          </a:prstGeom>
+        </p:spPr>
+      </p:pic>
+      <p:pic>
+        <p:nvPicPr>
+          <p:cNvPr id="16" name="图形 15">
+            <a:extLst>
+              <a:ext uri="{FF2B5EF4-FFF2-40B4-BE49-F238E27FC236}">
+                <a16:creationId xmlns:a16="http://schemas.microsoft.com/office/drawing/2014/main" id="{397948A0-10A7-430F-A740-074AA81D1E43}"/>
+              </a:ext>
+            </a:extLst>
+          </p:cNvPr>
+          <p:cNvPicPr>
+            <a:picLocks noChangeAspect="1"/>
+          </p:cNvPicPr>
+          <p:nvPr/>
+        </p:nvPicPr>
+        <p:blipFill>
+          <a:blip r:embed="rId6">
+            <a:extLst>
+              <a:ext uri="{28A0092B-C50C-407E-A947-70E740481C1C}">
+                <a14:useLocalDpi xmlns:a14="http://schemas.microsoft.com/office/drawing/2010/main" val="0"/>
+              </a:ext>
+              <a:ext uri="{96DAC541-7B7A-43D3-8B79-37D633B846F1}">
+                <asvg:svgBlip xmlns:asvg="http://schemas.microsoft.com/office/drawing/2016/SVG/main" r:embed="rId7"/>
+              </a:ext>
+            </a:extLst>
+          </a:blip>
+          <a:stretch>
+            <a:fillRect/>
+          </a:stretch>
+        </p:blipFill>
+        <p:spPr>
+          <a:xfrm>
+            <a:off x="2951211" y="1940720"/>
+            <a:ext cx="639618" cy="639618"/>
+          </a:xfrm>
+          <a:prstGeom prst="rect">
+            <a:avLst/>
+          </a:prstGeom>
+        </p:spPr>
+      </p:pic>
+      <p:pic>
+        <p:nvPicPr>
+          <p:cNvPr id="18" name="图形 17">
+            <a:extLst>
+              <a:ext uri="{FF2B5EF4-FFF2-40B4-BE49-F238E27FC236}">
+                <a16:creationId xmlns:a16="http://schemas.microsoft.com/office/drawing/2014/main" id="{8C595458-8739-43B3-A691-69D2E2D2CA69}"/>
+              </a:ext>
+            </a:extLst>
+          </p:cNvPr>
+          <p:cNvPicPr>
+            <a:picLocks noChangeAspect="1"/>
+          </p:cNvPicPr>
+          <p:nvPr/>
+        </p:nvPicPr>
+        <p:blipFill>
+          <a:blip r:embed="rId6">
+            <a:extLst>
+              <a:ext uri="{28A0092B-C50C-407E-A947-70E740481C1C}">
+                <a14:useLocalDpi xmlns:a14="http://schemas.microsoft.com/office/drawing/2010/main" val="0"/>
+              </a:ext>
+              <a:ext uri="{96DAC541-7B7A-43D3-8B79-37D633B846F1}">
+                <asvg:svgBlip xmlns:asvg="http://schemas.microsoft.com/office/drawing/2016/SVG/main" r:embed="rId7"/>
+              </a:ext>
+            </a:extLst>
+          </a:blip>
+          <a:stretch>
+            <a:fillRect/>
+          </a:stretch>
+        </p:blipFill>
+        <p:spPr>
+          <a:xfrm>
+            <a:off x="12448632" y="708097"/>
+            <a:ext cx="639618" cy="639618"/>
+          </a:xfrm>
+          <a:prstGeom prst="rect">
+            <a:avLst/>
+          </a:prstGeom>
+        </p:spPr>
+      </p:pic>
+    </p:spTree>
+    <p:extLst>
+      <p:ext uri="{BB962C8B-B14F-4D97-AF65-F5344CB8AC3E}">
+        <p14:creationId xmlns:p14="http://schemas.microsoft.com/office/powerpoint/2010/main" val="2593923567"/>
+      </p:ext>
+    </p:extLst>
+  </p:cSld>
+  <p:clrMapOvr>
+    <a:masterClrMapping/>
+  </p:clrMapOvr>
+  <p:timing>
+    <p:tnLst>
+      <p:par>
+        <p:cTn id="1" dur="indefinite" restart="never" nodeType="tmRoot">
+          <p:childTnLst>
+            <p:seq concurrent="1" nextAc="seek">
+              <p:cTn id="2" dur="indefinite" nodeType="mainSeq">
+                <p:childTnLst>
+                  <p:par>
+                    <p:cTn id="3" fill="hold">
+                      <p:stCondLst>
+                        <p:cond delay="indefinite"/>
+                        <p:cond evt="onBegin" delay="0">
+                          <p:tn val="2"/>
+                        </p:cond>
+                      </p:stCondLst>
+                      <p:childTnLst>
+                        <p:par>
+                          <p:cTn id="4" fill="hold">
+                            <p:stCondLst>
+                              <p:cond delay="0"/>
+                            </p:stCondLst>
+                            <p:childTnLst>
+                              <p:par>
+                                <p:cTn id="5" presetID="63" presetClass="path" presetSubtype="0" fill="hold" nodeType="withEffect">
+                                  <p:stCondLst>
+                                    <p:cond delay="0"/>
+                                  </p:stCondLst>
+                                  <p:childTnLst>
+                                    <p:animMotion origin="layout" path="M -2.29167E-6 2.59259E-6 L 1.07162 0.00023 " pathEditMode="relative" rAng="0" ptsTypes="AA">
+                                      <p:cBhvr>
+                                        <p:cTn id="6" dur="5000" fill="hold"/>
+                                        <p:tgtEl>
+                                          <p:spTgt spid="7"/>
+                                        </p:tgtEl>
+                                        <p:attrNameLst>
+                                          <p:attrName>ppt_x</p:attrName>
+                                          <p:attrName>ppt_y</p:attrName>
+                                        </p:attrNameLst>
+                                      </p:cBhvr>
+                                      <p:rCtr x="53581" y="0"/>
+                                    </p:animMotion>
+                                  </p:childTnLst>
+                                </p:cTn>
+                              </p:par>
+                              <p:par>
+                                <p:cTn id="7" presetID="63" presetClass="path" presetSubtype="0" fill="hold" nodeType="withEffect">
+                                  <p:stCondLst>
+                                    <p:cond delay="0"/>
+                                  </p:stCondLst>
+                                  <p:childTnLst>
+                                    <p:animMotion origin="layout" path="M 2.08333E-6 2.22222E-6 L 1.07161 0.00023 " pathEditMode="relative" rAng="0" ptsTypes="AA">
+                                      <p:cBhvr>
+                                        <p:cTn id="8" dur="5000" fill="hold"/>
+                                        <p:tgtEl>
+                                          <p:spTgt spid="15"/>
+                                        </p:tgtEl>
+                                        <p:attrNameLst>
+                                          <p:attrName>ppt_x</p:attrName>
+                                          <p:attrName>ppt_y</p:attrName>
+                                        </p:attrNameLst>
+                                      </p:cBhvr>
+                                      <p:rCtr x="53581" y="0"/>
+                                    </p:animMotion>
+                                  </p:childTnLst>
+                                </p:cTn>
+                              </p:par>
+                              <p:par>
+                                <p:cTn id="9" presetID="63" presetClass="path" presetSubtype="0" fill="hold" nodeType="withEffect">
+                                  <p:stCondLst>
+                                    <p:cond delay="0"/>
+                                  </p:stCondLst>
+                                  <p:childTnLst>
+                                    <p:animMotion origin="layout" path="M 8.33333E-7 3.7037E-7 L 1.07161 0.00023 " pathEditMode="relative" rAng="0" ptsTypes="AA">
+                                      <p:cBhvr>
+                                        <p:cTn id="10" dur="5000" fill="hold"/>
+                                        <p:tgtEl>
+                                          <p:spTgt spid="16"/>
+                                        </p:tgtEl>
+                                        <p:attrNameLst>
+                                          <p:attrName>ppt_x</p:attrName>
+                                          <p:attrName>ppt_y</p:attrName>
+                                        </p:attrNameLst>
+                                      </p:cBhvr>
+                                      <p:rCtr x="53581" y="0"/>
+                                    </p:animMotion>
+                                  </p:childTnLst>
+                                </p:cTn>
+                              </p:par>
+                              <p:par>
+                                <p:cTn id="11" presetID="35" presetClass="path" presetSubtype="0" accel="50000" decel="50000" fill="hold" nodeType="withEffect">
+                                  <p:stCondLst>
+                                    <p:cond delay="0"/>
+                                  </p:stCondLst>
+                                  <p:childTnLst>
+                                    <p:animMotion origin="layout" path="M 4.375E-6 1.48148E-6 L -1.07592 -0.00139 " pathEditMode="relative" rAng="0" ptsTypes="AA">
+                                      <p:cBhvr>
+                                        <p:cTn id="12" dur="2000" fill="hold"/>
+                                        <p:tgtEl>
+                                          <p:spTgt spid="18"/>
+                                        </p:tgtEl>
+                                        <p:attrNameLst>
+                                          <p:attrName>ppt_x</p:attrName>
+                                          <p:attrName>ppt_y</p:attrName>
+                                        </p:attrNameLst>
+                                      </p:cBhvr>
+                                      <p:rCtr x="-53802" y="-69"/>
+                                    </p:animMotion>
+                                  </p:childTnLst>
+                                </p:cTn>
+                              </p:par>
+                            </p:childTnLst>
+                          </p:cTn>
+                        </p:par>
+                      </p:childTnLst>
+                    </p:cTn>
+                  </p:par>
+                </p:childTnLst>
+              </p:cTn>
+              <p:prevCondLst>
+                <p:cond evt="onPrev" delay="0">
+                  <p:tgtEl>
+                    <p:sldTgt/>
+                  </p:tgtEl>
+                </p:cond>
+              </p:prevCondLst>
+              <p:nextCondLst>
+                <p:cond evt="onNext" delay="0">
+                  <p:tgtEl>
+                    <p:sldTgt/>
+                  </p:tgtEl>
+                </p:cond>
+              </p:nextCondLst>
+            </p:seq>
+          </p:childTnLst>
+        </p:cTn>
+      </p:par>
+    </p:tnLst>
+  </p:timing>
+</p:sld>
+</file>
+
 <file path=ppt/slides/slide2.xml><?xml version="1.0" encoding="utf-8"?>
 <p:sld xmlns:a="http://schemas.openxmlformats.org/drawingml/2006/main" xmlns:r="http://schemas.openxmlformats.org/officeDocument/2006/relationships" xmlns:p="http://schemas.openxmlformats.org/presentationml/2006/main">
   <p:cSld>
@@ -4115,12 +7243,16 @@
           <a:lstStyle/>
           <a:p>
             <a:r>
-              <a:rPr lang="en-US" altLang="zh-CN" sz="2200" u="sng" dirty="0"/>
+              <a:rPr lang="en-US" altLang="zh-CN" sz="2200" b="1" u="sng" dirty="0"/>
               <a:t>Sample 1</a:t>
             </a:r>
             <a:r>
+              <a:rPr lang="en-US" altLang="zh-CN" sz="2200" b="1" dirty="0"/>
+              <a:t>:</a:t>
+            </a:r>
+            <a:r>
               <a:rPr lang="en-US" altLang="zh-CN" sz="2200" dirty="0"/>
-              <a:t>: 3</a:t>
+              <a:t> 3</a:t>
             </a:r>
             <a:r>
               <a:rPr lang="zh-CN" altLang="en-US" sz="2200" dirty="0"/>
@@ -4852,12 +7984,16 @@
           <a:lstStyle/>
           <a:p>
             <a:r>
-              <a:rPr lang="en-US" altLang="zh-CN" sz="2200" u="sng" dirty="0"/>
+              <a:rPr lang="en-US" altLang="zh-CN" sz="2200" b="1" u="sng" dirty="0"/>
               <a:t>Sample 2</a:t>
             </a:r>
             <a:r>
+              <a:rPr lang="en-US" altLang="zh-CN" sz="2200" b="1" dirty="0"/>
+              <a:t>:</a:t>
+            </a:r>
+            <a:r>
               <a:rPr lang="en-US" altLang="zh-CN" sz="2200" dirty="0"/>
-              <a:t>: 3</a:t>
+              <a:t> 3</a:t>
             </a:r>
             <a:r>
               <a:rPr lang="zh-CN" altLang="en-US" sz="2200" dirty="0"/>
@@ -5393,12 +8529,16 @@
           <a:lstStyle/>
           <a:p>
             <a:r>
-              <a:rPr lang="en-US" altLang="zh-CN" sz="2200" u="sng" dirty="0"/>
+              <a:rPr lang="en-US" altLang="zh-CN" sz="2200" b="1" u="sng" dirty="0"/>
               <a:t>Sample 3</a:t>
             </a:r>
             <a:r>
+              <a:rPr lang="en-US" altLang="zh-CN" sz="2200" b="1" dirty="0"/>
+              <a:t>:</a:t>
+            </a:r>
+            <a:r>
               <a:rPr lang="en-US" altLang="zh-CN" sz="2200" dirty="0"/>
-              <a:t>: 3</a:t>
+              <a:t> 3</a:t>
             </a:r>
             <a:r>
               <a:rPr lang="zh-CN" altLang="en-US" sz="2200" dirty="0"/>
@@ -5770,12 +8910,16 @@
           <a:lstStyle/>
           <a:p>
             <a:r>
-              <a:rPr lang="en-US" altLang="zh-CN" sz="2200" u="sng" dirty="0"/>
+              <a:rPr lang="en-US" altLang="zh-CN" sz="2200" b="1" u="sng" dirty="0"/>
               <a:t>Sample 4</a:t>
             </a:r>
             <a:r>
+              <a:rPr lang="en-US" altLang="zh-CN" sz="2200" b="1" dirty="0"/>
+              <a:t>:</a:t>
+            </a:r>
+            <a:r>
               <a:rPr lang="en-US" altLang="zh-CN" sz="2200" dirty="0"/>
-              <a:t>: </a:t>
+              <a:t> </a:t>
             </a:r>
             <a:br>
               <a:rPr lang="en-US" altLang="zh-CN" sz="2200" dirty="0"/>
@@ -5788,8 +8932,12 @@
               <a:t>1. </a:t>
             </a:r>
             <a:r>
+              <a:rPr lang="zh-CN" altLang="en-US" sz="2200" b="1" dirty="0"/>
+              <a:t>目标：</a:t>
+            </a:r>
+            <a:r>
               <a:rPr lang="zh-CN" altLang="en-US" sz="2200" dirty="0"/>
-              <a:t>选中所有星星，选择翻转式由远及近进入</a:t>
+              <a:t>选中所有星星，选择翻转式由远及近进入，如下：</a:t>
             </a:r>
             <a:br>
               <a:rPr lang="en-US" altLang="zh-CN" sz="2200" dirty="0"/>
@@ -5889,8 +9037,8 @@
         </p:blipFill>
         <p:spPr>
           <a:xfrm>
-            <a:off x="0" y="123170"/>
-            <a:ext cx="12191999" cy="6734829"/>
+            <a:off x="0" y="0"/>
+            <a:ext cx="12191999" cy="6857999"/>
           </a:xfrm>
           <a:prstGeom prst="rect">
             <a:avLst/>
@@ -6914,11 +10062,11 @@
           <a:lstStyle/>
           <a:p>
             <a:r>
-              <a:rPr lang="en-US" altLang="zh-CN" sz="2200" u="sng" dirty="0"/>
+              <a:rPr lang="en-US" altLang="zh-CN" sz="2200" b="1" u="sng" dirty="0"/>
               <a:t>Sample 4  (Cont’d)</a:t>
             </a:r>
             <a:r>
-              <a:rPr lang="en-US" altLang="zh-CN" sz="2200" dirty="0"/>
+              <a:rPr lang="en-US" altLang="zh-CN" sz="2200" b="1" dirty="0"/>
               <a:t>: </a:t>
             </a:r>
             <a:br>
@@ -6932,6 +10080,10 @@
               <a:t>1. </a:t>
             </a:r>
             <a:r>
+              <a:rPr lang="zh-CN" altLang="en-US" sz="2200" b="1" dirty="0"/>
+              <a:t>目标：</a:t>
+            </a:r>
+            <a:r>
               <a:rPr lang="zh-CN" altLang="en-US" sz="2200" dirty="0"/>
               <a:t>选中所有星星，选择翻转式由远及近进入</a:t>
             </a:r>
@@ -6944,7 +10096,15 @@
             </a:r>
             <a:r>
               <a:rPr lang="zh-CN" altLang="en-US" sz="2200" dirty="0"/>
-              <a:t>所有星星同一时间闪烁问题，解决方案：点击动画窗格为每一个星星增加延迟</a:t>
+              <a:t>所有星星同一时间闪烁存在问题，</a:t>
+            </a:r>
+            <a:r>
+              <a:rPr lang="zh-CN" altLang="en-US" sz="2200" b="1" dirty="0"/>
+              <a:t>解决方案：</a:t>
+            </a:r>
+            <a:r>
+              <a:rPr lang="zh-CN" altLang="en-US" sz="2200" dirty="0"/>
+              <a:t>点击动画窗格为每一个星星增加延迟，如下：</a:t>
             </a:r>
             <a:br>
               <a:rPr lang="en-US" altLang="zh-CN" sz="2200" dirty="0"/>
@@ -7041,8 +10201,8 @@
         </p:blipFill>
         <p:spPr>
           <a:xfrm>
-            <a:off x="0" y="123170"/>
-            <a:ext cx="12191999" cy="6734829"/>
+            <a:off x="0" y="0"/>
+            <a:ext cx="12191999" cy="6857999"/>
           </a:xfrm>
           <a:prstGeom prst="rect">
             <a:avLst/>

--- a/PPT-Animation-Samples (Part 1).pptx
+++ b/PPT-Animation-Samples (Part 1).pptx
@@ -21,6 +21,10 @@
     <p:sldId id="270" r:id="rId15"/>
     <p:sldId id="273" r:id="rId16"/>
     <p:sldId id="272" r:id="rId17"/>
+    <p:sldId id="274" r:id="rId18"/>
+    <p:sldId id="275" r:id="rId19"/>
+    <p:sldId id="276" r:id="rId20"/>
+    <p:sldId id="277" r:id="rId21"/>
   </p:sldIdLst>
   <p:sldSz cx="12192000" cy="6858000"/>
   <p:notesSz cx="6858000" cy="9144000"/>
@@ -6058,65 +6062,15 @@
             </a:r>
             <a:r>
               <a:rPr lang="zh-CN" altLang="en-US" sz="2200" dirty="0"/>
-              <a:t> 多复制几多云，如下：</a:t>
-            </a:r>
-            <a:br>
+              <a:t> 多复制几多云，</a:t>
+            </a:r>
+            <a:r>
               <a:rPr lang="en-US" altLang="zh-CN" sz="2200" dirty="0"/>
-            </a:br>
-            <a:br>
-              <a:rPr lang="en-US" altLang="zh-CN" sz="2200" dirty="0"/>
-            </a:br>
+              <a:t>F) </a:t>
+            </a:r>
             <a:r>
               <a:rPr lang="zh-CN" altLang="en-US" sz="2200" dirty="0"/>
-              <a:t>并</a:t>
-            </a:r>
-            <a:r>
-              <a:rPr lang="en-US" altLang="zh-CN" sz="2200" dirty="0"/>
-              <a:t>B) </a:t>
-            </a:r>
-            <a:r>
-              <a:rPr lang="zh-CN" altLang="en-US" sz="2200" dirty="0"/>
-              <a:t>在效果选项中给动作路径设置成向上，</a:t>
-            </a:r>
-            <a:r>
-              <a:rPr lang="en-US" altLang="zh-CN" sz="2200" dirty="0"/>
-              <a:t>C) </a:t>
-            </a:r>
-            <a:r>
-              <a:rPr lang="zh-CN" altLang="en-US" sz="2200" dirty="0"/>
-              <a:t>点开效果选项右下角箭头，将平滑开始和平滑结束时间设置为</a:t>
-            </a:r>
-            <a:r>
-              <a:rPr lang="en-US" altLang="zh-CN" sz="2200" dirty="0"/>
-              <a:t>0</a:t>
-            </a:r>
-            <a:r>
-              <a:rPr lang="zh-CN" altLang="en-US" sz="2200" dirty="0"/>
-              <a:t>，</a:t>
-            </a:r>
-            <a:r>
-              <a:rPr lang="en-US" altLang="zh-CN" sz="2200" dirty="0"/>
-              <a:t>D)</a:t>
-            </a:r>
-            <a:r>
-              <a:rPr lang="zh-CN" altLang="en-US" sz="2200" dirty="0"/>
-              <a:t> 持续时间设置成</a:t>
-            </a:r>
-            <a:r>
-              <a:rPr lang="en-US" altLang="zh-CN" sz="2200" dirty="0"/>
-              <a:t>10</a:t>
-            </a:r>
-            <a:r>
-              <a:rPr lang="zh-CN" altLang="en-US" sz="2200" dirty="0"/>
-              <a:t>秒，</a:t>
-            </a:r>
-            <a:r>
-              <a:rPr lang="en-US" altLang="zh-CN" sz="2200" dirty="0"/>
-              <a:t>E) </a:t>
-            </a:r>
-            <a:r>
-              <a:rPr lang="zh-CN" altLang="en-US" sz="2200" dirty="0"/>
-              <a:t>与上一个动画同时，如下：</a:t>
+              <a:t>有的云大朵一点有的小朵一点，如下：</a:t>
             </a:r>
             <a:br>
               <a:rPr lang="en-US" altLang="zh-CN" sz="2200" dirty="0"/>
@@ -6291,8 +6245,8 @@
         </p:blipFill>
         <p:spPr>
           <a:xfrm>
-            <a:off x="-759690" y="3247158"/>
-            <a:ext cx="639618" cy="639618"/>
+            <a:off x="-759691" y="3247157"/>
+            <a:ext cx="702673" cy="702673"/>
           </a:xfrm>
           <a:prstGeom prst="rect">
             <a:avLst/>
@@ -6330,8 +6284,8 @@
         </p:blipFill>
         <p:spPr>
           <a:xfrm>
-            <a:off x="960584" y="4586723"/>
-            <a:ext cx="639618" cy="639618"/>
+            <a:off x="751791" y="4468306"/>
+            <a:ext cx="848412" cy="848412"/>
           </a:xfrm>
           <a:prstGeom prst="rect">
             <a:avLst/>
@@ -6369,8 +6323,8 @@
         </p:blipFill>
         <p:spPr>
           <a:xfrm>
-            <a:off x="2951211" y="1940720"/>
-            <a:ext cx="639618" cy="639618"/>
+            <a:off x="2951210" y="1648235"/>
+            <a:ext cx="932103" cy="932103"/>
           </a:xfrm>
           <a:prstGeom prst="rect">
             <a:avLst/>
@@ -6408,8 +6362,86 @@
         </p:blipFill>
         <p:spPr>
           <a:xfrm>
-            <a:off x="12448632" y="708097"/>
-            <a:ext cx="639618" cy="639618"/>
+            <a:off x="12448632" y="766147"/>
+            <a:ext cx="581567" cy="581567"/>
+          </a:xfrm>
+          <a:prstGeom prst="rect">
+            <a:avLst/>
+          </a:prstGeom>
+        </p:spPr>
+      </p:pic>
+      <p:pic>
+        <p:nvPicPr>
+          <p:cNvPr id="19" name="图形 18">
+            <a:extLst>
+              <a:ext uri="{FF2B5EF4-FFF2-40B4-BE49-F238E27FC236}">
+                <a16:creationId xmlns:a16="http://schemas.microsoft.com/office/drawing/2014/main" id="{7E2523BD-9C04-4E94-AAC2-7CCF259FBE8A}"/>
+              </a:ext>
+            </a:extLst>
+          </p:cNvPr>
+          <p:cNvPicPr>
+            <a:picLocks noChangeAspect="1"/>
+          </p:cNvPicPr>
+          <p:nvPr/>
+        </p:nvPicPr>
+        <p:blipFill>
+          <a:blip r:embed="rId6">
+            <a:extLst>
+              <a:ext uri="{28A0092B-C50C-407E-A947-70E740481C1C}">
+                <a14:useLocalDpi xmlns:a14="http://schemas.microsoft.com/office/drawing/2010/main" val="0"/>
+              </a:ext>
+              <a:ext uri="{96DAC541-7B7A-43D3-8B79-37D633B846F1}">
+                <asvg:svgBlip xmlns:asvg="http://schemas.microsoft.com/office/drawing/2016/SVG/main" r:embed="rId7"/>
+              </a:ext>
+            </a:extLst>
+          </a:blip>
+          <a:stretch>
+            <a:fillRect/>
+          </a:stretch>
+        </p:blipFill>
+        <p:spPr>
+          <a:xfrm>
+            <a:off x="7839172" y="74341"/>
+            <a:ext cx="581567" cy="581567"/>
+          </a:xfrm>
+          <a:prstGeom prst="rect">
+            <a:avLst/>
+          </a:prstGeom>
+        </p:spPr>
+      </p:pic>
+      <p:pic>
+        <p:nvPicPr>
+          <p:cNvPr id="20" name="图形 19">
+            <a:extLst>
+              <a:ext uri="{FF2B5EF4-FFF2-40B4-BE49-F238E27FC236}">
+                <a16:creationId xmlns:a16="http://schemas.microsoft.com/office/drawing/2014/main" id="{D5A47567-3BB4-4009-A731-CAC413AD657A}"/>
+              </a:ext>
+            </a:extLst>
+          </p:cNvPr>
+          <p:cNvPicPr>
+            <a:picLocks noChangeAspect="1"/>
+          </p:cNvPicPr>
+          <p:nvPr/>
+        </p:nvPicPr>
+        <p:blipFill>
+          <a:blip r:embed="rId6">
+            <a:extLst>
+              <a:ext uri="{28A0092B-C50C-407E-A947-70E740481C1C}">
+                <a14:useLocalDpi xmlns:a14="http://schemas.microsoft.com/office/drawing/2010/main" val="0"/>
+              </a:ext>
+              <a:ext uri="{96DAC541-7B7A-43D3-8B79-37D633B846F1}">
+                <asvg:svgBlip xmlns:asvg="http://schemas.microsoft.com/office/drawing/2016/SVG/main" r:embed="rId7"/>
+              </a:ext>
+            </a:extLst>
+          </a:blip>
+          <a:stretch>
+            <a:fillRect/>
+          </a:stretch>
+        </p:blipFill>
+        <p:spPr>
+          <a:xfrm>
+            <a:off x="-1052175" y="1898268"/>
+            <a:ext cx="932103" cy="932103"/>
           </a:xfrm>
           <a:prstGeom prst="rect">
             <a:avLst/>
@@ -6455,7 +6487,7 @@
                                     <p:cond delay="0"/>
                                   </p:stCondLst>
                                   <p:childTnLst>
-                                    <p:animMotion origin="layout" path="M -2.29167E-6 2.59259E-6 L 1.07162 0.00023 " pathEditMode="relative" rAng="0" ptsTypes="AA">
+                                    <p:animMotion origin="layout" path="M 3.54167E-6 2.96296E-6 L 1.07161 0.00023 " pathEditMode="relative" rAng="0" ptsTypes="AA">
                                       <p:cBhvr>
                                         <p:cTn id="6" dur="5000" fill="hold"/>
                                         <p:tgtEl>
@@ -6477,7 +6509,7 @@
                                     <p:cond delay="0"/>
                                   </p:stCondLst>
                                   <p:childTnLst>
-                                    <p:animMotion origin="layout" path="M 2.08333E-6 2.22222E-6 L 1.07161 0.00023 " pathEditMode="relative" rAng="0" ptsTypes="AA">
+                                    <p:animMotion origin="layout" path="M -4.375E-6 4.07407E-6 L 1.07162 0.00023 " pathEditMode="relative" rAng="0" ptsTypes="AA">
                                       <p:cBhvr>
                                         <p:cTn id="8" dur="5000" fill="hold"/>
                                         <p:tgtEl>
@@ -6499,7 +6531,7 @@
                                     <p:cond delay="0"/>
                                   </p:stCondLst>
                                   <p:childTnLst>
-                                    <p:animMotion origin="layout" path="M 8.33333E-7 3.7037E-7 L 1.07161 0.00023 " pathEditMode="relative" rAng="0" ptsTypes="AA">
+                                    <p:animMotion origin="layout" path="M 1.66667E-6 -1.85185E-6 L 1.07161 0.00023 " pathEditMode="relative" rAng="0" ptsTypes="AA">
                                       <p:cBhvr>
                                         <p:cTn id="10" dur="5000" fill="hold"/>
                                         <p:tgtEl>
@@ -6521,9 +6553,9 @@
                                     <p:cond delay="0"/>
                                   </p:stCondLst>
                                   <p:childTnLst>
-                                    <p:animMotion origin="layout" path="M 4.375E-6 1.48148E-6 L -1.07592 -0.00139 " pathEditMode="relative" rAng="0" ptsTypes="AA">
-                                      <p:cBhvr>
-                                        <p:cTn id="12" dur="2000" fill="hold"/>
+                                    <p:animMotion origin="layout" path="M -1.875E-6 3.33333E-6 L -1.07591 -0.00139 " pathEditMode="relative" rAng="0" ptsTypes="AA">
+                                      <p:cBhvr>
+                                        <p:cTn id="12" dur="5000" fill="hold"/>
                                         <p:tgtEl>
                                           <p:spTgt spid="18"/>
                                         </p:tgtEl>
@@ -6533,6 +6565,50 @@
                                         </p:attrNameLst>
                                       </p:cBhvr>
                                       <p:rCtr x="-53802" y="-69"/>
+                                    </p:animMotion>
+                                  </p:childTnLst>
+                                </p:cTn>
+                              </p:par>
+                              <p:par>
+                                <p:cTn id="13" presetID="35" presetClass="path" presetSubtype="0" accel="50000" decel="50000" fill="hold" nodeType="withEffect">
+                                  <p:stCondLst>
+                                    <p:cond delay="0"/>
+                                  </p:stCondLst>
+                                  <p:childTnLst>
+                                    <p:animMotion origin="layout" path="M 3.125E-6 -7.40741E-7 L -1.07591 -0.00139 " pathEditMode="relative" rAng="0" ptsTypes="AA">
+                                      <p:cBhvr>
+                                        <p:cTn id="14" dur="5000" fill="hold"/>
+                                        <p:tgtEl>
+                                          <p:spTgt spid="19"/>
+                                        </p:tgtEl>
+                                        <p:attrNameLst>
+                                          <p:attrName>ppt_x</p:attrName>
+                                          <p:attrName>ppt_y</p:attrName>
+                                        </p:attrNameLst>
+                                      </p:cBhvr>
+                                      <p:rCtr x="-53802" y="-69"/>
+                                    </p:animMotion>
+                                  </p:childTnLst>
+                                </p:cTn>
+                              </p:par>
+                              <p:par>
+                                <p:cTn id="15" presetID="63" presetClass="path" presetSubtype="0" fill="hold" nodeType="withEffect">
+                                  <p:stCondLst>
+                                    <p:cond delay="0"/>
+                                  </p:stCondLst>
+                                  <p:childTnLst>
+                                    <p:animMotion origin="layout" path="M -3.125E-6 4.07407E-6 L 1.07162 0.00023 " pathEditMode="relative" rAng="0" ptsTypes="AA">
+                                      <p:cBhvr>
+                                        <p:cTn id="16" dur="5000" fill="hold"/>
+                                        <p:tgtEl>
+                                          <p:spTgt spid="20"/>
+                                        </p:tgtEl>
+                                        <p:attrNameLst>
+                                          <p:attrName>ppt_x</p:attrName>
+                                          <p:attrName>ppt_y</p:attrName>
+                                        </p:attrNameLst>
+                                      </p:cBhvr>
+                                      <p:rCtr x="53581" y="0"/>
                                     </p:animMotion>
                                   </p:childTnLst>
                                 </p:cTn>
@@ -6565,6 +6641,814 @@
       </p:par>
     </p:tnLst>
   </p:timing>
+</p:sld>
+</file>
+
+<file path=ppt/slides/slide17.xml><?xml version="1.0" encoding="utf-8"?>
+<p:sld xmlns:a="http://schemas.openxmlformats.org/drawingml/2006/main" xmlns:r="http://schemas.openxmlformats.org/officeDocument/2006/relationships" xmlns:p="http://schemas.openxmlformats.org/presentationml/2006/main">
+  <p:cSld>
+    <p:spTree>
+      <p:nvGrpSpPr>
+        <p:cNvPr id="1" name=""/>
+        <p:cNvGrpSpPr/>
+        <p:nvPr/>
+      </p:nvGrpSpPr>
+      <p:grpSpPr>
+        <a:xfrm>
+          <a:off x="0" y="0"/>
+          <a:ext cx="0" cy="0"/>
+          <a:chOff x="0" y="0"/>
+          <a:chExt cx="0" cy="0"/>
+        </a:xfrm>
+      </p:grpSpPr>
+      <p:sp>
+        <p:nvSpPr>
+          <p:cNvPr id="10" name="标题 1">
+            <a:extLst>
+              <a:ext uri="{FF2B5EF4-FFF2-40B4-BE49-F238E27FC236}">
+                <a16:creationId xmlns:a16="http://schemas.microsoft.com/office/drawing/2014/main" id="{26E2AC48-A593-46C6-AF61-8997E0FA8C47}"/>
+              </a:ext>
+            </a:extLst>
+          </p:cNvPr>
+          <p:cNvSpPr>
+            <a:spLocks noGrp="1"/>
+          </p:cNvSpPr>
+          <p:nvPr>
+            <p:ph type="title"/>
+          </p:nvPr>
+        </p:nvSpPr>
+        <p:spPr>
+          <a:xfrm>
+            <a:off x="838200" y="365125"/>
+            <a:ext cx="10515600" cy="6091093"/>
+          </a:xfrm>
+        </p:spPr>
+        <p:txBody>
+          <a:bodyPr>
+            <a:normAutofit/>
+          </a:bodyPr>
+          <a:lstStyle/>
+          <a:p>
+            <a:r>
+              <a:rPr lang="en-US" altLang="zh-CN" sz="2200" b="1" u="sng" dirty="0"/>
+              <a:t>Sample 4  (Cont’d)</a:t>
+            </a:r>
+            <a:r>
+              <a:rPr lang="en-US" altLang="zh-CN" sz="2200" b="1" dirty="0"/>
+              <a:t>: </a:t>
+            </a:r>
+            <a:br>
+              <a:rPr lang="en-US" altLang="zh-CN" sz="2200" dirty="0"/>
+            </a:br>
+            <a:br>
+              <a:rPr lang="en-US" altLang="zh-CN" sz="2200" dirty="0"/>
+            </a:br>
+            <a:r>
+              <a:rPr lang="en-US" altLang="zh-CN" sz="2200" b="1" dirty="0"/>
+              <a:t>1. </a:t>
+            </a:r>
+            <a:r>
+              <a:rPr lang="zh-CN" altLang="en-US" sz="2200" b="1" dirty="0"/>
+              <a:t>目标：</a:t>
+            </a:r>
+            <a:r>
+              <a:rPr lang="zh-CN" altLang="en-US" sz="2200" dirty="0"/>
+              <a:t>云朵不同时开始</a:t>
+            </a:r>
+            <a:br>
+              <a:rPr lang="en-US" altLang="zh-CN" sz="2200" dirty="0"/>
+            </a:br>
+            <a:r>
+              <a:rPr lang="en-US" altLang="zh-CN" sz="2200" dirty="0"/>
+              <a:t>2. </a:t>
+            </a:r>
+            <a:r>
+              <a:rPr lang="zh-CN" altLang="en-US" sz="2200" dirty="0"/>
+              <a:t>云朵同时开始存在问题，</a:t>
+            </a:r>
+            <a:r>
+              <a:rPr lang="zh-CN" altLang="en-US" sz="2200" b="1" dirty="0"/>
+              <a:t>解决方案：</a:t>
+            </a:r>
+            <a:r>
+              <a:rPr lang="en-US" altLang="zh-CN" sz="2200" dirty="0"/>
+              <a:t>A)</a:t>
+            </a:r>
+            <a:r>
+              <a:rPr lang="zh-CN" altLang="en-US" sz="2200" dirty="0"/>
+              <a:t> 每一朵增加延迟，如下：</a:t>
+            </a:r>
+            <a:br>
+              <a:rPr lang="en-US" altLang="zh-CN" sz="2200" dirty="0"/>
+            </a:br>
+            <a:endParaRPr lang="zh-CN" altLang="en-US" sz="2200" dirty="0"/>
+          </a:p>
+        </p:txBody>
+      </p:sp>
+    </p:spTree>
+    <p:extLst>
+      <p:ext uri="{BB962C8B-B14F-4D97-AF65-F5344CB8AC3E}">
+        <p14:creationId xmlns:p14="http://schemas.microsoft.com/office/powerpoint/2010/main" val="1272217505"/>
+      </p:ext>
+    </p:extLst>
+  </p:cSld>
+  <p:clrMapOvr>
+    <a:masterClrMapping/>
+  </p:clrMapOvr>
+</p:sld>
+</file>
+
+<file path=ppt/slides/slide18.xml><?xml version="1.0" encoding="utf-8"?>
+<p:sld xmlns:a="http://schemas.openxmlformats.org/drawingml/2006/main" xmlns:r="http://schemas.openxmlformats.org/officeDocument/2006/relationships" xmlns:p="http://schemas.openxmlformats.org/presentationml/2006/main">
+  <p:cSld>
+    <p:spTree>
+      <p:nvGrpSpPr>
+        <p:cNvPr id="1" name=""/>
+        <p:cNvGrpSpPr/>
+        <p:nvPr/>
+      </p:nvGrpSpPr>
+      <p:grpSpPr>
+        <a:xfrm>
+          <a:off x="0" y="0"/>
+          <a:ext cx="0" cy="0"/>
+          <a:chOff x="0" y="0"/>
+          <a:chExt cx="0" cy="0"/>
+        </a:xfrm>
+      </p:grpSpPr>
+      <p:sp>
+        <p:nvSpPr>
+          <p:cNvPr id="2" name="标题 1">
+            <a:extLst>
+              <a:ext uri="{FF2B5EF4-FFF2-40B4-BE49-F238E27FC236}">
+                <a16:creationId xmlns:a16="http://schemas.microsoft.com/office/drawing/2014/main" id="{80FCD86E-C818-4A0A-AFFC-712C60E4E340}"/>
+              </a:ext>
+            </a:extLst>
+          </p:cNvPr>
+          <p:cNvSpPr>
+            <a:spLocks noGrp="1"/>
+          </p:cNvSpPr>
+          <p:nvPr>
+            <p:ph type="title"/>
+          </p:nvPr>
+        </p:nvSpPr>
+        <p:spPr/>
+        <p:txBody>
+          <a:bodyPr/>
+          <a:lstStyle/>
+          <a:p>
+            <a:endParaRPr lang="zh-CN" altLang="en-US"/>
+          </a:p>
+        </p:txBody>
+      </p:sp>
+      <p:pic>
+        <p:nvPicPr>
+          <p:cNvPr id="4" name="内容占位符 3">
+            <a:extLst>
+              <a:ext uri="{FF2B5EF4-FFF2-40B4-BE49-F238E27FC236}">
+                <a16:creationId xmlns:a16="http://schemas.microsoft.com/office/drawing/2014/main" id="{59D6641A-E17F-400D-8B5E-63014B7A6F5C}"/>
+              </a:ext>
+            </a:extLst>
+          </p:cNvPr>
+          <p:cNvPicPr>
+            <a:picLocks noGrp="1" noChangeAspect="1"/>
+          </p:cNvPicPr>
+          <p:nvPr>
+            <p:ph idx="1"/>
+          </p:nvPr>
+        </p:nvPicPr>
+        <p:blipFill>
+          <a:blip r:embed="rId2">
+            <a:extLst>
+              <a:ext uri="{28A0092B-C50C-407E-A947-70E740481C1C}">
+                <a14:useLocalDpi xmlns:a14="http://schemas.microsoft.com/office/drawing/2010/main" val="0"/>
+              </a:ext>
+              <a:ext uri="{96DAC541-7B7A-43D3-8B79-37D633B846F1}">
+                <asvg:svgBlip xmlns:asvg="http://schemas.microsoft.com/office/drawing/2016/SVG/main" r:embed="rId3"/>
+              </a:ext>
+            </a:extLst>
+          </a:blip>
+          <a:stretch>
+            <a:fillRect/>
+          </a:stretch>
+        </p:blipFill>
+        <p:spPr>
+          <a:xfrm>
+            <a:off x="0" y="0"/>
+            <a:ext cx="12191999" cy="6857999"/>
+          </a:xfrm>
+          <a:prstGeom prst="rect">
+            <a:avLst/>
+          </a:prstGeom>
+        </p:spPr>
+      </p:pic>
+      <p:pic>
+        <p:nvPicPr>
+          <p:cNvPr id="5" name="内容占位符 4">
+            <a:extLst>
+              <a:ext uri="{FF2B5EF4-FFF2-40B4-BE49-F238E27FC236}">
+                <a16:creationId xmlns:a16="http://schemas.microsoft.com/office/drawing/2014/main" id="{3A03731E-CCD3-44F7-9CBF-5075E2F68C83}"/>
+              </a:ext>
+            </a:extLst>
+          </p:cNvPr>
+          <p:cNvPicPr>
+            <a:picLocks noChangeAspect="1"/>
+          </p:cNvPicPr>
+          <p:nvPr/>
+        </p:nvPicPr>
+        <p:blipFill>
+          <a:blip r:embed="rId4">
+            <a:extLst>
+              <a:ext uri="{28A0092B-C50C-407E-A947-70E740481C1C}">
+                <a14:useLocalDpi xmlns:a14="http://schemas.microsoft.com/office/drawing/2010/main" val="0"/>
+              </a:ext>
+              <a:ext uri="{96DAC541-7B7A-43D3-8B79-37D633B846F1}">
+                <asvg:svgBlip xmlns:asvg="http://schemas.microsoft.com/office/drawing/2016/SVG/main" r:embed="rId5"/>
+              </a:ext>
+            </a:extLst>
+          </a:blip>
+          <a:stretch>
+            <a:fillRect/>
+          </a:stretch>
+        </p:blipFill>
+        <p:spPr>
+          <a:xfrm>
+            <a:off x="3883314" y="2830371"/>
+            <a:ext cx="4152323" cy="4152323"/>
+          </a:xfrm>
+          <a:prstGeom prst="rect">
+            <a:avLst/>
+          </a:prstGeom>
+        </p:spPr>
+      </p:pic>
+      <p:pic>
+        <p:nvPicPr>
+          <p:cNvPr id="7" name="图形 6">
+            <a:extLst>
+              <a:ext uri="{FF2B5EF4-FFF2-40B4-BE49-F238E27FC236}">
+                <a16:creationId xmlns:a16="http://schemas.microsoft.com/office/drawing/2014/main" id="{9647A57A-4209-49C2-BCE4-9BA26C70115A}"/>
+              </a:ext>
+            </a:extLst>
+          </p:cNvPr>
+          <p:cNvPicPr>
+            <a:picLocks noChangeAspect="1"/>
+          </p:cNvPicPr>
+          <p:nvPr/>
+        </p:nvPicPr>
+        <p:blipFill>
+          <a:blip r:embed="rId6">
+            <a:extLst>
+              <a:ext uri="{28A0092B-C50C-407E-A947-70E740481C1C}">
+                <a14:useLocalDpi xmlns:a14="http://schemas.microsoft.com/office/drawing/2010/main" val="0"/>
+              </a:ext>
+              <a:ext uri="{96DAC541-7B7A-43D3-8B79-37D633B846F1}">
+                <asvg:svgBlip xmlns:asvg="http://schemas.microsoft.com/office/drawing/2016/SVG/main" r:embed="rId7"/>
+              </a:ext>
+            </a:extLst>
+          </a:blip>
+          <a:stretch>
+            <a:fillRect/>
+          </a:stretch>
+        </p:blipFill>
+        <p:spPr>
+          <a:xfrm>
+            <a:off x="-759691" y="3247157"/>
+            <a:ext cx="702673" cy="702673"/>
+          </a:xfrm>
+          <a:prstGeom prst="rect">
+            <a:avLst/>
+          </a:prstGeom>
+        </p:spPr>
+      </p:pic>
+      <p:pic>
+        <p:nvPicPr>
+          <p:cNvPr id="15" name="图形 14">
+            <a:extLst>
+              <a:ext uri="{FF2B5EF4-FFF2-40B4-BE49-F238E27FC236}">
+                <a16:creationId xmlns:a16="http://schemas.microsoft.com/office/drawing/2014/main" id="{8E59B163-734B-410A-9FDE-8D4D3681A31C}"/>
+              </a:ext>
+            </a:extLst>
+          </p:cNvPr>
+          <p:cNvPicPr>
+            <a:picLocks noChangeAspect="1"/>
+          </p:cNvPicPr>
+          <p:nvPr/>
+        </p:nvPicPr>
+        <p:blipFill>
+          <a:blip r:embed="rId6">
+            <a:extLst>
+              <a:ext uri="{28A0092B-C50C-407E-A947-70E740481C1C}">
+                <a14:useLocalDpi xmlns:a14="http://schemas.microsoft.com/office/drawing/2010/main" val="0"/>
+              </a:ext>
+              <a:ext uri="{96DAC541-7B7A-43D3-8B79-37D633B846F1}">
+                <asvg:svgBlip xmlns:asvg="http://schemas.microsoft.com/office/drawing/2016/SVG/main" r:embed="rId7"/>
+              </a:ext>
+            </a:extLst>
+          </a:blip>
+          <a:stretch>
+            <a:fillRect/>
+          </a:stretch>
+        </p:blipFill>
+        <p:spPr>
+          <a:xfrm>
+            <a:off x="751791" y="4468306"/>
+            <a:ext cx="848412" cy="848412"/>
+          </a:xfrm>
+          <a:prstGeom prst="rect">
+            <a:avLst/>
+          </a:prstGeom>
+        </p:spPr>
+      </p:pic>
+      <p:pic>
+        <p:nvPicPr>
+          <p:cNvPr id="16" name="图形 15">
+            <a:extLst>
+              <a:ext uri="{FF2B5EF4-FFF2-40B4-BE49-F238E27FC236}">
+                <a16:creationId xmlns:a16="http://schemas.microsoft.com/office/drawing/2014/main" id="{397948A0-10A7-430F-A740-074AA81D1E43}"/>
+              </a:ext>
+            </a:extLst>
+          </p:cNvPr>
+          <p:cNvPicPr>
+            <a:picLocks noChangeAspect="1"/>
+          </p:cNvPicPr>
+          <p:nvPr/>
+        </p:nvPicPr>
+        <p:blipFill>
+          <a:blip r:embed="rId6">
+            <a:extLst>
+              <a:ext uri="{28A0092B-C50C-407E-A947-70E740481C1C}">
+                <a14:useLocalDpi xmlns:a14="http://schemas.microsoft.com/office/drawing/2010/main" val="0"/>
+              </a:ext>
+              <a:ext uri="{96DAC541-7B7A-43D3-8B79-37D633B846F1}">
+                <asvg:svgBlip xmlns:asvg="http://schemas.microsoft.com/office/drawing/2016/SVG/main" r:embed="rId7"/>
+              </a:ext>
+            </a:extLst>
+          </a:blip>
+          <a:stretch>
+            <a:fillRect/>
+          </a:stretch>
+        </p:blipFill>
+        <p:spPr>
+          <a:xfrm>
+            <a:off x="2951210" y="1648235"/>
+            <a:ext cx="932103" cy="932103"/>
+          </a:xfrm>
+          <a:prstGeom prst="rect">
+            <a:avLst/>
+          </a:prstGeom>
+        </p:spPr>
+      </p:pic>
+      <p:pic>
+        <p:nvPicPr>
+          <p:cNvPr id="18" name="图形 17">
+            <a:extLst>
+              <a:ext uri="{FF2B5EF4-FFF2-40B4-BE49-F238E27FC236}">
+                <a16:creationId xmlns:a16="http://schemas.microsoft.com/office/drawing/2014/main" id="{8C595458-8739-43B3-A691-69D2E2D2CA69}"/>
+              </a:ext>
+            </a:extLst>
+          </p:cNvPr>
+          <p:cNvPicPr>
+            <a:picLocks noChangeAspect="1"/>
+          </p:cNvPicPr>
+          <p:nvPr/>
+        </p:nvPicPr>
+        <p:blipFill>
+          <a:blip r:embed="rId6">
+            <a:extLst>
+              <a:ext uri="{28A0092B-C50C-407E-A947-70E740481C1C}">
+                <a14:useLocalDpi xmlns:a14="http://schemas.microsoft.com/office/drawing/2010/main" val="0"/>
+              </a:ext>
+              <a:ext uri="{96DAC541-7B7A-43D3-8B79-37D633B846F1}">
+                <asvg:svgBlip xmlns:asvg="http://schemas.microsoft.com/office/drawing/2016/SVG/main" r:embed="rId7"/>
+              </a:ext>
+            </a:extLst>
+          </a:blip>
+          <a:stretch>
+            <a:fillRect/>
+          </a:stretch>
+        </p:blipFill>
+        <p:spPr>
+          <a:xfrm>
+            <a:off x="12448632" y="766147"/>
+            <a:ext cx="581567" cy="581567"/>
+          </a:xfrm>
+          <a:prstGeom prst="rect">
+            <a:avLst/>
+          </a:prstGeom>
+        </p:spPr>
+      </p:pic>
+      <p:pic>
+        <p:nvPicPr>
+          <p:cNvPr id="19" name="图形 18">
+            <a:extLst>
+              <a:ext uri="{FF2B5EF4-FFF2-40B4-BE49-F238E27FC236}">
+                <a16:creationId xmlns:a16="http://schemas.microsoft.com/office/drawing/2014/main" id="{7E2523BD-9C04-4E94-AAC2-7CCF259FBE8A}"/>
+              </a:ext>
+            </a:extLst>
+          </p:cNvPr>
+          <p:cNvPicPr>
+            <a:picLocks noChangeAspect="1"/>
+          </p:cNvPicPr>
+          <p:nvPr/>
+        </p:nvPicPr>
+        <p:blipFill>
+          <a:blip r:embed="rId6">
+            <a:extLst>
+              <a:ext uri="{28A0092B-C50C-407E-A947-70E740481C1C}">
+                <a14:useLocalDpi xmlns:a14="http://schemas.microsoft.com/office/drawing/2010/main" val="0"/>
+              </a:ext>
+              <a:ext uri="{96DAC541-7B7A-43D3-8B79-37D633B846F1}">
+                <asvg:svgBlip xmlns:asvg="http://schemas.microsoft.com/office/drawing/2016/SVG/main" r:embed="rId7"/>
+              </a:ext>
+            </a:extLst>
+          </a:blip>
+          <a:stretch>
+            <a:fillRect/>
+          </a:stretch>
+        </p:blipFill>
+        <p:spPr>
+          <a:xfrm>
+            <a:off x="7839172" y="74341"/>
+            <a:ext cx="581567" cy="581567"/>
+          </a:xfrm>
+          <a:prstGeom prst="rect">
+            <a:avLst/>
+          </a:prstGeom>
+        </p:spPr>
+      </p:pic>
+      <p:pic>
+        <p:nvPicPr>
+          <p:cNvPr id="20" name="图形 19">
+            <a:extLst>
+              <a:ext uri="{FF2B5EF4-FFF2-40B4-BE49-F238E27FC236}">
+                <a16:creationId xmlns:a16="http://schemas.microsoft.com/office/drawing/2014/main" id="{D5A47567-3BB4-4009-A731-CAC413AD657A}"/>
+              </a:ext>
+            </a:extLst>
+          </p:cNvPr>
+          <p:cNvPicPr>
+            <a:picLocks noChangeAspect="1"/>
+          </p:cNvPicPr>
+          <p:nvPr/>
+        </p:nvPicPr>
+        <p:blipFill>
+          <a:blip r:embed="rId6">
+            <a:extLst>
+              <a:ext uri="{28A0092B-C50C-407E-A947-70E740481C1C}">
+                <a14:useLocalDpi xmlns:a14="http://schemas.microsoft.com/office/drawing/2010/main" val="0"/>
+              </a:ext>
+              <a:ext uri="{96DAC541-7B7A-43D3-8B79-37D633B846F1}">
+                <asvg:svgBlip xmlns:asvg="http://schemas.microsoft.com/office/drawing/2016/SVG/main" r:embed="rId7"/>
+              </a:ext>
+            </a:extLst>
+          </a:blip>
+          <a:stretch>
+            <a:fillRect/>
+          </a:stretch>
+        </p:blipFill>
+        <p:spPr>
+          <a:xfrm>
+            <a:off x="-1052175" y="1898268"/>
+            <a:ext cx="932103" cy="932103"/>
+          </a:xfrm>
+          <a:prstGeom prst="rect">
+            <a:avLst/>
+          </a:prstGeom>
+        </p:spPr>
+      </p:pic>
+    </p:spTree>
+    <p:extLst>
+      <p:ext uri="{BB962C8B-B14F-4D97-AF65-F5344CB8AC3E}">
+        <p14:creationId xmlns:p14="http://schemas.microsoft.com/office/powerpoint/2010/main" val="2499488609"/>
+      </p:ext>
+    </p:extLst>
+  </p:cSld>
+  <p:clrMapOvr>
+    <a:masterClrMapping/>
+  </p:clrMapOvr>
+  <p:timing>
+    <p:tnLst>
+      <p:par>
+        <p:cTn id="1" dur="indefinite" restart="never" nodeType="tmRoot">
+          <p:childTnLst>
+            <p:seq concurrent="1" nextAc="seek">
+              <p:cTn id="2" dur="indefinite" nodeType="mainSeq">
+                <p:childTnLst>
+                  <p:par>
+                    <p:cTn id="3" fill="hold">
+                      <p:stCondLst>
+                        <p:cond delay="indefinite"/>
+                        <p:cond evt="onBegin" delay="0">
+                          <p:tn val="2"/>
+                        </p:cond>
+                      </p:stCondLst>
+                      <p:childTnLst>
+                        <p:par>
+                          <p:cTn id="4" fill="hold">
+                            <p:stCondLst>
+                              <p:cond delay="0"/>
+                            </p:stCondLst>
+                            <p:childTnLst>
+                              <p:par>
+                                <p:cTn id="5" presetID="63" presetClass="path" presetSubtype="0" fill="hold" nodeType="withEffect">
+                                  <p:stCondLst>
+                                    <p:cond delay="500"/>
+                                  </p:stCondLst>
+                                  <p:childTnLst>
+                                    <p:animMotion origin="layout" path="M 3.54167E-6 2.96296E-6 L 1.07161 0.00023 " pathEditMode="relative" rAng="0" ptsTypes="AA">
+                                      <p:cBhvr>
+                                        <p:cTn id="6" dur="5000" fill="hold"/>
+                                        <p:tgtEl>
+                                          <p:spTgt spid="7"/>
+                                        </p:tgtEl>
+                                        <p:attrNameLst>
+                                          <p:attrName>ppt_x</p:attrName>
+                                          <p:attrName>ppt_y</p:attrName>
+                                        </p:attrNameLst>
+                                      </p:cBhvr>
+                                      <p:rCtr x="53581" y="0"/>
+                                    </p:animMotion>
+                                  </p:childTnLst>
+                                </p:cTn>
+                              </p:par>
+                              <p:par>
+                                <p:cTn id="7" presetID="63" presetClass="path" presetSubtype="0" fill="hold" nodeType="withEffect">
+                                  <p:stCondLst>
+                                    <p:cond delay="0"/>
+                                  </p:stCondLst>
+                                  <p:childTnLst>
+                                    <p:animMotion origin="layout" path="M -4.375E-6 4.07407E-6 L 1.07162 0.00023 " pathEditMode="relative" rAng="0" ptsTypes="AA">
+                                      <p:cBhvr>
+                                        <p:cTn id="8" dur="5000" fill="hold"/>
+                                        <p:tgtEl>
+                                          <p:spTgt spid="15"/>
+                                        </p:tgtEl>
+                                        <p:attrNameLst>
+                                          <p:attrName>ppt_x</p:attrName>
+                                          <p:attrName>ppt_y</p:attrName>
+                                        </p:attrNameLst>
+                                      </p:cBhvr>
+                                      <p:rCtr x="53581" y="0"/>
+                                    </p:animMotion>
+                                  </p:childTnLst>
+                                </p:cTn>
+                              </p:par>
+                              <p:par>
+                                <p:cTn id="9" presetID="63" presetClass="path" presetSubtype="0" fill="hold" nodeType="withEffect">
+                                  <p:stCondLst>
+                                    <p:cond delay="500"/>
+                                  </p:stCondLst>
+                                  <p:childTnLst>
+                                    <p:animMotion origin="layout" path="M 1.66667E-6 -1.85185E-6 L 1.07161 0.00023 " pathEditMode="relative" rAng="0" ptsTypes="AA">
+                                      <p:cBhvr>
+                                        <p:cTn id="10" dur="5000" fill="hold"/>
+                                        <p:tgtEl>
+                                          <p:spTgt spid="16"/>
+                                        </p:tgtEl>
+                                        <p:attrNameLst>
+                                          <p:attrName>ppt_x</p:attrName>
+                                          <p:attrName>ppt_y</p:attrName>
+                                        </p:attrNameLst>
+                                      </p:cBhvr>
+                                      <p:rCtr x="53581" y="0"/>
+                                    </p:animMotion>
+                                  </p:childTnLst>
+                                </p:cTn>
+                              </p:par>
+                              <p:par>
+                                <p:cTn id="11" presetID="35" presetClass="path" presetSubtype="0" accel="50000" decel="50000" fill="hold" nodeType="withEffect">
+                                  <p:stCondLst>
+                                    <p:cond delay="3200"/>
+                                  </p:stCondLst>
+                                  <p:childTnLst>
+                                    <p:animMotion origin="layout" path="M -1.875E-6 3.33333E-6 L -1.07591 -0.00139 " pathEditMode="relative" rAng="0" ptsTypes="AA">
+                                      <p:cBhvr>
+                                        <p:cTn id="12" dur="5000" fill="hold"/>
+                                        <p:tgtEl>
+                                          <p:spTgt spid="18"/>
+                                        </p:tgtEl>
+                                        <p:attrNameLst>
+                                          <p:attrName>ppt_x</p:attrName>
+                                          <p:attrName>ppt_y</p:attrName>
+                                        </p:attrNameLst>
+                                      </p:cBhvr>
+                                      <p:rCtr x="-53802" y="-69"/>
+                                    </p:animMotion>
+                                  </p:childTnLst>
+                                </p:cTn>
+                              </p:par>
+                              <p:par>
+                                <p:cTn id="13" presetID="35" presetClass="path" presetSubtype="0" accel="50000" decel="50000" fill="hold" nodeType="withEffect">
+                                  <p:stCondLst>
+                                    <p:cond delay="0"/>
+                                  </p:stCondLst>
+                                  <p:childTnLst>
+                                    <p:animMotion origin="layout" path="M 3.125E-6 -7.40741E-7 L -1.07591 -0.00139 " pathEditMode="relative" rAng="0" ptsTypes="AA">
+                                      <p:cBhvr>
+                                        <p:cTn id="14" dur="5000" fill="hold"/>
+                                        <p:tgtEl>
+                                          <p:spTgt spid="19"/>
+                                        </p:tgtEl>
+                                        <p:attrNameLst>
+                                          <p:attrName>ppt_x</p:attrName>
+                                          <p:attrName>ppt_y</p:attrName>
+                                        </p:attrNameLst>
+                                      </p:cBhvr>
+                                      <p:rCtr x="-53802" y="-69"/>
+                                    </p:animMotion>
+                                  </p:childTnLst>
+                                </p:cTn>
+                              </p:par>
+                              <p:par>
+                                <p:cTn id="15" presetID="63" presetClass="path" presetSubtype="0" fill="hold" nodeType="withEffect">
+                                  <p:stCondLst>
+                                    <p:cond delay="2200"/>
+                                  </p:stCondLst>
+                                  <p:childTnLst>
+                                    <p:animMotion origin="layout" path="M -3.125E-6 4.07407E-6 L 1.07162 0.00023 " pathEditMode="relative" rAng="0" ptsTypes="AA">
+                                      <p:cBhvr>
+                                        <p:cTn id="16" dur="5000" fill="hold"/>
+                                        <p:tgtEl>
+                                          <p:spTgt spid="20"/>
+                                        </p:tgtEl>
+                                        <p:attrNameLst>
+                                          <p:attrName>ppt_x</p:attrName>
+                                          <p:attrName>ppt_y</p:attrName>
+                                        </p:attrNameLst>
+                                      </p:cBhvr>
+                                      <p:rCtr x="53581" y="0"/>
+                                    </p:animMotion>
+                                  </p:childTnLst>
+                                </p:cTn>
+                              </p:par>
+                            </p:childTnLst>
+                          </p:cTn>
+                        </p:par>
+                      </p:childTnLst>
+                    </p:cTn>
+                  </p:par>
+                </p:childTnLst>
+              </p:cTn>
+              <p:prevCondLst>
+                <p:cond evt="onPrev" delay="0">
+                  <p:tgtEl>
+                    <p:sldTgt/>
+                  </p:tgtEl>
+                </p:cond>
+              </p:prevCondLst>
+              <p:nextCondLst>
+                <p:cond evt="onNext" delay="0">
+                  <p:tgtEl>
+                    <p:sldTgt/>
+                  </p:tgtEl>
+                </p:cond>
+              </p:nextCondLst>
+            </p:seq>
+          </p:childTnLst>
+        </p:cTn>
+      </p:par>
+    </p:tnLst>
+  </p:timing>
+</p:sld>
+</file>
+
+<file path=ppt/slides/slide19.xml><?xml version="1.0" encoding="utf-8"?>
+<p:sld xmlns:a="http://schemas.openxmlformats.org/drawingml/2006/main" xmlns:r="http://schemas.openxmlformats.org/officeDocument/2006/relationships" xmlns:p="http://schemas.openxmlformats.org/presentationml/2006/main">
+  <p:cSld>
+    <p:spTree>
+      <p:nvGrpSpPr>
+        <p:cNvPr id="1" name=""/>
+        <p:cNvGrpSpPr/>
+        <p:nvPr/>
+      </p:nvGrpSpPr>
+      <p:grpSpPr>
+        <a:xfrm>
+          <a:off x="0" y="0"/>
+          <a:ext cx="0" cy="0"/>
+          <a:chOff x="0" y="0"/>
+          <a:chExt cx="0" cy="0"/>
+        </a:xfrm>
+      </p:grpSpPr>
+      <p:sp>
+        <p:nvSpPr>
+          <p:cNvPr id="10" name="标题 1">
+            <a:extLst>
+              <a:ext uri="{FF2B5EF4-FFF2-40B4-BE49-F238E27FC236}">
+                <a16:creationId xmlns:a16="http://schemas.microsoft.com/office/drawing/2014/main" id="{26E2AC48-A593-46C6-AF61-8997E0FA8C47}"/>
+              </a:ext>
+            </a:extLst>
+          </p:cNvPr>
+          <p:cNvSpPr>
+            <a:spLocks noGrp="1"/>
+          </p:cNvSpPr>
+          <p:nvPr>
+            <p:ph type="title"/>
+          </p:nvPr>
+        </p:nvSpPr>
+        <p:spPr>
+          <a:xfrm>
+            <a:off x="838200" y="365125"/>
+            <a:ext cx="10515600" cy="6091093"/>
+          </a:xfrm>
+        </p:spPr>
+        <p:txBody>
+          <a:bodyPr>
+            <a:normAutofit/>
+          </a:bodyPr>
+          <a:lstStyle/>
+          <a:p>
+            <a:r>
+              <a:rPr lang="en-US" altLang="zh-CN" sz="2200" b="1" u="sng" dirty="0"/>
+              <a:t>Sample 4  (Cont’d)</a:t>
+            </a:r>
+            <a:r>
+              <a:rPr lang="en-US" altLang="zh-CN" sz="2200" b="1" dirty="0"/>
+              <a:t>: </a:t>
+            </a:r>
+            <a:br>
+              <a:rPr lang="en-US" altLang="zh-CN" sz="2200" dirty="0"/>
+            </a:br>
+            <a:br>
+              <a:rPr lang="en-US" altLang="zh-CN" sz="2200" dirty="0"/>
+            </a:br>
+            <a:r>
+              <a:rPr lang="en-US" altLang="zh-CN" sz="2200" b="1" dirty="0"/>
+              <a:t>1. </a:t>
+            </a:r>
+            <a:r>
+              <a:rPr lang="zh-CN" altLang="en-US" sz="2200" b="1" dirty="0"/>
+              <a:t>目标：</a:t>
+            </a:r>
+            <a:r>
+              <a:rPr lang="zh-CN" altLang="en-US" sz="2200" dirty="0"/>
+              <a:t>叠加所有动画</a:t>
+            </a:r>
+            <a:br>
+              <a:rPr lang="en-US" altLang="zh-CN" sz="2200" dirty="0"/>
+            </a:br>
+            <a:r>
+              <a:rPr lang="en-US" altLang="zh-CN" sz="2200" dirty="0"/>
+              <a:t>2. </a:t>
+            </a:r>
+            <a:r>
+              <a:rPr lang="zh-CN" altLang="en-US" sz="2200" dirty="0"/>
+              <a:t>动画分开存在问题，</a:t>
+            </a:r>
+            <a:r>
+              <a:rPr lang="zh-CN" altLang="en-US" sz="2200" b="1" dirty="0"/>
+              <a:t>解决方案：</a:t>
+            </a:r>
+            <a:r>
+              <a:rPr lang="zh-CN" altLang="en-US" sz="2200" dirty="0"/>
+              <a:t>叠加所有动画在一个幻灯片里面，</a:t>
+            </a:r>
+            <a:r>
+              <a:rPr lang="en-US" altLang="zh-CN" sz="2200" dirty="0"/>
+              <a:t>A)</a:t>
+            </a:r>
+            <a:r>
+              <a:rPr lang="zh-CN" altLang="en-US" sz="2200" dirty="0"/>
+              <a:t> 以星星背景为底，把月亮</a:t>
+            </a:r>
+            <a:r>
+              <a:rPr lang="en-US" altLang="zh-CN" sz="2200" dirty="0"/>
+              <a:t>Control C</a:t>
+            </a:r>
+            <a:r>
+              <a:rPr lang="zh-CN" altLang="en-US" sz="2200" dirty="0"/>
+              <a:t>复制进来，</a:t>
+            </a:r>
+            <a:r>
+              <a:rPr lang="en-US" altLang="zh-CN" sz="2200" dirty="0"/>
+              <a:t>B)</a:t>
+            </a:r>
+            <a:r>
+              <a:rPr lang="zh-CN" altLang="en-US" sz="2200" dirty="0"/>
+              <a:t> 把所有云</a:t>
+            </a:r>
+            <a:r>
+              <a:rPr lang="en-US" altLang="zh-CN" sz="2200" dirty="0"/>
+              <a:t>Control C</a:t>
+            </a:r>
+            <a:r>
+              <a:rPr lang="zh-CN" altLang="en-US" sz="2200" dirty="0"/>
+              <a:t>复制进来，如下：</a:t>
+            </a:r>
+            <a:br>
+              <a:rPr lang="en-US" altLang="zh-CN" sz="2200" dirty="0"/>
+            </a:br>
+            <a:endParaRPr lang="zh-CN" altLang="en-US" sz="2200" dirty="0"/>
+          </a:p>
+        </p:txBody>
+      </p:sp>
+    </p:spTree>
+    <p:extLst>
+      <p:ext uri="{BB962C8B-B14F-4D97-AF65-F5344CB8AC3E}">
+        <p14:creationId xmlns:p14="http://schemas.microsoft.com/office/powerpoint/2010/main" val="260826043"/>
+      </p:ext>
+    </p:extLst>
+  </p:cSld>
+  <p:clrMapOvr>
+    <a:masterClrMapping/>
+  </p:clrMapOvr>
 </p:sld>
 </file>
 
@@ -7198,6 +8082,1331 @@
       <p:bldP spid="6" grpId="0" animBg="1"/>
       <p:bldP spid="7" grpId="0" animBg="1"/>
     </p:bldLst>
+  </p:timing>
+</p:sld>
+</file>
+
+<file path=ppt/slides/slide20.xml><?xml version="1.0" encoding="utf-8"?>
+<p:sld xmlns:a="http://schemas.openxmlformats.org/drawingml/2006/main" xmlns:r="http://schemas.openxmlformats.org/officeDocument/2006/relationships" xmlns:p="http://schemas.openxmlformats.org/presentationml/2006/main">
+  <p:cSld>
+    <p:spTree>
+      <p:nvGrpSpPr>
+        <p:cNvPr id="1" name=""/>
+        <p:cNvGrpSpPr/>
+        <p:nvPr/>
+      </p:nvGrpSpPr>
+      <p:grpSpPr>
+        <a:xfrm>
+          <a:off x="0" y="0"/>
+          <a:ext cx="0" cy="0"/>
+          <a:chOff x="0" y="0"/>
+          <a:chExt cx="0" cy="0"/>
+        </a:xfrm>
+      </p:grpSpPr>
+      <p:sp>
+        <p:nvSpPr>
+          <p:cNvPr id="2" name="标题 1">
+            <a:extLst>
+              <a:ext uri="{FF2B5EF4-FFF2-40B4-BE49-F238E27FC236}">
+                <a16:creationId xmlns:a16="http://schemas.microsoft.com/office/drawing/2014/main" id="{80FCD86E-C818-4A0A-AFFC-712C60E4E340}"/>
+              </a:ext>
+            </a:extLst>
+          </p:cNvPr>
+          <p:cNvSpPr>
+            <a:spLocks noGrp="1"/>
+          </p:cNvSpPr>
+          <p:nvPr>
+            <p:ph type="title"/>
+          </p:nvPr>
+        </p:nvSpPr>
+        <p:spPr/>
+        <p:txBody>
+          <a:bodyPr/>
+          <a:lstStyle/>
+          <a:p>
+            <a:endParaRPr lang="zh-CN" altLang="en-US"/>
+          </a:p>
+        </p:txBody>
+      </p:sp>
+      <p:pic>
+        <p:nvPicPr>
+          <p:cNvPr id="4" name="内容占位符 3">
+            <a:extLst>
+              <a:ext uri="{FF2B5EF4-FFF2-40B4-BE49-F238E27FC236}">
+                <a16:creationId xmlns:a16="http://schemas.microsoft.com/office/drawing/2014/main" id="{59D6641A-E17F-400D-8B5E-63014B7A6F5C}"/>
+              </a:ext>
+            </a:extLst>
+          </p:cNvPr>
+          <p:cNvPicPr>
+            <a:picLocks noGrp="1" noChangeAspect="1"/>
+          </p:cNvPicPr>
+          <p:nvPr>
+            <p:ph idx="1"/>
+          </p:nvPr>
+        </p:nvPicPr>
+        <p:blipFill>
+          <a:blip r:embed="rId2">
+            <a:extLst>
+              <a:ext uri="{28A0092B-C50C-407E-A947-70E740481C1C}">
+                <a14:useLocalDpi xmlns:a14="http://schemas.microsoft.com/office/drawing/2010/main" val="0"/>
+              </a:ext>
+              <a:ext uri="{96DAC541-7B7A-43D3-8B79-37D633B846F1}">
+                <asvg:svgBlip xmlns:asvg="http://schemas.microsoft.com/office/drawing/2016/SVG/main" r:embed="rId3"/>
+              </a:ext>
+            </a:extLst>
+          </a:blip>
+          <a:stretch>
+            <a:fillRect/>
+          </a:stretch>
+        </p:blipFill>
+        <p:spPr>
+          <a:xfrm>
+            <a:off x="0" y="0"/>
+            <a:ext cx="12191999" cy="6857999"/>
+          </a:xfrm>
+          <a:prstGeom prst="rect">
+            <a:avLst/>
+          </a:prstGeom>
+        </p:spPr>
+      </p:pic>
+      <p:pic>
+        <p:nvPicPr>
+          <p:cNvPr id="5" name="内容占位符 4">
+            <a:extLst>
+              <a:ext uri="{FF2B5EF4-FFF2-40B4-BE49-F238E27FC236}">
+                <a16:creationId xmlns:a16="http://schemas.microsoft.com/office/drawing/2014/main" id="{3A03731E-CCD3-44F7-9CBF-5075E2F68C83}"/>
+              </a:ext>
+            </a:extLst>
+          </p:cNvPr>
+          <p:cNvPicPr>
+            <a:picLocks noChangeAspect="1"/>
+          </p:cNvPicPr>
+          <p:nvPr/>
+        </p:nvPicPr>
+        <p:blipFill>
+          <a:blip r:embed="rId4">
+            <a:extLst>
+              <a:ext uri="{28A0092B-C50C-407E-A947-70E740481C1C}">
+                <a14:useLocalDpi xmlns:a14="http://schemas.microsoft.com/office/drawing/2010/main" val="0"/>
+              </a:ext>
+              <a:ext uri="{96DAC541-7B7A-43D3-8B79-37D633B846F1}">
+                <asvg:svgBlip xmlns:asvg="http://schemas.microsoft.com/office/drawing/2016/SVG/main" r:embed="rId5"/>
+              </a:ext>
+            </a:extLst>
+          </a:blip>
+          <a:stretch>
+            <a:fillRect/>
+          </a:stretch>
+        </p:blipFill>
+        <p:spPr>
+          <a:xfrm>
+            <a:off x="3883314" y="2830371"/>
+            <a:ext cx="4152323" cy="4152323"/>
+          </a:xfrm>
+          <a:prstGeom prst="rect">
+            <a:avLst/>
+          </a:prstGeom>
+        </p:spPr>
+      </p:pic>
+      <p:pic>
+        <p:nvPicPr>
+          <p:cNvPr id="10" name="图形 9">
+            <a:extLst>
+              <a:ext uri="{FF2B5EF4-FFF2-40B4-BE49-F238E27FC236}">
+                <a16:creationId xmlns:a16="http://schemas.microsoft.com/office/drawing/2014/main" id="{FCD06D6F-45CC-4BB4-B6F6-8375499D551B}"/>
+              </a:ext>
+            </a:extLst>
+          </p:cNvPr>
+          <p:cNvPicPr>
+            <a:picLocks noChangeAspect="1"/>
+          </p:cNvPicPr>
+          <p:nvPr/>
+        </p:nvPicPr>
+        <p:blipFill>
+          <a:blip r:embed="rId6">
+            <a:extLst>
+              <a:ext uri="{28A0092B-C50C-407E-A947-70E740481C1C}">
+                <a14:useLocalDpi xmlns:a14="http://schemas.microsoft.com/office/drawing/2010/main" val="0"/>
+              </a:ext>
+              <a:ext uri="{96DAC541-7B7A-43D3-8B79-37D633B846F1}">
+                <asvg:svgBlip xmlns:asvg="http://schemas.microsoft.com/office/drawing/2016/SVG/main" r:embed="rId7"/>
+              </a:ext>
+            </a:extLst>
+          </a:blip>
+          <a:stretch>
+            <a:fillRect/>
+          </a:stretch>
+        </p:blipFill>
+        <p:spPr>
+          <a:xfrm>
+            <a:off x="3093028" y="2065411"/>
+            <a:ext cx="195118" cy="195118"/>
+          </a:xfrm>
+          <a:prstGeom prst="rect">
+            <a:avLst/>
+          </a:prstGeom>
+        </p:spPr>
+      </p:pic>
+      <p:pic>
+        <p:nvPicPr>
+          <p:cNvPr id="11" name="图形 10">
+            <a:extLst>
+              <a:ext uri="{FF2B5EF4-FFF2-40B4-BE49-F238E27FC236}">
+                <a16:creationId xmlns:a16="http://schemas.microsoft.com/office/drawing/2014/main" id="{D1EA145A-6A91-4942-97EF-2E33D02454EC}"/>
+              </a:ext>
+            </a:extLst>
+          </p:cNvPr>
+          <p:cNvPicPr>
+            <a:picLocks noChangeAspect="1"/>
+          </p:cNvPicPr>
+          <p:nvPr/>
+        </p:nvPicPr>
+        <p:blipFill>
+          <a:blip r:embed="rId6">
+            <a:extLst>
+              <a:ext uri="{28A0092B-C50C-407E-A947-70E740481C1C}">
+                <a14:useLocalDpi xmlns:a14="http://schemas.microsoft.com/office/drawing/2010/main" val="0"/>
+              </a:ext>
+              <a:ext uri="{96DAC541-7B7A-43D3-8B79-37D633B846F1}">
+                <asvg:svgBlip xmlns:asvg="http://schemas.microsoft.com/office/drawing/2016/SVG/main" r:embed="rId7"/>
+              </a:ext>
+            </a:extLst>
+          </a:blip>
+          <a:stretch>
+            <a:fillRect/>
+          </a:stretch>
+        </p:blipFill>
+        <p:spPr>
+          <a:xfrm>
+            <a:off x="7512628" y="2162970"/>
+            <a:ext cx="195118" cy="195118"/>
+          </a:xfrm>
+          <a:prstGeom prst="rect">
+            <a:avLst/>
+          </a:prstGeom>
+        </p:spPr>
+      </p:pic>
+      <p:pic>
+        <p:nvPicPr>
+          <p:cNvPr id="12" name="图形 11">
+            <a:extLst>
+              <a:ext uri="{FF2B5EF4-FFF2-40B4-BE49-F238E27FC236}">
+                <a16:creationId xmlns:a16="http://schemas.microsoft.com/office/drawing/2014/main" id="{1114A46C-3004-4909-8D0F-75CFF61CCA23}"/>
+              </a:ext>
+            </a:extLst>
+          </p:cNvPr>
+          <p:cNvPicPr>
+            <a:picLocks noChangeAspect="1"/>
+          </p:cNvPicPr>
+          <p:nvPr/>
+        </p:nvPicPr>
+        <p:blipFill>
+          <a:blip r:embed="rId6">
+            <a:extLst>
+              <a:ext uri="{28A0092B-C50C-407E-A947-70E740481C1C}">
+                <a14:useLocalDpi xmlns:a14="http://schemas.microsoft.com/office/drawing/2010/main" val="0"/>
+              </a:ext>
+              <a:ext uri="{96DAC541-7B7A-43D3-8B79-37D633B846F1}">
+                <asvg:svgBlip xmlns:asvg="http://schemas.microsoft.com/office/drawing/2016/SVG/main" r:embed="rId7"/>
+              </a:ext>
+            </a:extLst>
+          </a:blip>
+          <a:stretch>
+            <a:fillRect/>
+          </a:stretch>
+        </p:blipFill>
+        <p:spPr>
+          <a:xfrm>
+            <a:off x="4337049" y="2927349"/>
+            <a:ext cx="195118" cy="195118"/>
+          </a:xfrm>
+          <a:prstGeom prst="rect">
+            <a:avLst/>
+          </a:prstGeom>
+        </p:spPr>
+      </p:pic>
+      <p:pic>
+        <p:nvPicPr>
+          <p:cNvPr id="13" name="图形 12">
+            <a:extLst>
+              <a:ext uri="{FF2B5EF4-FFF2-40B4-BE49-F238E27FC236}">
+                <a16:creationId xmlns:a16="http://schemas.microsoft.com/office/drawing/2014/main" id="{7AEE3D8D-5771-4333-9CFE-194A381A7D89}"/>
+              </a:ext>
+            </a:extLst>
+          </p:cNvPr>
+          <p:cNvPicPr>
+            <a:picLocks noChangeAspect="1"/>
+          </p:cNvPicPr>
+          <p:nvPr/>
+        </p:nvPicPr>
+        <p:blipFill>
+          <a:blip r:embed="rId6">
+            <a:extLst>
+              <a:ext uri="{28A0092B-C50C-407E-A947-70E740481C1C}">
+                <a14:useLocalDpi xmlns:a14="http://schemas.microsoft.com/office/drawing/2010/main" val="0"/>
+              </a:ext>
+              <a:ext uri="{96DAC541-7B7A-43D3-8B79-37D633B846F1}">
+                <asvg:svgBlip xmlns:asvg="http://schemas.microsoft.com/office/drawing/2016/SVG/main" r:embed="rId7"/>
+              </a:ext>
+            </a:extLst>
+          </a:blip>
+          <a:stretch>
+            <a:fillRect/>
+          </a:stretch>
+        </p:blipFill>
+        <p:spPr>
+          <a:xfrm>
+            <a:off x="9355283" y="2954769"/>
+            <a:ext cx="195118" cy="195118"/>
+          </a:xfrm>
+          <a:prstGeom prst="rect">
+            <a:avLst/>
+          </a:prstGeom>
+        </p:spPr>
+      </p:pic>
+      <p:pic>
+        <p:nvPicPr>
+          <p:cNvPr id="14" name="图形 13">
+            <a:extLst>
+              <a:ext uri="{FF2B5EF4-FFF2-40B4-BE49-F238E27FC236}">
+                <a16:creationId xmlns:a16="http://schemas.microsoft.com/office/drawing/2014/main" id="{3F9F8CFD-1AFE-4DBD-8D71-36C777780F18}"/>
+              </a:ext>
+            </a:extLst>
+          </p:cNvPr>
+          <p:cNvPicPr>
+            <a:picLocks noChangeAspect="1"/>
+          </p:cNvPicPr>
+          <p:nvPr/>
+        </p:nvPicPr>
+        <p:blipFill>
+          <a:blip r:embed="rId6">
+            <a:extLst>
+              <a:ext uri="{28A0092B-C50C-407E-A947-70E740481C1C}">
+                <a14:useLocalDpi xmlns:a14="http://schemas.microsoft.com/office/drawing/2010/main" val="0"/>
+              </a:ext>
+              <a:ext uri="{96DAC541-7B7A-43D3-8B79-37D633B846F1}">
+                <asvg:svgBlip xmlns:asvg="http://schemas.microsoft.com/office/drawing/2016/SVG/main" r:embed="rId7"/>
+              </a:ext>
+            </a:extLst>
+          </a:blip>
+          <a:stretch>
+            <a:fillRect/>
+          </a:stretch>
+        </p:blipFill>
+        <p:spPr>
+          <a:xfrm>
+            <a:off x="10749973" y="1920874"/>
+            <a:ext cx="195118" cy="195118"/>
+          </a:xfrm>
+          <a:prstGeom prst="rect">
+            <a:avLst/>
+          </a:prstGeom>
+        </p:spPr>
+      </p:pic>
+      <p:pic>
+        <p:nvPicPr>
+          <p:cNvPr id="15" name="图形 14">
+            <a:extLst>
+              <a:ext uri="{FF2B5EF4-FFF2-40B4-BE49-F238E27FC236}">
+                <a16:creationId xmlns:a16="http://schemas.microsoft.com/office/drawing/2014/main" id="{033FEB68-16D5-438D-9B84-9B01FB353E52}"/>
+              </a:ext>
+            </a:extLst>
+          </p:cNvPr>
+          <p:cNvPicPr>
+            <a:picLocks noChangeAspect="1"/>
+          </p:cNvPicPr>
+          <p:nvPr/>
+        </p:nvPicPr>
+        <p:blipFill>
+          <a:blip r:embed="rId8">
+            <a:extLst>
+              <a:ext uri="{28A0092B-C50C-407E-A947-70E740481C1C}">
+                <a14:useLocalDpi xmlns:a14="http://schemas.microsoft.com/office/drawing/2010/main" val="0"/>
+              </a:ext>
+              <a:ext uri="{96DAC541-7B7A-43D3-8B79-37D633B846F1}">
+                <asvg:svgBlip xmlns:asvg="http://schemas.microsoft.com/office/drawing/2016/SVG/main" r:embed="rId9"/>
+              </a:ext>
+            </a:extLst>
+          </a:blip>
+          <a:stretch>
+            <a:fillRect/>
+          </a:stretch>
+        </p:blipFill>
+        <p:spPr>
+          <a:xfrm>
+            <a:off x="-941820" y="2413577"/>
+            <a:ext cx="1015422" cy="1015422"/>
+          </a:xfrm>
+          <a:prstGeom prst="rect">
+            <a:avLst/>
+          </a:prstGeom>
+        </p:spPr>
+      </p:pic>
+      <p:pic>
+        <p:nvPicPr>
+          <p:cNvPr id="17" name="图形 16">
+            <a:extLst>
+              <a:ext uri="{FF2B5EF4-FFF2-40B4-BE49-F238E27FC236}">
+                <a16:creationId xmlns:a16="http://schemas.microsoft.com/office/drawing/2014/main" id="{352251E8-3686-416D-859F-F11C6F2D9FF1}"/>
+              </a:ext>
+            </a:extLst>
+          </p:cNvPr>
+          <p:cNvPicPr>
+            <a:picLocks noChangeAspect="1"/>
+          </p:cNvPicPr>
+          <p:nvPr/>
+        </p:nvPicPr>
+        <p:blipFill>
+          <a:blip r:embed="rId10">
+            <a:extLst>
+              <a:ext uri="{28A0092B-C50C-407E-A947-70E740481C1C}">
+                <a14:useLocalDpi xmlns:a14="http://schemas.microsoft.com/office/drawing/2010/main" val="0"/>
+              </a:ext>
+              <a:ext uri="{96DAC541-7B7A-43D3-8B79-37D633B846F1}">
+                <asvg:svgBlip xmlns:asvg="http://schemas.microsoft.com/office/drawing/2016/SVG/main" r:embed="rId11"/>
+              </a:ext>
+            </a:extLst>
+          </a:blip>
+          <a:stretch>
+            <a:fillRect/>
+          </a:stretch>
+        </p:blipFill>
+        <p:spPr>
+          <a:xfrm>
+            <a:off x="-759691" y="3247157"/>
+            <a:ext cx="702673" cy="702673"/>
+          </a:xfrm>
+          <a:prstGeom prst="rect">
+            <a:avLst/>
+          </a:prstGeom>
+        </p:spPr>
+      </p:pic>
+      <p:pic>
+        <p:nvPicPr>
+          <p:cNvPr id="18" name="图形 17">
+            <a:extLst>
+              <a:ext uri="{FF2B5EF4-FFF2-40B4-BE49-F238E27FC236}">
+                <a16:creationId xmlns:a16="http://schemas.microsoft.com/office/drawing/2014/main" id="{F267A458-1F7E-4B7B-9317-96D50BF0A3D0}"/>
+              </a:ext>
+            </a:extLst>
+          </p:cNvPr>
+          <p:cNvPicPr>
+            <a:picLocks noChangeAspect="1"/>
+          </p:cNvPicPr>
+          <p:nvPr/>
+        </p:nvPicPr>
+        <p:blipFill>
+          <a:blip r:embed="rId10">
+            <a:extLst>
+              <a:ext uri="{28A0092B-C50C-407E-A947-70E740481C1C}">
+                <a14:useLocalDpi xmlns:a14="http://schemas.microsoft.com/office/drawing/2010/main" val="0"/>
+              </a:ext>
+              <a:ext uri="{96DAC541-7B7A-43D3-8B79-37D633B846F1}">
+                <asvg:svgBlip xmlns:asvg="http://schemas.microsoft.com/office/drawing/2016/SVG/main" r:embed="rId11"/>
+              </a:ext>
+            </a:extLst>
+          </a:blip>
+          <a:stretch>
+            <a:fillRect/>
+          </a:stretch>
+        </p:blipFill>
+        <p:spPr>
+          <a:xfrm>
+            <a:off x="751791" y="4468306"/>
+            <a:ext cx="848412" cy="848412"/>
+          </a:xfrm>
+          <a:prstGeom prst="rect">
+            <a:avLst/>
+          </a:prstGeom>
+        </p:spPr>
+      </p:pic>
+      <p:pic>
+        <p:nvPicPr>
+          <p:cNvPr id="19" name="图形 18">
+            <a:extLst>
+              <a:ext uri="{FF2B5EF4-FFF2-40B4-BE49-F238E27FC236}">
+                <a16:creationId xmlns:a16="http://schemas.microsoft.com/office/drawing/2014/main" id="{957101E0-1C8F-43CA-844A-636F104CC67B}"/>
+              </a:ext>
+            </a:extLst>
+          </p:cNvPr>
+          <p:cNvPicPr>
+            <a:picLocks noChangeAspect="1"/>
+          </p:cNvPicPr>
+          <p:nvPr/>
+        </p:nvPicPr>
+        <p:blipFill>
+          <a:blip r:embed="rId10">
+            <a:extLst>
+              <a:ext uri="{28A0092B-C50C-407E-A947-70E740481C1C}">
+                <a14:useLocalDpi xmlns:a14="http://schemas.microsoft.com/office/drawing/2010/main" val="0"/>
+              </a:ext>
+              <a:ext uri="{96DAC541-7B7A-43D3-8B79-37D633B846F1}">
+                <asvg:svgBlip xmlns:asvg="http://schemas.microsoft.com/office/drawing/2016/SVG/main" r:embed="rId11"/>
+              </a:ext>
+            </a:extLst>
+          </a:blip>
+          <a:stretch>
+            <a:fillRect/>
+          </a:stretch>
+        </p:blipFill>
+        <p:spPr>
+          <a:xfrm>
+            <a:off x="2951210" y="1648235"/>
+            <a:ext cx="932103" cy="932103"/>
+          </a:xfrm>
+          <a:prstGeom prst="rect">
+            <a:avLst/>
+          </a:prstGeom>
+        </p:spPr>
+      </p:pic>
+      <p:pic>
+        <p:nvPicPr>
+          <p:cNvPr id="20" name="图形 19">
+            <a:extLst>
+              <a:ext uri="{FF2B5EF4-FFF2-40B4-BE49-F238E27FC236}">
+                <a16:creationId xmlns:a16="http://schemas.microsoft.com/office/drawing/2014/main" id="{0ED7FDDD-3C75-4305-A5FA-284780F47C26}"/>
+              </a:ext>
+            </a:extLst>
+          </p:cNvPr>
+          <p:cNvPicPr>
+            <a:picLocks noChangeAspect="1"/>
+          </p:cNvPicPr>
+          <p:nvPr/>
+        </p:nvPicPr>
+        <p:blipFill>
+          <a:blip r:embed="rId10">
+            <a:extLst>
+              <a:ext uri="{28A0092B-C50C-407E-A947-70E740481C1C}">
+                <a14:useLocalDpi xmlns:a14="http://schemas.microsoft.com/office/drawing/2010/main" val="0"/>
+              </a:ext>
+              <a:ext uri="{96DAC541-7B7A-43D3-8B79-37D633B846F1}">
+                <asvg:svgBlip xmlns:asvg="http://schemas.microsoft.com/office/drawing/2016/SVG/main" r:embed="rId11"/>
+              </a:ext>
+            </a:extLst>
+          </a:blip>
+          <a:stretch>
+            <a:fillRect/>
+          </a:stretch>
+        </p:blipFill>
+        <p:spPr>
+          <a:xfrm>
+            <a:off x="12448632" y="766147"/>
+            <a:ext cx="581567" cy="581567"/>
+          </a:xfrm>
+          <a:prstGeom prst="rect">
+            <a:avLst/>
+          </a:prstGeom>
+        </p:spPr>
+      </p:pic>
+      <p:pic>
+        <p:nvPicPr>
+          <p:cNvPr id="21" name="图形 20">
+            <a:extLst>
+              <a:ext uri="{FF2B5EF4-FFF2-40B4-BE49-F238E27FC236}">
+                <a16:creationId xmlns:a16="http://schemas.microsoft.com/office/drawing/2014/main" id="{361F637A-873E-48FD-A8E4-A010C3482D07}"/>
+              </a:ext>
+            </a:extLst>
+          </p:cNvPr>
+          <p:cNvPicPr>
+            <a:picLocks noChangeAspect="1"/>
+          </p:cNvPicPr>
+          <p:nvPr/>
+        </p:nvPicPr>
+        <p:blipFill>
+          <a:blip r:embed="rId10">
+            <a:extLst>
+              <a:ext uri="{28A0092B-C50C-407E-A947-70E740481C1C}">
+                <a14:useLocalDpi xmlns:a14="http://schemas.microsoft.com/office/drawing/2010/main" val="0"/>
+              </a:ext>
+              <a:ext uri="{96DAC541-7B7A-43D3-8B79-37D633B846F1}">
+                <asvg:svgBlip xmlns:asvg="http://schemas.microsoft.com/office/drawing/2016/SVG/main" r:embed="rId11"/>
+              </a:ext>
+            </a:extLst>
+          </a:blip>
+          <a:stretch>
+            <a:fillRect/>
+          </a:stretch>
+        </p:blipFill>
+        <p:spPr>
+          <a:xfrm>
+            <a:off x="7839172" y="74341"/>
+            <a:ext cx="581567" cy="581567"/>
+          </a:xfrm>
+          <a:prstGeom prst="rect">
+            <a:avLst/>
+          </a:prstGeom>
+        </p:spPr>
+      </p:pic>
+      <p:pic>
+        <p:nvPicPr>
+          <p:cNvPr id="22" name="图形 21">
+            <a:extLst>
+              <a:ext uri="{FF2B5EF4-FFF2-40B4-BE49-F238E27FC236}">
+                <a16:creationId xmlns:a16="http://schemas.microsoft.com/office/drawing/2014/main" id="{2FEF85D4-5A40-4D70-ABEA-D97E8E27F8A8}"/>
+              </a:ext>
+            </a:extLst>
+          </p:cNvPr>
+          <p:cNvPicPr>
+            <a:picLocks noChangeAspect="1"/>
+          </p:cNvPicPr>
+          <p:nvPr/>
+        </p:nvPicPr>
+        <p:blipFill>
+          <a:blip r:embed="rId10">
+            <a:extLst>
+              <a:ext uri="{28A0092B-C50C-407E-A947-70E740481C1C}">
+                <a14:useLocalDpi xmlns:a14="http://schemas.microsoft.com/office/drawing/2010/main" val="0"/>
+              </a:ext>
+              <a:ext uri="{96DAC541-7B7A-43D3-8B79-37D633B846F1}">
+                <asvg:svgBlip xmlns:asvg="http://schemas.microsoft.com/office/drawing/2016/SVG/main" r:embed="rId11"/>
+              </a:ext>
+            </a:extLst>
+          </a:blip>
+          <a:stretch>
+            <a:fillRect/>
+          </a:stretch>
+        </p:blipFill>
+        <p:spPr>
+          <a:xfrm>
+            <a:off x="-1052175" y="1898268"/>
+            <a:ext cx="932103" cy="932103"/>
+          </a:xfrm>
+          <a:prstGeom prst="rect">
+            <a:avLst/>
+          </a:prstGeom>
+        </p:spPr>
+      </p:pic>
+    </p:spTree>
+    <p:extLst>
+      <p:ext uri="{BB962C8B-B14F-4D97-AF65-F5344CB8AC3E}">
+        <p14:creationId xmlns:p14="http://schemas.microsoft.com/office/powerpoint/2010/main" val="2745808778"/>
+      </p:ext>
+    </p:extLst>
+  </p:cSld>
+  <p:clrMapOvr>
+    <a:masterClrMapping/>
+  </p:clrMapOvr>
+  <p:timing>
+    <p:tnLst>
+      <p:par>
+        <p:cTn id="1" dur="indefinite" restart="never" nodeType="tmRoot">
+          <p:childTnLst>
+            <p:seq concurrent="1" nextAc="seek">
+              <p:cTn id="2" dur="indefinite" nodeType="mainSeq">
+                <p:childTnLst>
+                  <p:par>
+                    <p:cTn id="3" fill="hold">
+                      <p:stCondLst>
+                        <p:cond delay="indefinite"/>
+                      </p:stCondLst>
+                      <p:childTnLst>
+                        <p:par>
+                          <p:cTn id="4" fill="hold">
+                            <p:stCondLst>
+                              <p:cond delay="0"/>
+                            </p:stCondLst>
+                            <p:childTnLst>
+                              <p:par>
+                                <p:cTn id="5" presetID="31" presetClass="entr" presetSubtype="0" repeatCount="indefinite" fill="hold" nodeType="clickEffect">
+                                  <p:stCondLst>
+                                    <p:cond delay="6400"/>
+                                  </p:stCondLst>
+                                  <p:childTnLst>
+                                    <p:set>
+                                      <p:cBhvr>
+                                        <p:cTn id="6" dur="1" fill="hold">
+                                          <p:stCondLst>
+                                            <p:cond delay="0"/>
+                                          </p:stCondLst>
+                                        </p:cTn>
+                                        <p:tgtEl>
+                                          <p:spTgt spid="10"/>
+                                        </p:tgtEl>
+                                        <p:attrNameLst>
+                                          <p:attrName>style.visibility</p:attrName>
+                                        </p:attrNameLst>
+                                      </p:cBhvr>
+                                      <p:to>
+                                        <p:strVal val="visible"/>
+                                      </p:to>
+                                    </p:set>
+                                    <p:anim calcmode="lin" valueType="num">
+                                      <p:cBhvr>
+                                        <p:cTn id="7" dur="1000" fill="hold"/>
+                                        <p:tgtEl>
+                                          <p:spTgt spid="10"/>
+                                        </p:tgtEl>
+                                        <p:attrNameLst>
+                                          <p:attrName>ppt_w</p:attrName>
+                                        </p:attrNameLst>
+                                      </p:cBhvr>
+                                      <p:tavLst>
+                                        <p:tav tm="0">
+                                          <p:val>
+                                            <p:fltVal val="0"/>
+                                          </p:val>
+                                        </p:tav>
+                                        <p:tav tm="100000">
+                                          <p:val>
+                                            <p:strVal val="#ppt_w"/>
+                                          </p:val>
+                                        </p:tav>
+                                      </p:tavLst>
+                                    </p:anim>
+                                    <p:anim calcmode="lin" valueType="num">
+                                      <p:cBhvr>
+                                        <p:cTn id="8" dur="1000" fill="hold"/>
+                                        <p:tgtEl>
+                                          <p:spTgt spid="10"/>
+                                        </p:tgtEl>
+                                        <p:attrNameLst>
+                                          <p:attrName>ppt_h</p:attrName>
+                                        </p:attrNameLst>
+                                      </p:cBhvr>
+                                      <p:tavLst>
+                                        <p:tav tm="0">
+                                          <p:val>
+                                            <p:fltVal val="0"/>
+                                          </p:val>
+                                        </p:tav>
+                                        <p:tav tm="100000">
+                                          <p:val>
+                                            <p:strVal val="#ppt_h"/>
+                                          </p:val>
+                                        </p:tav>
+                                      </p:tavLst>
+                                    </p:anim>
+                                    <p:anim calcmode="lin" valueType="num">
+                                      <p:cBhvr>
+                                        <p:cTn id="9" dur="1000" fill="hold"/>
+                                        <p:tgtEl>
+                                          <p:spTgt spid="10"/>
+                                        </p:tgtEl>
+                                        <p:attrNameLst>
+                                          <p:attrName>style.rotation</p:attrName>
+                                        </p:attrNameLst>
+                                      </p:cBhvr>
+                                      <p:tavLst>
+                                        <p:tav tm="0">
+                                          <p:val>
+                                            <p:fltVal val="90"/>
+                                          </p:val>
+                                        </p:tav>
+                                        <p:tav tm="100000">
+                                          <p:val>
+                                            <p:fltVal val="0"/>
+                                          </p:val>
+                                        </p:tav>
+                                      </p:tavLst>
+                                    </p:anim>
+                                    <p:animEffect transition="in" filter="fade">
+                                      <p:cBhvr>
+                                        <p:cTn id="10" dur="1000"/>
+                                        <p:tgtEl>
+                                          <p:spTgt spid="10"/>
+                                        </p:tgtEl>
+                                      </p:cBhvr>
+                                    </p:animEffect>
+                                  </p:childTnLst>
+                                </p:cTn>
+                              </p:par>
+                              <p:par>
+                                <p:cTn id="11" presetID="31" presetClass="entr" presetSubtype="0" repeatCount="indefinite" fill="hold" nodeType="withEffect">
+                                  <p:stCondLst>
+                                    <p:cond delay="0"/>
+                                  </p:stCondLst>
+                                  <p:childTnLst>
+                                    <p:set>
+                                      <p:cBhvr>
+                                        <p:cTn id="12" dur="1" fill="hold">
+                                          <p:stCondLst>
+                                            <p:cond delay="0"/>
+                                          </p:stCondLst>
+                                        </p:cTn>
+                                        <p:tgtEl>
+                                          <p:spTgt spid="12"/>
+                                        </p:tgtEl>
+                                        <p:attrNameLst>
+                                          <p:attrName>style.visibility</p:attrName>
+                                        </p:attrNameLst>
+                                      </p:cBhvr>
+                                      <p:to>
+                                        <p:strVal val="visible"/>
+                                      </p:to>
+                                    </p:set>
+                                    <p:anim calcmode="lin" valueType="num">
+                                      <p:cBhvr>
+                                        <p:cTn id="13" dur="1000" fill="hold"/>
+                                        <p:tgtEl>
+                                          <p:spTgt spid="12"/>
+                                        </p:tgtEl>
+                                        <p:attrNameLst>
+                                          <p:attrName>ppt_w</p:attrName>
+                                        </p:attrNameLst>
+                                      </p:cBhvr>
+                                      <p:tavLst>
+                                        <p:tav tm="0">
+                                          <p:val>
+                                            <p:fltVal val="0"/>
+                                          </p:val>
+                                        </p:tav>
+                                        <p:tav tm="100000">
+                                          <p:val>
+                                            <p:strVal val="#ppt_w"/>
+                                          </p:val>
+                                        </p:tav>
+                                      </p:tavLst>
+                                    </p:anim>
+                                    <p:anim calcmode="lin" valueType="num">
+                                      <p:cBhvr>
+                                        <p:cTn id="14" dur="1000" fill="hold"/>
+                                        <p:tgtEl>
+                                          <p:spTgt spid="12"/>
+                                        </p:tgtEl>
+                                        <p:attrNameLst>
+                                          <p:attrName>ppt_h</p:attrName>
+                                        </p:attrNameLst>
+                                      </p:cBhvr>
+                                      <p:tavLst>
+                                        <p:tav tm="0">
+                                          <p:val>
+                                            <p:fltVal val="0"/>
+                                          </p:val>
+                                        </p:tav>
+                                        <p:tav tm="100000">
+                                          <p:val>
+                                            <p:strVal val="#ppt_h"/>
+                                          </p:val>
+                                        </p:tav>
+                                      </p:tavLst>
+                                    </p:anim>
+                                    <p:anim calcmode="lin" valueType="num">
+                                      <p:cBhvr>
+                                        <p:cTn id="15" dur="1000" fill="hold"/>
+                                        <p:tgtEl>
+                                          <p:spTgt spid="12"/>
+                                        </p:tgtEl>
+                                        <p:attrNameLst>
+                                          <p:attrName>style.rotation</p:attrName>
+                                        </p:attrNameLst>
+                                      </p:cBhvr>
+                                      <p:tavLst>
+                                        <p:tav tm="0">
+                                          <p:val>
+                                            <p:fltVal val="90"/>
+                                          </p:val>
+                                        </p:tav>
+                                        <p:tav tm="100000">
+                                          <p:val>
+                                            <p:fltVal val="0"/>
+                                          </p:val>
+                                        </p:tav>
+                                      </p:tavLst>
+                                    </p:anim>
+                                    <p:animEffect transition="in" filter="fade">
+                                      <p:cBhvr>
+                                        <p:cTn id="16" dur="1000"/>
+                                        <p:tgtEl>
+                                          <p:spTgt spid="12"/>
+                                        </p:tgtEl>
+                                      </p:cBhvr>
+                                    </p:animEffect>
+                                  </p:childTnLst>
+                                </p:cTn>
+                              </p:par>
+                              <p:par>
+                                <p:cTn id="17" presetID="31" presetClass="entr" presetSubtype="0" repeatCount="indefinite" fill="hold" nodeType="withEffect">
+                                  <p:stCondLst>
+                                    <p:cond delay="2100"/>
+                                  </p:stCondLst>
+                                  <p:childTnLst>
+                                    <p:set>
+                                      <p:cBhvr>
+                                        <p:cTn id="18" dur="1" fill="hold">
+                                          <p:stCondLst>
+                                            <p:cond delay="0"/>
+                                          </p:stCondLst>
+                                        </p:cTn>
+                                        <p:tgtEl>
+                                          <p:spTgt spid="11"/>
+                                        </p:tgtEl>
+                                        <p:attrNameLst>
+                                          <p:attrName>style.visibility</p:attrName>
+                                        </p:attrNameLst>
+                                      </p:cBhvr>
+                                      <p:to>
+                                        <p:strVal val="visible"/>
+                                      </p:to>
+                                    </p:set>
+                                    <p:anim calcmode="lin" valueType="num">
+                                      <p:cBhvr>
+                                        <p:cTn id="19" dur="1000" fill="hold"/>
+                                        <p:tgtEl>
+                                          <p:spTgt spid="11"/>
+                                        </p:tgtEl>
+                                        <p:attrNameLst>
+                                          <p:attrName>ppt_w</p:attrName>
+                                        </p:attrNameLst>
+                                      </p:cBhvr>
+                                      <p:tavLst>
+                                        <p:tav tm="0">
+                                          <p:val>
+                                            <p:fltVal val="0"/>
+                                          </p:val>
+                                        </p:tav>
+                                        <p:tav tm="100000">
+                                          <p:val>
+                                            <p:strVal val="#ppt_w"/>
+                                          </p:val>
+                                        </p:tav>
+                                      </p:tavLst>
+                                    </p:anim>
+                                    <p:anim calcmode="lin" valueType="num">
+                                      <p:cBhvr>
+                                        <p:cTn id="20" dur="1000" fill="hold"/>
+                                        <p:tgtEl>
+                                          <p:spTgt spid="11"/>
+                                        </p:tgtEl>
+                                        <p:attrNameLst>
+                                          <p:attrName>ppt_h</p:attrName>
+                                        </p:attrNameLst>
+                                      </p:cBhvr>
+                                      <p:tavLst>
+                                        <p:tav tm="0">
+                                          <p:val>
+                                            <p:fltVal val="0"/>
+                                          </p:val>
+                                        </p:tav>
+                                        <p:tav tm="100000">
+                                          <p:val>
+                                            <p:strVal val="#ppt_h"/>
+                                          </p:val>
+                                        </p:tav>
+                                      </p:tavLst>
+                                    </p:anim>
+                                    <p:anim calcmode="lin" valueType="num">
+                                      <p:cBhvr>
+                                        <p:cTn id="21" dur="1000" fill="hold"/>
+                                        <p:tgtEl>
+                                          <p:spTgt spid="11"/>
+                                        </p:tgtEl>
+                                        <p:attrNameLst>
+                                          <p:attrName>style.rotation</p:attrName>
+                                        </p:attrNameLst>
+                                      </p:cBhvr>
+                                      <p:tavLst>
+                                        <p:tav tm="0">
+                                          <p:val>
+                                            <p:fltVal val="90"/>
+                                          </p:val>
+                                        </p:tav>
+                                        <p:tav tm="100000">
+                                          <p:val>
+                                            <p:fltVal val="0"/>
+                                          </p:val>
+                                        </p:tav>
+                                      </p:tavLst>
+                                    </p:anim>
+                                    <p:animEffect transition="in" filter="fade">
+                                      <p:cBhvr>
+                                        <p:cTn id="22" dur="1000"/>
+                                        <p:tgtEl>
+                                          <p:spTgt spid="11"/>
+                                        </p:tgtEl>
+                                      </p:cBhvr>
+                                    </p:animEffect>
+                                  </p:childTnLst>
+                                </p:cTn>
+                              </p:par>
+                              <p:par>
+                                <p:cTn id="23" presetID="31" presetClass="entr" presetSubtype="0" repeatCount="indefinite" fill="hold" nodeType="withEffect">
+                                  <p:stCondLst>
+                                    <p:cond delay="3200"/>
+                                  </p:stCondLst>
+                                  <p:childTnLst>
+                                    <p:set>
+                                      <p:cBhvr>
+                                        <p:cTn id="24" dur="1" fill="hold">
+                                          <p:stCondLst>
+                                            <p:cond delay="0"/>
+                                          </p:stCondLst>
+                                        </p:cTn>
+                                        <p:tgtEl>
+                                          <p:spTgt spid="13"/>
+                                        </p:tgtEl>
+                                        <p:attrNameLst>
+                                          <p:attrName>style.visibility</p:attrName>
+                                        </p:attrNameLst>
+                                      </p:cBhvr>
+                                      <p:to>
+                                        <p:strVal val="visible"/>
+                                      </p:to>
+                                    </p:set>
+                                    <p:anim calcmode="lin" valueType="num">
+                                      <p:cBhvr>
+                                        <p:cTn id="25" dur="1000" fill="hold"/>
+                                        <p:tgtEl>
+                                          <p:spTgt spid="13"/>
+                                        </p:tgtEl>
+                                        <p:attrNameLst>
+                                          <p:attrName>ppt_w</p:attrName>
+                                        </p:attrNameLst>
+                                      </p:cBhvr>
+                                      <p:tavLst>
+                                        <p:tav tm="0">
+                                          <p:val>
+                                            <p:fltVal val="0"/>
+                                          </p:val>
+                                        </p:tav>
+                                        <p:tav tm="100000">
+                                          <p:val>
+                                            <p:strVal val="#ppt_w"/>
+                                          </p:val>
+                                        </p:tav>
+                                      </p:tavLst>
+                                    </p:anim>
+                                    <p:anim calcmode="lin" valueType="num">
+                                      <p:cBhvr>
+                                        <p:cTn id="26" dur="1000" fill="hold"/>
+                                        <p:tgtEl>
+                                          <p:spTgt spid="13"/>
+                                        </p:tgtEl>
+                                        <p:attrNameLst>
+                                          <p:attrName>ppt_h</p:attrName>
+                                        </p:attrNameLst>
+                                      </p:cBhvr>
+                                      <p:tavLst>
+                                        <p:tav tm="0">
+                                          <p:val>
+                                            <p:fltVal val="0"/>
+                                          </p:val>
+                                        </p:tav>
+                                        <p:tav tm="100000">
+                                          <p:val>
+                                            <p:strVal val="#ppt_h"/>
+                                          </p:val>
+                                        </p:tav>
+                                      </p:tavLst>
+                                    </p:anim>
+                                    <p:anim calcmode="lin" valueType="num">
+                                      <p:cBhvr>
+                                        <p:cTn id="27" dur="1000" fill="hold"/>
+                                        <p:tgtEl>
+                                          <p:spTgt spid="13"/>
+                                        </p:tgtEl>
+                                        <p:attrNameLst>
+                                          <p:attrName>style.rotation</p:attrName>
+                                        </p:attrNameLst>
+                                      </p:cBhvr>
+                                      <p:tavLst>
+                                        <p:tav tm="0">
+                                          <p:val>
+                                            <p:fltVal val="90"/>
+                                          </p:val>
+                                        </p:tav>
+                                        <p:tav tm="100000">
+                                          <p:val>
+                                            <p:fltVal val="0"/>
+                                          </p:val>
+                                        </p:tav>
+                                      </p:tavLst>
+                                    </p:anim>
+                                    <p:animEffect transition="in" filter="fade">
+                                      <p:cBhvr>
+                                        <p:cTn id="28" dur="1000"/>
+                                        <p:tgtEl>
+                                          <p:spTgt spid="13"/>
+                                        </p:tgtEl>
+                                      </p:cBhvr>
+                                    </p:animEffect>
+                                  </p:childTnLst>
+                                </p:cTn>
+                              </p:par>
+                              <p:par>
+                                <p:cTn id="29" presetID="31" presetClass="entr" presetSubtype="0" repeatCount="indefinite" fill="hold" nodeType="withEffect">
+                                  <p:stCondLst>
+                                    <p:cond delay="5000"/>
+                                  </p:stCondLst>
+                                  <p:childTnLst>
+                                    <p:set>
+                                      <p:cBhvr>
+                                        <p:cTn id="30" dur="1" fill="hold">
+                                          <p:stCondLst>
+                                            <p:cond delay="0"/>
+                                          </p:stCondLst>
+                                        </p:cTn>
+                                        <p:tgtEl>
+                                          <p:spTgt spid="14"/>
+                                        </p:tgtEl>
+                                        <p:attrNameLst>
+                                          <p:attrName>style.visibility</p:attrName>
+                                        </p:attrNameLst>
+                                      </p:cBhvr>
+                                      <p:to>
+                                        <p:strVal val="visible"/>
+                                      </p:to>
+                                    </p:set>
+                                    <p:anim calcmode="lin" valueType="num">
+                                      <p:cBhvr>
+                                        <p:cTn id="31" dur="1000" fill="hold"/>
+                                        <p:tgtEl>
+                                          <p:spTgt spid="14"/>
+                                        </p:tgtEl>
+                                        <p:attrNameLst>
+                                          <p:attrName>ppt_w</p:attrName>
+                                        </p:attrNameLst>
+                                      </p:cBhvr>
+                                      <p:tavLst>
+                                        <p:tav tm="0">
+                                          <p:val>
+                                            <p:fltVal val="0"/>
+                                          </p:val>
+                                        </p:tav>
+                                        <p:tav tm="100000">
+                                          <p:val>
+                                            <p:strVal val="#ppt_w"/>
+                                          </p:val>
+                                        </p:tav>
+                                      </p:tavLst>
+                                    </p:anim>
+                                    <p:anim calcmode="lin" valueType="num">
+                                      <p:cBhvr>
+                                        <p:cTn id="32" dur="1000" fill="hold"/>
+                                        <p:tgtEl>
+                                          <p:spTgt spid="14"/>
+                                        </p:tgtEl>
+                                        <p:attrNameLst>
+                                          <p:attrName>ppt_h</p:attrName>
+                                        </p:attrNameLst>
+                                      </p:cBhvr>
+                                      <p:tavLst>
+                                        <p:tav tm="0">
+                                          <p:val>
+                                            <p:fltVal val="0"/>
+                                          </p:val>
+                                        </p:tav>
+                                        <p:tav tm="100000">
+                                          <p:val>
+                                            <p:strVal val="#ppt_h"/>
+                                          </p:val>
+                                        </p:tav>
+                                      </p:tavLst>
+                                    </p:anim>
+                                    <p:anim calcmode="lin" valueType="num">
+                                      <p:cBhvr>
+                                        <p:cTn id="33" dur="1000" fill="hold"/>
+                                        <p:tgtEl>
+                                          <p:spTgt spid="14"/>
+                                        </p:tgtEl>
+                                        <p:attrNameLst>
+                                          <p:attrName>style.rotation</p:attrName>
+                                        </p:attrNameLst>
+                                      </p:cBhvr>
+                                      <p:tavLst>
+                                        <p:tav tm="0">
+                                          <p:val>
+                                            <p:fltVal val="90"/>
+                                          </p:val>
+                                        </p:tav>
+                                        <p:tav tm="100000">
+                                          <p:val>
+                                            <p:fltVal val="0"/>
+                                          </p:val>
+                                        </p:tav>
+                                      </p:tavLst>
+                                    </p:anim>
+                                    <p:animEffect transition="in" filter="fade">
+                                      <p:cBhvr>
+                                        <p:cTn id="34" dur="1000"/>
+                                        <p:tgtEl>
+                                          <p:spTgt spid="14"/>
+                                        </p:tgtEl>
+                                      </p:cBhvr>
+                                    </p:animEffect>
+                                  </p:childTnLst>
+                                </p:cTn>
+                              </p:par>
+                              <p:par>
+                                <p:cTn id="35" presetID="44" presetClass="path" presetSubtype="0" fill="hold" nodeType="withEffect">
+                                  <p:stCondLst>
+                                    <p:cond delay="0"/>
+                                  </p:stCondLst>
+                                  <p:childTnLst>
+                                    <p:animMotion origin="layout" path="M -3.125E-6 -4.81481E-6 C 0.09818 -0.02175 0.19219 -0.08217 0.29024 -0.10439 C 0.35157 -0.11921 0.46368 -0.15578 0.54948 -0.14953 C 0.63516 -0.14305 0.74362 -0.08125 0.80495 -0.06643 C 0.90339 -0.04444 0.98008 0.02038 1.07878 0.04306 " pathEditMode="relative" rAng="0" ptsTypes="AAAAA">
+                                      <p:cBhvr>
+                                        <p:cTn id="36" dur="10000" fill="hold"/>
+                                        <p:tgtEl>
+                                          <p:spTgt spid="15"/>
+                                        </p:tgtEl>
+                                        <p:attrNameLst>
+                                          <p:attrName>ppt_x</p:attrName>
+                                          <p:attrName>ppt_y</p:attrName>
+                                        </p:attrNameLst>
+                                      </p:cBhvr>
+                                      <p:rCtr x="53932" y="-5370"/>
+                                    </p:animMotion>
+                                  </p:childTnLst>
+                                </p:cTn>
+                              </p:par>
+                              <p:par>
+                                <p:cTn id="37" presetID="63" presetClass="path" presetSubtype="0" fill="hold" nodeType="withEffect">
+                                  <p:stCondLst>
+                                    <p:cond delay="500"/>
+                                  </p:stCondLst>
+                                  <p:childTnLst>
+                                    <p:animMotion origin="layout" path="M 3.54167E-6 2.96296E-6 L 1.07161 0.00023 " pathEditMode="relative" rAng="0" ptsTypes="AA">
+                                      <p:cBhvr>
+                                        <p:cTn id="38" dur="5000" fill="hold"/>
+                                        <p:tgtEl>
+                                          <p:spTgt spid="17"/>
+                                        </p:tgtEl>
+                                        <p:attrNameLst>
+                                          <p:attrName>ppt_x</p:attrName>
+                                          <p:attrName>ppt_y</p:attrName>
+                                        </p:attrNameLst>
+                                      </p:cBhvr>
+                                      <p:rCtr x="53581" y="0"/>
+                                    </p:animMotion>
+                                  </p:childTnLst>
+                                </p:cTn>
+                              </p:par>
+                              <p:par>
+                                <p:cTn id="39" presetID="63" presetClass="path" presetSubtype="0" fill="hold" nodeType="withEffect">
+                                  <p:stCondLst>
+                                    <p:cond delay="0"/>
+                                  </p:stCondLst>
+                                  <p:childTnLst>
+                                    <p:animMotion origin="layout" path="M -4.375E-6 4.07407E-6 L 1.07162 0.00023 " pathEditMode="relative" rAng="0" ptsTypes="AA">
+                                      <p:cBhvr>
+                                        <p:cTn id="40" dur="5000" fill="hold"/>
+                                        <p:tgtEl>
+                                          <p:spTgt spid="18"/>
+                                        </p:tgtEl>
+                                        <p:attrNameLst>
+                                          <p:attrName>ppt_x</p:attrName>
+                                          <p:attrName>ppt_y</p:attrName>
+                                        </p:attrNameLst>
+                                      </p:cBhvr>
+                                      <p:rCtr x="53581" y="0"/>
+                                    </p:animMotion>
+                                  </p:childTnLst>
+                                </p:cTn>
+                              </p:par>
+                              <p:par>
+                                <p:cTn id="41" presetID="63" presetClass="path" presetSubtype="0" fill="hold" nodeType="withEffect">
+                                  <p:stCondLst>
+                                    <p:cond delay="500"/>
+                                  </p:stCondLst>
+                                  <p:childTnLst>
+                                    <p:animMotion origin="layout" path="M 1.66667E-6 -1.85185E-6 L 1.07161 0.00023 " pathEditMode="relative" rAng="0" ptsTypes="AA">
+                                      <p:cBhvr>
+                                        <p:cTn id="42" dur="5000" fill="hold"/>
+                                        <p:tgtEl>
+                                          <p:spTgt spid="19"/>
+                                        </p:tgtEl>
+                                        <p:attrNameLst>
+                                          <p:attrName>ppt_x</p:attrName>
+                                          <p:attrName>ppt_y</p:attrName>
+                                        </p:attrNameLst>
+                                      </p:cBhvr>
+                                      <p:rCtr x="53581" y="0"/>
+                                    </p:animMotion>
+                                  </p:childTnLst>
+                                </p:cTn>
+                              </p:par>
+                              <p:par>
+                                <p:cTn id="43" presetID="35" presetClass="path" presetSubtype="0" accel="50000" decel="50000" fill="hold" nodeType="withEffect">
+                                  <p:stCondLst>
+                                    <p:cond delay="3200"/>
+                                  </p:stCondLst>
+                                  <p:childTnLst>
+                                    <p:animMotion origin="layout" path="M -1.875E-6 3.33333E-6 L -1.07591 -0.00139 " pathEditMode="relative" rAng="0" ptsTypes="AA">
+                                      <p:cBhvr>
+                                        <p:cTn id="44" dur="5000" fill="hold"/>
+                                        <p:tgtEl>
+                                          <p:spTgt spid="20"/>
+                                        </p:tgtEl>
+                                        <p:attrNameLst>
+                                          <p:attrName>ppt_x</p:attrName>
+                                          <p:attrName>ppt_y</p:attrName>
+                                        </p:attrNameLst>
+                                      </p:cBhvr>
+                                      <p:rCtr x="-53802" y="-69"/>
+                                    </p:animMotion>
+                                  </p:childTnLst>
+                                </p:cTn>
+                              </p:par>
+                              <p:par>
+                                <p:cTn id="45" presetID="35" presetClass="path" presetSubtype="0" accel="50000" decel="50000" fill="hold" nodeType="withEffect">
+                                  <p:stCondLst>
+                                    <p:cond delay="0"/>
+                                  </p:stCondLst>
+                                  <p:childTnLst>
+                                    <p:animMotion origin="layout" path="M 3.125E-6 -7.40741E-7 L -1.07591 -0.00139 " pathEditMode="relative" rAng="0" ptsTypes="AA">
+                                      <p:cBhvr>
+                                        <p:cTn id="46" dur="5000" fill="hold"/>
+                                        <p:tgtEl>
+                                          <p:spTgt spid="21"/>
+                                        </p:tgtEl>
+                                        <p:attrNameLst>
+                                          <p:attrName>ppt_x</p:attrName>
+                                          <p:attrName>ppt_y</p:attrName>
+                                        </p:attrNameLst>
+                                      </p:cBhvr>
+                                      <p:rCtr x="-53802" y="-69"/>
+                                    </p:animMotion>
+                                  </p:childTnLst>
+                                </p:cTn>
+                              </p:par>
+                              <p:par>
+                                <p:cTn id="47" presetID="63" presetClass="path" presetSubtype="0" fill="hold" nodeType="withEffect">
+                                  <p:stCondLst>
+                                    <p:cond delay="2200"/>
+                                  </p:stCondLst>
+                                  <p:childTnLst>
+                                    <p:animMotion origin="layout" path="M -3.125E-6 4.07407E-6 L 1.07162 0.00023 " pathEditMode="relative" rAng="0" ptsTypes="AA">
+                                      <p:cBhvr>
+                                        <p:cTn id="48" dur="5000" fill="hold"/>
+                                        <p:tgtEl>
+                                          <p:spTgt spid="22"/>
+                                        </p:tgtEl>
+                                        <p:attrNameLst>
+                                          <p:attrName>ppt_x</p:attrName>
+                                          <p:attrName>ppt_y</p:attrName>
+                                        </p:attrNameLst>
+                                      </p:cBhvr>
+                                      <p:rCtr x="53581" y="0"/>
+                                    </p:animMotion>
+                                  </p:childTnLst>
+                                </p:cTn>
+                              </p:par>
+                            </p:childTnLst>
+                          </p:cTn>
+                        </p:par>
+                      </p:childTnLst>
+                    </p:cTn>
+                  </p:par>
+                </p:childTnLst>
+              </p:cTn>
+              <p:prevCondLst>
+                <p:cond evt="onPrev" delay="0">
+                  <p:tgtEl>
+                    <p:sldTgt/>
+                  </p:tgtEl>
+                </p:cond>
+              </p:prevCondLst>
+              <p:nextCondLst>
+                <p:cond evt="onNext" delay="0">
+                  <p:tgtEl>
+                    <p:sldTgt/>
+                  </p:tgtEl>
+                </p:cond>
+              </p:nextCondLst>
+            </p:seq>
+          </p:childTnLst>
+        </p:cTn>
+      </p:par>
+    </p:tnLst>
   </p:timing>
 </p:sld>
 </file>
